--- a/4/РОП/Практики_1-8/Презентации/РОП_Практическая_2_АлбахтинИВ.pptx
+++ b/4/РОП/Практики_1-8/Презентации/РОП_Практическая_2_АлбахтинИВ.pptx
@@ -2,18 +2,22 @@
 <file path=ppt/presentation.xml><?xml version="1.0" encoding="utf-8"?>
 <p:presentation xmlns:p="http://schemas.openxmlformats.org/presentationml/2006/main">
   <p:sldMasterIdLst>
-    <p:sldMasterId xmlns:r="http://schemas.openxmlformats.org/officeDocument/2006/relationships" id="2147483648" r:id="R5297191511f34a40"/>
+    <p:sldMasterId xmlns:r="http://schemas.openxmlformats.org/officeDocument/2006/relationships" id="2147483648" r:id="Rce27e07b7af54927"/>
   </p:sldMasterIdLst>
   <p:notesMasterIdLst>
-    <p:notesMasterId xmlns:r="http://schemas.openxmlformats.org/officeDocument/2006/relationships" r:id="R06387560b8a94e6f"/>
+    <p:notesMasterId xmlns:r="http://schemas.openxmlformats.org/officeDocument/2006/relationships" r:id="R27898d9a58b54fa9"/>
   </p:notesMasterIdLst>
   <p:sldIdLst>
-    <p:sldId xmlns:r="http://schemas.openxmlformats.org/officeDocument/2006/relationships" id="256" r:id="R63e7011306ac4994"/>
-    <p:sldId xmlns:r="http://schemas.openxmlformats.org/officeDocument/2006/relationships" id="257" r:id="R1a985e80caf945aa"/>
-    <p:sldId xmlns:r="http://schemas.openxmlformats.org/officeDocument/2006/relationships" id="258" r:id="R1143247f8df045f7"/>
-    <p:sldId xmlns:r="http://schemas.openxmlformats.org/officeDocument/2006/relationships" id="259" r:id="R2dd79600df7a482f"/>
-    <p:sldId xmlns:r="http://schemas.openxmlformats.org/officeDocument/2006/relationships" id="260" r:id="R079f7e807d5343e1"/>
-    <p:sldId xmlns:r="http://schemas.openxmlformats.org/officeDocument/2006/relationships" id="261" r:id="R442da048339f4f42"/>
+    <p:sldId xmlns:r="http://schemas.openxmlformats.org/officeDocument/2006/relationships" id="256" r:id="R1444b47de6e841ad"/>
+    <p:sldId xmlns:r="http://schemas.openxmlformats.org/officeDocument/2006/relationships" id="257" r:id="R2900f1b5280e46fd"/>
+    <p:sldId xmlns:r="http://schemas.openxmlformats.org/officeDocument/2006/relationships" id="258" r:id="R70ed6bdfa231451f"/>
+    <p:sldId xmlns:r="http://schemas.openxmlformats.org/officeDocument/2006/relationships" id="259" r:id="Rf8e451a207b34d60"/>
+    <p:sldId xmlns:r="http://schemas.openxmlformats.org/officeDocument/2006/relationships" id="260" r:id="Rbe1a9242a7694f04"/>
+    <p:sldId xmlns:r="http://schemas.openxmlformats.org/officeDocument/2006/relationships" id="261" r:id="R3d766ebddff34504"/>
+    <p:sldId xmlns:r="http://schemas.openxmlformats.org/officeDocument/2006/relationships" id="262" r:id="R265c084f1ad64469"/>
+    <p:sldId xmlns:r="http://schemas.openxmlformats.org/officeDocument/2006/relationships" id="263" r:id="R23de7ee831c44ea1"/>
+    <p:sldId xmlns:r="http://schemas.openxmlformats.org/officeDocument/2006/relationships" id="264" r:id="Ra740c3197a3b4322"/>
+    <p:sldId xmlns:r="http://schemas.openxmlformats.org/officeDocument/2006/relationships" id="265" r:id="Rbf016e4c05564332"/>
   </p:sldIdLst>
   <p:sldSz cx="12192000" cy="6858000"/>
   <p:notesSz cx="6858000" cy="9144000"/>
@@ -482,6 +486,81 @@
 </p:notes>
 </file>
 
+<file path=ppt/notesSlides/notesSlide10.xml><?xml version="1.0" encoding="utf-8"?>
+<p:notes xmlns:p="http://schemas.openxmlformats.org/presentationml/2006/main">
+  <p:cSld>
+    <p:spTree>
+      <p:nvGrpSpPr>
+        <p:cNvPr id="1" name=""/>
+        <p:cNvGrpSpPr/>
+        <p:nvPr/>
+      </p:nvGrpSpPr>
+      <p:grpSpPr>
+        <a:xfrm xmlns:a="http://schemas.openxmlformats.org/drawingml/2006/main"/>
+      </p:grpSpPr>
+      <p:sp>
+        <p:nvSpPr>
+          <p:cNvPr id="2" name="Slide Image Placeholder 1"/>
+          <p:cNvSpPr>
+            <a:spLocks xmlns:a="http://schemas.openxmlformats.org/drawingml/2006/main" noGrp="1"/>
+          </p:cNvSpPr>
+          <p:nvPr>
+            <p:ph type="sldImg" idx="0"/>
+          </p:nvPr>
+        </p:nvSpPr>
+        <p:spPr/>
+      </p:sp>
+      <p:sp>
+        <p:nvSpPr>
+          <p:cNvPr id="3" name="Notes Placeholder 2"/>
+          <p:cNvSpPr>
+            <a:spLocks xmlns:a="http://schemas.openxmlformats.org/drawingml/2006/main" noGrp="1"/>
+          </p:cNvSpPr>
+          <p:nvPr>
+            <p:ph type="body" idx="1"/>
+          </p:nvPr>
+        </p:nvSpPr>
+        <p:spPr/>
+        <p:txBody>
+          <a:bodyPr xmlns:a="http://schemas.openxmlformats.org/drawingml/2006/main"/>
+          <a:lstStyle xmlns:a="http://schemas.openxmlformats.org/drawingml/2006/main"/>
+          <a:p xmlns:a="http://schemas.openxmlformats.org/drawingml/2006/main">
+            <a:r>
+              <a:t>Методические материалы РОП, практические занятия 1–8, 2026–2027. Вариант: первая практика Албахтина И.В. Полные схемы и описание: единый отчёт в комплекте. Все параметры нагрузки и примеры расчётов — учебные проектные значения.</a:t>
+            </a:r>
+          </a:p>
+          <a:p xmlns:a="http://schemas.openxmlformats.org/drawingml/2006/main">
+            <a:r>
+              <a:t/>
+            </a:r>
+          </a:p>
+        </p:txBody>
+      </p:sp>
+      <p:sp>
+        <p:nvSpPr>
+          <p:cNvPr id="4" name="Slide Number Placeholder 3"/>
+          <p:cNvSpPr>
+            <a:spLocks xmlns:a="http://schemas.openxmlformats.org/drawingml/2006/main" noGrp="1"/>
+          </p:cNvSpPr>
+          <p:nvPr>
+            <p:ph type="sldNum" idx="5"/>
+          </p:nvPr>
+        </p:nvSpPr>
+        <p:spPr/>
+        <p:txBody>
+          <a:bodyPr xmlns:a="http://schemas.openxmlformats.org/drawingml/2006/main"/>
+          <a:lstStyle xmlns:a="http://schemas.openxmlformats.org/drawingml/2006/main"/>
+          <a:p xmlns:a="http://schemas.openxmlformats.org/drawingml/2006/main"/>
+        </p:txBody>
+      </p:sp>
+    </p:spTree>
+  </p:cSld>
+  <p:clrMapOvr>
+    <a:masterClrMapping xmlns:a="http://schemas.openxmlformats.org/drawingml/2006/main"/>
+  </p:clrMapOvr>
+</p:notes>
+</file>
+
 <file path=ppt/notesSlides/notesSlide2.xml><?xml version="1.0" encoding="utf-8"?>
 <p:notes xmlns:p="http://schemas.openxmlformats.org/presentationml/2006/main">
   <p:cSld>
@@ -527,7 +606,7 @@
           </a:p>
           <a:p xmlns:a="http://schemas.openxmlformats.org/drawingml/2006/main">
             <a:r>
-              <a:t>Изображение из редактора OmniNotation. Редактируемый .nsbpmn находится в комплекте.</a:t>
+              <a:t/>
             </a:r>
           </a:p>
         </p:txBody>
@@ -783,6 +862,231 @@
 </file>
 
 <file path=ppt/notesSlides/notesSlide6.xml><?xml version="1.0" encoding="utf-8"?>
+<p:notes xmlns:p="http://schemas.openxmlformats.org/presentationml/2006/main">
+  <p:cSld>
+    <p:spTree>
+      <p:nvGrpSpPr>
+        <p:cNvPr id="1" name=""/>
+        <p:cNvGrpSpPr/>
+        <p:nvPr/>
+      </p:nvGrpSpPr>
+      <p:grpSpPr>
+        <a:xfrm xmlns:a="http://schemas.openxmlformats.org/drawingml/2006/main"/>
+      </p:grpSpPr>
+      <p:sp>
+        <p:nvSpPr>
+          <p:cNvPr id="2" name="Slide Image Placeholder 1"/>
+          <p:cNvSpPr>
+            <a:spLocks xmlns:a="http://schemas.openxmlformats.org/drawingml/2006/main" noGrp="1"/>
+          </p:cNvSpPr>
+          <p:nvPr>
+            <p:ph type="sldImg" idx="0"/>
+          </p:nvPr>
+        </p:nvSpPr>
+        <p:spPr/>
+      </p:sp>
+      <p:sp>
+        <p:nvSpPr>
+          <p:cNvPr id="3" name="Notes Placeholder 2"/>
+          <p:cNvSpPr>
+            <a:spLocks xmlns:a="http://schemas.openxmlformats.org/drawingml/2006/main" noGrp="1"/>
+          </p:cNvSpPr>
+          <p:nvPr>
+            <p:ph type="body" idx="1"/>
+          </p:nvPr>
+        </p:nvSpPr>
+        <p:spPr/>
+        <p:txBody>
+          <a:bodyPr xmlns:a="http://schemas.openxmlformats.org/drawingml/2006/main"/>
+          <a:lstStyle xmlns:a="http://schemas.openxmlformats.org/drawingml/2006/main"/>
+          <a:p xmlns:a="http://schemas.openxmlformats.org/drawingml/2006/main">
+            <a:r>
+              <a:t>Методические материалы РОП, практические занятия 1–8, 2026–2027. Вариант: первая практика Албахтина И.В. Полные схемы и описание: единый отчёт в комплекте. Все параметры нагрузки и примеры расчётов — учебные проектные значения.</a:t>
+            </a:r>
+          </a:p>
+          <a:p xmlns:a="http://schemas.openxmlformats.org/drawingml/2006/main">
+            <a:r>
+              <a:t/>
+            </a:r>
+          </a:p>
+        </p:txBody>
+      </p:sp>
+      <p:sp>
+        <p:nvSpPr>
+          <p:cNvPr id="4" name="Slide Number Placeholder 3"/>
+          <p:cNvSpPr>
+            <a:spLocks xmlns:a="http://schemas.openxmlformats.org/drawingml/2006/main" noGrp="1"/>
+          </p:cNvSpPr>
+          <p:nvPr>
+            <p:ph type="sldNum" idx="5"/>
+          </p:nvPr>
+        </p:nvSpPr>
+        <p:spPr/>
+        <p:txBody>
+          <a:bodyPr xmlns:a="http://schemas.openxmlformats.org/drawingml/2006/main"/>
+          <a:lstStyle xmlns:a="http://schemas.openxmlformats.org/drawingml/2006/main"/>
+          <a:p xmlns:a="http://schemas.openxmlformats.org/drawingml/2006/main"/>
+        </p:txBody>
+      </p:sp>
+    </p:spTree>
+  </p:cSld>
+  <p:clrMapOvr>
+    <a:masterClrMapping xmlns:a="http://schemas.openxmlformats.org/drawingml/2006/main"/>
+  </p:clrMapOvr>
+</p:notes>
+</file>
+
+<file path=ppt/notesSlides/notesSlide7.xml><?xml version="1.0" encoding="utf-8"?>
+<p:notes xmlns:p="http://schemas.openxmlformats.org/presentationml/2006/main">
+  <p:cSld>
+    <p:spTree>
+      <p:nvGrpSpPr>
+        <p:cNvPr id="1" name=""/>
+        <p:cNvGrpSpPr/>
+        <p:nvPr/>
+      </p:nvGrpSpPr>
+      <p:grpSpPr>
+        <a:xfrm xmlns:a="http://schemas.openxmlformats.org/drawingml/2006/main"/>
+      </p:grpSpPr>
+      <p:sp>
+        <p:nvSpPr>
+          <p:cNvPr id="2" name="Slide Image Placeholder 1"/>
+          <p:cNvSpPr>
+            <a:spLocks xmlns:a="http://schemas.openxmlformats.org/drawingml/2006/main" noGrp="1"/>
+          </p:cNvSpPr>
+          <p:nvPr>
+            <p:ph type="sldImg" idx="0"/>
+          </p:nvPr>
+        </p:nvSpPr>
+        <p:spPr/>
+      </p:sp>
+      <p:sp>
+        <p:nvSpPr>
+          <p:cNvPr id="3" name="Notes Placeholder 2"/>
+          <p:cNvSpPr>
+            <a:spLocks xmlns:a="http://schemas.openxmlformats.org/drawingml/2006/main" noGrp="1"/>
+          </p:cNvSpPr>
+          <p:nvPr>
+            <p:ph type="body" idx="1"/>
+          </p:nvPr>
+        </p:nvSpPr>
+        <p:spPr/>
+        <p:txBody>
+          <a:bodyPr xmlns:a="http://schemas.openxmlformats.org/drawingml/2006/main"/>
+          <a:lstStyle xmlns:a="http://schemas.openxmlformats.org/drawingml/2006/main"/>
+          <a:p xmlns:a="http://schemas.openxmlformats.org/drawingml/2006/main">
+            <a:r>
+              <a:t>Методические материалы РОП, практические занятия 1–8, 2026–2027. Вариант: первая практика Албахтина И.В. Полные схемы и описание: единый отчёт в комплекте. Все параметры нагрузки и примеры расчётов — учебные проектные значения.</a:t>
+            </a:r>
+          </a:p>
+          <a:p xmlns:a="http://schemas.openxmlformats.org/drawingml/2006/main">
+            <a:r>
+              <a:t/>
+            </a:r>
+          </a:p>
+        </p:txBody>
+      </p:sp>
+      <p:sp>
+        <p:nvSpPr>
+          <p:cNvPr id="4" name="Slide Number Placeholder 3"/>
+          <p:cNvSpPr>
+            <a:spLocks xmlns:a="http://schemas.openxmlformats.org/drawingml/2006/main" noGrp="1"/>
+          </p:cNvSpPr>
+          <p:nvPr>
+            <p:ph type="sldNum" idx="5"/>
+          </p:nvPr>
+        </p:nvSpPr>
+        <p:spPr/>
+        <p:txBody>
+          <a:bodyPr xmlns:a="http://schemas.openxmlformats.org/drawingml/2006/main"/>
+          <a:lstStyle xmlns:a="http://schemas.openxmlformats.org/drawingml/2006/main"/>
+          <a:p xmlns:a="http://schemas.openxmlformats.org/drawingml/2006/main"/>
+        </p:txBody>
+      </p:sp>
+    </p:spTree>
+  </p:cSld>
+  <p:clrMapOvr>
+    <a:masterClrMapping xmlns:a="http://schemas.openxmlformats.org/drawingml/2006/main"/>
+  </p:clrMapOvr>
+</p:notes>
+</file>
+
+<file path=ppt/notesSlides/notesSlide8.xml><?xml version="1.0" encoding="utf-8"?>
+<p:notes xmlns:p="http://schemas.openxmlformats.org/presentationml/2006/main">
+  <p:cSld>
+    <p:spTree>
+      <p:nvGrpSpPr>
+        <p:cNvPr id="1" name=""/>
+        <p:cNvGrpSpPr/>
+        <p:nvPr/>
+      </p:nvGrpSpPr>
+      <p:grpSpPr>
+        <a:xfrm xmlns:a="http://schemas.openxmlformats.org/drawingml/2006/main"/>
+      </p:grpSpPr>
+      <p:sp>
+        <p:nvSpPr>
+          <p:cNvPr id="2" name="Slide Image Placeholder 1"/>
+          <p:cNvSpPr>
+            <a:spLocks xmlns:a="http://schemas.openxmlformats.org/drawingml/2006/main" noGrp="1"/>
+          </p:cNvSpPr>
+          <p:nvPr>
+            <p:ph type="sldImg" idx="0"/>
+          </p:nvPr>
+        </p:nvSpPr>
+        <p:spPr/>
+      </p:sp>
+      <p:sp>
+        <p:nvSpPr>
+          <p:cNvPr id="3" name="Notes Placeholder 2"/>
+          <p:cNvSpPr>
+            <a:spLocks xmlns:a="http://schemas.openxmlformats.org/drawingml/2006/main" noGrp="1"/>
+          </p:cNvSpPr>
+          <p:nvPr>
+            <p:ph type="body" idx="1"/>
+          </p:nvPr>
+        </p:nvSpPr>
+        <p:spPr/>
+        <p:txBody>
+          <a:bodyPr xmlns:a="http://schemas.openxmlformats.org/drawingml/2006/main"/>
+          <a:lstStyle xmlns:a="http://schemas.openxmlformats.org/drawingml/2006/main"/>
+          <a:p xmlns:a="http://schemas.openxmlformats.org/drawingml/2006/main">
+            <a:r>
+              <a:t>Методические материалы РОП, практические занятия 1–8, 2026–2027. Вариант: первая практика Албахтина И.В. Полные схемы и описание: единый отчёт в комплекте. Все параметры нагрузки и примеры расчётов — учебные проектные значения.</a:t>
+            </a:r>
+          </a:p>
+          <a:p xmlns:a="http://schemas.openxmlformats.org/drawingml/2006/main">
+            <a:r>
+              <a:t/>
+            </a:r>
+          </a:p>
+        </p:txBody>
+      </p:sp>
+      <p:sp>
+        <p:nvSpPr>
+          <p:cNvPr id="4" name="Slide Number Placeholder 3"/>
+          <p:cNvSpPr>
+            <a:spLocks xmlns:a="http://schemas.openxmlformats.org/drawingml/2006/main" noGrp="1"/>
+          </p:cNvSpPr>
+          <p:nvPr>
+            <p:ph type="sldNum" idx="5"/>
+          </p:nvPr>
+        </p:nvSpPr>
+        <p:spPr/>
+        <p:txBody>
+          <a:bodyPr xmlns:a="http://schemas.openxmlformats.org/drawingml/2006/main"/>
+          <a:lstStyle xmlns:a="http://schemas.openxmlformats.org/drawingml/2006/main"/>
+          <a:p xmlns:a="http://schemas.openxmlformats.org/drawingml/2006/main"/>
+        </p:txBody>
+      </p:sp>
+    </p:spTree>
+  </p:cSld>
+  <p:clrMapOvr>
+    <a:masterClrMapping xmlns:a="http://schemas.openxmlformats.org/drawingml/2006/main"/>
+  </p:clrMapOvr>
+</p:notes>
+</file>
+
+<file path=ppt/notesSlides/notesSlide9.xml><?xml version="1.0" encoding="utf-8"?>
 <p:notes xmlns:p="http://schemas.openxmlformats.org/presentationml/2006/main">
   <p:cSld>
     <p:spTree>
@@ -895,7 +1199,7 @@
   </p:cSld>
   <p:clrMap bg1="lt1" tx1="dk1" bg2="lt2" tx2="dk2" accent1="accent1" accent2="accent2" accent3="accent3" accent4="accent4" accent5="accent5" accent6="accent6" hlink="hlink" folHlink="folHlink"/>
   <p:sldLayoutIdLst>
-    <p:sldLayoutId xmlns:r="http://schemas.openxmlformats.org/officeDocument/2006/relationships" id="2147483649" r:id="Rb538cda3454146a1"/>
+    <p:sldLayoutId xmlns:r="http://schemas.openxmlformats.org/officeDocument/2006/relationships" id="2147483649" r:id="R4c7a67f223a84253"/>
   </p:sldLayoutIdLst>
   <p:txStyles>
     <p:titleStyle>
@@ -1446,7 +1750,7 @@
           <p:cNvPr id="5" name="">
             <a:extLst xmlns:a="http://schemas.openxmlformats.org/drawingml/2006/main">
               <a:ext uri="{FF2B5EF4-FFF2-40B4-BE49-F238E27FC236}">
-                <a16:creationId xmlns:a16="http://schemas.microsoft.com/office/drawing/2014/main" id="{0423C37B-1FE3-4CB6-A3F8-AEB45C198A4E}"/>
+                <a16:creationId xmlns:a16="http://schemas.microsoft.com/office/drawing/2014/main" id="{F6FEFB8B-2D88-4716-92AF-6AEB90DD866A}"/>
               </a:ext>
             </a:extLst>
           </p:cNvPr>
@@ -1457,8 +1761,8 @@
         </p:nvSpPr>
         <p:spPr>
           <a:xfrm xmlns:a="http://schemas.openxmlformats.org/drawingml/2006/main">
-            <a:off x="552450" y="333375"/>
-            <a:ext cx="11049000" cy="857250"/>
+            <a:off x="552450" y="266700"/>
+            <a:ext cx="11049000" cy="742950"/>
           </a:xfrm>
           <a:prstGeom xmlns:a="http://schemas.openxmlformats.org/drawingml/2006/main" prst="rect">
             <a:avLst/>
@@ -1469,13 +1773,13 @@
           </a:ln>
         </p:spPr>
         <p:txBody>
-          <a:bodyPr xmlns:a="http://schemas.openxmlformats.org/drawingml/2006/main">
+          <a:bodyPr xmlns:a="http://schemas.openxmlformats.org/drawingml/2006/main" anchor="ctr">
             <a:noAutofit/>
           </a:bodyPr>
           <a:lstStyle xmlns:a="http://schemas.openxmlformats.org/drawingml/2006/main"/>
           <a:p xmlns:a="http://schemas.openxmlformats.org/drawingml/2006/main">
-            <a:pPr>
-              <a:defRPr sz="3150" b="1">
+            <a:pPr algn="l">
+              <a:defRPr sz="2700" b="1">
                 <a:solidFill>
                   <a:srgbClr val="161616"/>
                 </a:solidFill>
@@ -1485,7 +1789,7 @@
               </a:defRPr>
             </a:pPr>
             <a:r>
-              <a:rPr sz="3150" b="1">
+              <a:rPr sz="2700" b="1">
                 <a:solidFill>
                   <a:srgbClr val="161616"/>
                 </a:solidFill>
@@ -1503,7 +1807,7 @@
           <p:cNvPr id="2" name="">
             <a:extLst xmlns:a="http://schemas.openxmlformats.org/drawingml/2006/main">
               <a:ext uri="{FF2B5EF4-FFF2-40B4-BE49-F238E27FC236}">
-                <a16:creationId xmlns:a16="http://schemas.microsoft.com/office/drawing/2014/main" id="{27DA5DD0-4752-4A23-B49E-0AB89BE35CE4}"/>
+                <a16:creationId xmlns:a16="http://schemas.microsoft.com/office/drawing/2014/main" id="{DE982CB5-61C5-4EEB-98AB-3BCCEC9F48ED}"/>
               </a:ext>
             </a:extLst>
           </p:cNvPr>
@@ -1560,7 +1864,7 @@
           <p:cNvPr id="3" name="">
             <a:extLst xmlns:a="http://schemas.openxmlformats.org/drawingml/2006/main">
               <a:ext uri="{FF2B5EF4-FFF2-40B4-BE49-F238E27FC236}">
-                <a16:creationId xmlns:a16="http://schemas.microsoft.com/office/drawing/2014/main" id="{B2F52F42-F8B3-4CD7-89DD-9A487AB0061A}"/>
+                <a16:creationId xmlns:a16="http://schemas.microsoft.com/office/drawing/2014/main" id="{0AD4A068-CFB7-427C-9713-8A57517FF611}"/>
               </a:ext>
             </a:extLst>
           </p:cNvPr>
@@ -1607,7 +1911,7 @@
                 <a:ea typeface="Arial"/>
                 <a:cs typeface="Arial"/>
               </a:rPr>
-              <a:t>Версия BOM связывает состав, расчёты и публикацию карточки.</a:t>
+              <a:t>TO BE связывает проверенную версию модельного ряда, расчёты, контент и публикацию.</a:t>
             </a:r>
           </a:p>
         </p:txBody>
@@ -1617,7 +1921,7 @@
           <p:cNvPr id="4" name="">
             <a:extLst xmlns:a="http://schemas.openxmlformats.org/drawingml/2006/main">
               <a:ext uri="{FF2B5EF4-FFF2-40B4-BE49-F238E27FC236}">
-                <a16:creationId xmlns:a16="http://schemas.microsoft.com/office/drawing/2014/main" id="{8FECAB42-EC45-4A26-AA98-8151D149E06C}"/>
+                <a16:creationId xmlns:a16="http://schemas.microsoft.com/office/drawing/2014/main" id="{8A579162-666E-414D-8CCE-E06FBC0FCE2B}"/>
               </a:ext>
             </a:extLst>
           </p:cNvPr>
@@ -1695,7 +1999,378 @@
     </p:spTree>
     <p:extLst>
       <p:ext uri="{BB962C8B-B14F-4D97-AF65-F5344CB8AC3E}">
-        <p14:creationId xmlns:p14="http://schemas.microsoft.com/office/powerpoint/2010/main" val="313668737"/>
+        <p14:creationId xmlns:p14="http://schemas.microsoft.com/office/powerpoint/2010/main" val="1338108103"/>
+      </p:ext>
+    </p:extLst>
+  </p:cSld>
+</p:sld>
+</file>
+
+<file path=ppt/slides/slide10.xml><?xml version="1.0" encoding="utf-8"?>
+<p:sld xmlns:p="http://schemas.openxmlformats.org/presentationml/2006/main">
+  <p:cSld>
+    <p:bg>
+      <p:bgPr>
+        <a:solidFill xmlns:a="http://schemas.openxmlformats.org/drawingml/2006/main">
+          <a:srgbClr val="FFFFFF"/>
+        </a:solidFill>
+      </p:bgPr>
+    </p:bg>
+    <p:spTree>
+      <p:nvGrpSpPr>
+        <p:cNvPr id="1" name=""/>
+        <p:cNvGrpSpPr/>
+        <p:nvPr/>
+      </p:nvGrpSpPr>
+      <p:grpSpPr>
+        <a:xfrm xmlns:a="http://schemas.openxmlformats.org/drawingml/2006/main"/>
+      </p:grpSpPr>
+      <p:sp>
+        <p:nvSpPr>
+          <p:cNvPr id="7" name="">
+            <a:extLst xmlns:a="http://schemas.openxmlformats.org/drawingml/2006/main">
+              <a:ext uri="{FF2B5EF4-FFF2-40B4-BE49-F238E27FC236}">
+                <a16:creationId xmlns:a16="http://schemas.microsoft.com/office/drawing/2014/main" id="{F850D884-DF75-4E5C-A265-79E6BC321152}"/>
+              </a:ext>
+            </a:extLst>
+          </p:cNvPr>
+          <p:cNvSpPr>
+            <a:spLocks xmlns:a="http://schemas.openxmlformats.org/drawingml/2006/main" noGrp="1"/>
+          </p:cNvSpPr>
+          <p:nvPr/>
+        </p:nvSpPr>
+        <p:spPr>
+          <a:xfrm xmlns:a="http://schemas.openxmlformats.org/drawingml/2006/main">
+            <a:off x="552450" y="266700"/>
+            <a:ext cx="11049000" cy="742950"/>
+          </a:xfrm>
+          <a:prstGeom xmlns:a="http://schemas.openxmlformats.org/drawingml/2006/main" prst="rect">
+            <a:avLst/>
+          </a:prstGeom>
+          <a:noFill xmlns:a="http://schemas.openxmlformats.org/drawingml/2006/main"/>
+          <a:ln xmlns:a="http://schemas.openxmlformats.org/drawingml/2006/main" w="0">
+            <a:noFill/>
+          </a:ln>
+        </p:spPr>
+        <p:txBody>
+          <a:bodyPr xmlns:a="http://schemas.openxmlformats.org/drawingml/2006/main" anchor="ctr">
+            <a:noAutofit/>
+          </a:bodyPr>
+          <a:lstStyle xmlns:a="http://schemas.openxmlformats.org/drawingml/2006/main"/>
+          <a:p xmlns:a="http://schemas.openxmlformats.org/drawingml/2006/main">
+            <a:pPr algn="l">
+              <a:defRPr sz="2700" b="1">
+                <a:solidFill>
+                  <a:srgbClr val="161616"/>
+                </a:solidFill>
+                <a:latin typeface="Arial"/>
+                <a:ea typeface="Arial"/>
+                <a:cs typeface="Arial"/>
+              </a:defRPr>
+            </a:pPr>
+            <a:r>
+              <a:rPr sz="2700" b="1">
+                <a:solidFill>
+                  <a:srgbClr val="161616"/>
+                </a:solidFill>
+                <a:latin typeface="Arial"/>
+                <a:ea typeface="Arial"/>
+                <a:cs typeface="Arial"/>
+              </a:rPr>
+              <a:t>Результаты практики 2</a:t>
+            </a:r>
+          </a:p>
+        </p:txBody>
+      </p:sp>
+      <p:sp>
+        <p:nvSpPr>
+          <p:cNvPr id="2" name="">
+            <a:extLst xmlns:a="http://schemas.openxmlformats.org/drawingml/2006/main">
+              <a:ext uri="{FF2B5EF4-FFF2-40B4-BE49-F238E27FC236}">
+                <a16:creationId xmlns:a16="http://schemas.microsoft.com/office/drawing/2014/main" id="{A4ABB443-9B62-4D6B-99D7-EB59B8BEF558}"/>
+              </a:ext>
+            </a:extLst>
+          </p:cNvPr>
+          <p:cNvSpPr>
+            <a:spLocks xmlns:a="http://schemas.openxmlformats.org/drawingml/2006/main" noGrp="1"/>
+          </p:cNvSpPr>
+          <p:nvPr/>
+        </p:nvSpPr>
+        <p:spPr>
+          <a:xfrm xmlns:a="http://schemas.openxmlformats.org/drawingml/2006/main">
+            <a:off x="666750" y="1524000"/>
+            <a:ext cx="10763250" cy="914400"/>
+          </a:xfrm>
+          <a:prstGeom xmlns:a="http://schemas.openxmlformats.org/drawingml/2006/main" prst="rect">
+            <a:avLst/>
+          </a:prstGeom>
+          <a:noFill xmlns:a="http://schemas.openxmlformats.org/drawingml/2006/main"/>
+          <a:ln xmlns:a="http://schemas.openxmlformats.org/drawingml/2006/main" w="0">
+            <a:noFill/>
+          </a:ln>
+        </p:spPr>
+        <p:txBody>
+          <a:bodyPr xmlns:a="http://schemas.openxmlformats.org/drawingml/2006/main">
+            <a:noAutofit/>
+          </a:bodyPr>
+          <a:lstStyle xmlns:a="http://schemas.openxmlformats.org/drawingml/2006/main"/>
+          <a:p xmlns:a="http://schemas.openxmlformats.org/drawingml/2006/main">
+            <a:pPr>
+              <a:defRPr sz="2175" b="0">
+                <a:solidFill>
+                  <a:srgbClr val="161616"/>
+                </a:solidFill>
+                <a:latin typeface="Arial"/>
+                <a:ea typeface="Arial"/>
+                <a:cs typeface="Arial"/>
+              </a:defRPr>
+            </a:pPr>
+            <a:r>
+              <a:rPr sz="2175" b="0">
+                <a:solidFill>
+                  <a:srgbClr val="161616"/>
+                </a:solidFill>
+                <a:latin typeface="Arial"/>
+                <a:ea typeface="Arial"/>
+                <a:cs typeface="Arial"/>
+              </a:rPr>
+              <a:t>Запрос сразу создаёт черновую версию модельного ряда.</a:t>
+            </a:r>
+          </a:p>
+        </p:txBody>
+      </p:sp>
+      <p:sp>
+        <p:nvSpPr>
+          <p:cNvPr id="3" name="">
+            <a:extLst xmlns:a="http://schemas.openxmlformats.org/drawingml/2006/main">
+              <a:ext uri="{FF2B5EF4-FFF2-40B4-BE49-F238E27FC236}">
+                <a16:creationId xmlns:a16="http://schemas.microsoft.com/office/drawing/2014/main" id="{0834875B-877D-477C-9F9B-0F8A706121C1}"/>
+              </a:ext>
+            </a:extLst>
+          </p:cNvPr>
+          <p:cNvSpPr>
+            <a:spLocks xmlns:a="http://schemas.openxmlformats.org/drawingml/2006/main" noGrp="1"/>
+          </p:cNvSpPr>
+          <p:nvPr/>
+        </p:nvSpPr>
+        <p:spPr>
+          <a:xfrm xmlns:a="http://schemas.openxmlformats.org/drawingml/2006/main">
+            <a:off x="666750" y="2590800"/>
+            <a:ext cx="10763250" cy="914400"/>
+          </a:xfrm>
+          <a:prstGeom xmlns:a="http://schemas.openxmlformats.org/drawingml/2006/main" prst="rect">
+            <a:avLst/>
+          </a:prstGeom>
+          <a:noFill xmlns:a="http://schemas.openxmlformats.org/drawingml/2006/main"/>
+          <a:ln xmlns:a="http://schemas.openxmlformats.org/drawingml/2006/main" w="0">
+            <a:noFill/>
+          </a:ln>
+        </p:spPr>
+        <p:txBody>
+          <a:bodyPr xmlns:a="http://schemas.openxmlformats.org/drawingml/2006/main">
+            <a:noAutofit/>
+          </a:bodyPr>
+          <a:lstStyle xmlns:a="http://schemas.openxmlformats.org/drawingml/2006/main"/>
+          <a:p xmlns:a="http://schemas.openxmlformats.org/drawingml/2006/main">
+            <a:pPr>
+              <a:defRPr sz="2175" b="0">
+                <a:solidFill>
+                  <a:srgbClr val="161616"/>
+                </a:solidFill>
+                <a:latin typeface="Arial"/>
+                <a:ea typeface="Arial"/>
+                <a:cs typeface="Arial"/>
+              </a:defRPr>
+            </a:pPr>
+            <a:r>
+              <a:rPr sz="2175" b="0">
+                <a:solidFill>
+                  <a:srgbClr val="161616"/>
+                </a:solidFill>
+                <a:latin typeface="Arial"/>
+                <a:ea typeface="Arial"/>
+                <a:cs typeface="Arial"/>
+              </a:rPr>
+              <a:t>Правила проверяют совместимость, актуальность и полноту до публикации.</a:t>
+            </a:r>
+          </a:p>
+        </p:txBody>
+      </p:sp>
+      <p:sp>
+        <p:nvSpPr>
+          <p:cNvPr id="4" name="">
+            <a:extLst xmlns:a="http://schemas.openxmlformats.org/drawingml/2006/main">
+              <a:ext uri="{FF2B5EF4-FFF2-40B4-BE49-F238E27FC236}">
+                <a16:creationId xmlns:a16="http://schemas.microsoft.com/office/drawing/2014/main" id="{B1968688-8594-4EEB-ACF2-7D1D71717BBF}"/>
+              </a:ext>
+            </a:extLst>
+          </p:cNvPr>
+          <p:cNvSpPr>
+            <a:spLocks xmlns:a="http://schemas.openxmlformats.org/drawingml/2006/main" noGrp="1"/>
+          </p:cNvSpPr>
+          <p:nvPr/>
+        </p:nvSpPr>
+        <p:spPr>
+          <a:xfrm xmlns:a="http://schemas.openxmlformats.org/drawingml/2006/main">
+            <a:off x="666750" y="3657600"/>
+            <a:ext cx="10763250" cy="914400"/>
+          </a:xfrm>
+          <a:prstGeom xmlns:a="http://schemas.openxmlformats.org/drawingml/2006/main" prst="rect">
+            <a:avLst/>
+          </a:prstGeom>
+          <a:noFill xmlns:a="http://schemas.openxmlformats.org/drawingml/2006/main"/>
+          <a:ln xmlns:a="http://schemas.openxmlformats.org/drawingml/2006/main" w="0">
+            <a:noFill/>
+          </a:ln>
+        </p:spPr>
+        <p:txBody>
+          <a:bodyPr xmlns:a="http://schemas.openxmlformats.org/drawingml/2006/main">
+            <a:noAutofit/>
+          </a:bodyPr>
+          <a:lstStyle xmlns:a="http://schemas.openxmlformats.org/drawingml/2006/main"/>
+          <a:p xmlns:a="http://schemas.openxmlformats.org/drawingml/2006/main">
+            <a:pPr>
+              <a:defRPr sz="2175" b="0">
+                <a:solidFill>
+                  <a:srgbClr val="161616"/>
+                </a:solidFill>
+                <a:latin typeface="Arial"/>
+                <a:ea typeface="Arial"/>
+                <a:cs typeface="Arial"/>
+              </a:defRPr>
+            </a:pPr>
+            <a:r>
+              <a:rPr sz="2175" b="0">
+                <a:solidFill>
+                  <a:srgbClr val="161616"/>
+                </a:solidFill>
+                <a:latin typeface="Arial"/>
+                <a:ea typeface="Arial"/>
+                <a:cs typeface="Arial"/>
+              </a:rPr>
+              <a:t>Менеджер утверждает конкретную неизменяемую версию.</a:t>
+            </a:r>
+          </a:p>
+        </p:txBody>
+      </p:sp>
+      <p:sp>
+        <p:nvSpPr>
+          <p:cNvPr id="5" name="">
+            <a:extLst xmlns:a="http://schemas.openxmlformats.org/drawingml/2006/main">
+              <a:ext uri="{FF2B5EF4-FFF2-40B4-BE49-F238E27FC236}">
+                <a16:creationId xmlns:a16="http://schemas.microsoft.com/office/drawing/2014/main" id="{6A04CDBD-D8FB-4257-B5D0-2FF95412FAAF}"/>
+              </a:ext>
+            </a:extLst>
+          </p:cNvPr>
+          <p:cNvSpPr>
+            <a:spLocks xmlns:a="http://schemas.openxmlformats.org/drawingml/2006/main" noGrp="1"/>
+          </p:cNvSpPr>
+          <p:nvPr/>
+        </p:nvSpPr>
+        <p:spPr>
+          <a:xfrm xmlns:a="http://schemas.openxmlformats.org/drawingml/2006/main">
+            <a:off x="666750" y="4724400"/>
+            <a:ext cx="10763250" cy="914400"/>
+          </a:xfrm>
+          <a:prstGeom xmlns:a="http://schemas.openxmlformats.org/drawingml/2006/main" prst="rect">
+            <a:avLst/>
+          </a:prstGeom>
+          <a:noFill xmlns:a="http://schemas.openxmlformats.org/drawingml/2006/main"/>
+          <a:ln xmlns:a="http://schemas.openxmlformats.org/drawingml/2006/main" w="0">
+            <a:noFill/>
+          </a:ln>
+        </p:spPr>
+        <p:txBody>
+          <a:bodyPr xmlns:a="http://schemas.openxmlformats.org/drawingml/2006/main">
+            <a:noAutofit/>
+          </a:bodyPr>
+          <a:lstStyle xmlns:a="http://schemas.openxmlformats.org/drawingml/2006/main"/>
+          <a:p xmlns:a="http://schemas.openxmlformats.org/drawingml/2006/main">
+            <a:pPr>
+              <a:defRPr sz="2175" b="0">
+                <a:solidFill>
+                  <a:srgbClr val="161616"/>
+                </a:solidFill>
+                <a:latin typeface="Arial"/>
+                <a:ea typeface="Arial"/>
+                <a:cs typeface="Arial"/>
+              </a:defRPr>
+            </a:pPr>
+            <a:r>
+              <a:rPr sz="2175" b="0">
+                <a:solidFill>
+                  <a:srgbClr val="161616"/>
+                </a:solidFill>
+                <a:latin typeface="Arial"/>
+                <a:ea typeface="Arial"/>
+                <a:cs typeface="Arial"/>
+              </a:rPr>
+              <a:t>Worker сверяет неизвестный результат перед ограниченным повтором.</a:t>
+            </a:r>
+          </a:p>
+        </p:txBody>
+      </p:sp>
+      <p:sp>
+        <p:nvSpPr>
+          <p:cNvPr id="6" name="">
+            <a:extLst xmlns:a="http://schemas.openxmlformats.org/drawingml/2006/main">
+              <a:ext uri="{FF2B5EF4-FFF2-40B4-BE49-F238E27FC236}">
+                <a16:creationId xmlns:a16="http://schemas.microsoft.com/office/drawing/2014/main" id="{107EC6B3-44C4-43AB-82C9-51C68D47A44C}"/>
+              </a:ext>
+            </a:extLst>
+          </p:cNvPr>
+          <p:cNvSpPr>
+            <a:spLocks xmlns:a="http://schemas.openxmlformats.org/drawingml/2006/main" noGrp="1"/>
+          </p:cNvSpPr>
+          <p:nvPr/>
+        </p:nvSpPr>
+        <p:spPr>
+          <a:xfrm xmlns:a="http://schemas.openxmlformats.org/drawingml/2006/main">
+            <a:off x="666750" y="5791200"/>
+            <a:ext cx="10763250" cy="914400"/>
+          </a:xfrm>
+          <a:prstGeom xmlns:a="http://schemas.openxmlformats.org/drawingml/2006/main" prst="rect">
+            <a:avLst/>
+          </a:prstGeom>
+          <a:noFill xmlns:a="http://schemas.openxmlformats.org/drawingml/2006/main"/>
+          <a:ln xmlns:a="http://schemas.openxmlformats.org/drawingml/2006/main" w="0">
+            <a:noFill/>
+          </a:ln>
+        </p:spPr>
+        <p:txBody>
+          <a:bodyPr xmlns:a="http://schemas.openxmlformats.org/drawingml/2006/main">
+            <a:noAutofit/>
+          </a:bodyPr>
+          <a:lstStyle xmlns:a="http://schemas.openxmlformats.org/drawingml/2006/main"/>
+          <a:p xmlns:a="http://schemas.openxmlformats.org/drawingml/2006/main">
+            <a:pPr>
+              <a:defRPr sz="2175" b="0">
+                <a:solidFill>
+                  <a:srgbClr val="161616"/>
+                </a:solidFill>
+                <a:latin typeface="Arial"/>
+                <a:ea typeface="Arial"/>
+                <a:cs typeface="Arial"/>
+              </a:defRPr>
+            </a:pPr>
+            <a:r>
+              <a:rPr sz="2175" b="0">
+                <a:solidFill>
+                  <a:srgbClr val="161616"/>
+                </a:solidFill>
+                <a:latin typeface="Arial"/>
+                <a:ea typeface="Arial"/>
+                <a:cs typeface="Arial"/>
+              </a:rPr>
+              <a:t>PostgreSQL, хранилище, адаптеры и аудит поддерживают целевой процесс.</a:t>
+            </a:r>
+          </a:p>
+        </p:txBody>
+      </p:sp>
+    </p:spTree>
+    <p:extLst>
+      <p:ext uri="{BB962C8B-B14F-4D97-AF65-F5344CB8AC3E}">
+        <p14:creationId xmlns:p14="http://schemas.microsoft.com/office/powerpoint/2010/main" val="193277266"/>
       </p:ext>
     </p:extLst>
   </p:cSld>
@@ -1726,7 +2401,7 @@
           <p:cNvPr id="3" name="">
             <a:extLst xmlns:a="http://schemas.openxmlformats.org/drawingml/2006/main">
               <a:ext uri="{FF2B5EF4-FFF2-40B4-BE49-F238E27FC236}">
-                <a16:creationId xmlns:a16="http://schemas.microsoft.com/office/drawing/2014/main" id="{799B1577-65E3-494F-8D6E-7A76ACD12BDC}"/>
+                <a16:creationId xmlns:a16="http://schemas.microsoft.com/office/drawing/2014/main" id="{EFC2DFDC-C91B-4F53-A7DA-225190DB003F}"/>
               </a:ext>
             </a:extLst>
           </p:cNvPr>
@@ -1737,8 +2412,8 @@
         </p:nvSpPr>
         <p:spPr>
           <a:xfrm xmlns:a="http://schemas.openxmlformats.org/drawingml/2006/main">
-            <a:off x="552450" y="333375"/>
-            <a:ext cx="11049000" cy="857250"/>
+            <a:off x="552450" y="266700"/>
+            <a:ext cx="11049000" cy="742950"/>
           </a:xfrm>
           <a:prstGeom xmlns:a="http://schemas.openxmlformats.org/drawingml/2006/main" prst="rect">
             <a:avLst/>
@@ -1749,13 +2424,13 @@
           </a:ln>
         </p:spPr>
         <p:txBody>
-          <a:bodyPr xmlns:a="http://schemas.openxmlformats.org/drawingml/2006/main">
+          <a:bodyPr xmlns:a="http://schemas.openxmlformats.org/drawingml/2006/main" anchor="ctr">
             <a:noAutofit/>
           </a:bodyPr>
           <a:lstStyle xmlns:a="http://schemas.openxmlformats.org/drawingml/2006/main"/>
           <a:p xmlns:a="http://schemas.openxmlformats.org/drawingml/2006/main">
-            <a:pPr>
-              <a:defRPr sz="3150" b="1">
+            <a:pPr algn="l">
+              <a:defRPr sz="2700" b="1">
                 <a:solidFill>
                   <a:srgbClr val="161616"/>
                 </a:solidFill>
@@ -1765,7 +2440,7 @@
               </a:defRPr>
             </a:pPr>
             <a:r>
-              <a:rPr sz="3150" b="1">
+              <a:rPr sz="2700" b="1">
                 <a:solidFill>
                   <a:srgbClr val="161616"/>
                 </a:solidFill>
@@ -1773,37 +2448,704 @@
                 <a:ea typeface="Arial"/>
                 <a:cs typeface="Arial"/>
               </a:rPr>
-              <a:t>Целевой процесс BPMN</a:t>
+              <a:t>Сравнение AS IS и TO BE</a:t>
             </a:r>
           </a:p>
         </p:txBody>
       </p:sp>
-      <p:pic>
-        <p:nvPicPr>
+      <p:graphicFrame>
+        <p:nvGraphicFramePr>
           <p:cNvPr id="4" name=""/>
-          <p:cNvPicPr>
-            <a:picLocks xmlns:a="http://schemas.openxmlformats.org/drawingml/2006/main" noChangeAspect="1"/>
-          </p:cNvPicPr>
+          <p:cNvGraphicFramePr/>
           <p:nvPr/>
-        </p:nvPicPr>
-        <p:blipFill>
-          <a:blip xmlns:r="http://schemas.openxmlformats.org/officeDocument/2006/relationships" xmlns:a="http://schemas.openxmlformats.org/drawingml/2006/main" r:embed="R35dbcd724c3c481a"/>
-          <a:stretch xmlns:a="http://schemas.openxmlformats.org/drawingml/2006/main"/>
-        </p:blipFill>
-        <p:spPr>
-          <a:xfrm xmlns:a="http://schemas.openxmlformats.org/drawingml/2006/main">
-            <a:off x="1855520" y="1285875"/>
-            <a:ext cx="8480959" cy="5000625"/>
-          </a:xfrm>
-          <a:prstGeom xmlns:a="http://schemas.openxmlformats.org/drawingml/2006/main" prst="rect">
-            <a:avLst/>
-          </a:prstGeom>
-        </p:spPr>
-      </p:pic>
+        </p:nvGraphicFramePr>
+        <p:xfrm>
+          <a:off xmlns:a="http://schemas.openxmlformats.org/drawingml/2006/main" x="571500" y="1381125"/>
+          <a:ext xmlns:a="http://schemas.openxmlformats.org/drawingml/2006/main" cx="11049000" cy="4810125"/>
+        </p:xfrm>
+        <a:graphic xmlns:a="http://schemas.openxmlformats.org/drawingml/2006/main">
+          <a:graphicData uri="http://schemas.openxmlformats.org/drawingml/2006/table">
+            <a:tbl>
+              <a:tblPr/>
+              <a:tblGrid>
+                <a:gridCol w="2476500"/>
+                <a:gridCol w="4095750"/>
+                <a:gridCol w="4476750"/>
+              </a:tblGrid>
+              <a:tr h="534458">
+                <a:tc>
+                  <a:txBody>
+                    <a:bodyPr/>
+                    <a:lstStyle/>
+                    <a:p>
+                      <a:r>
+                        <a:rPr sz="1500" b="1">
+                          <a:solidFill>
+                            <a:srgbClr val="161616"/>
+                          </a:solidFill>
+                          <a:latin typeface="Arial"/>
+                          <a:ea typeface="Arial"/>
+                          <a:cs typeface="Arial"/>
+                        </a:rPr>
+                        <a:t>Аспект</a:t>
+                      </a:r>
+                    </a:p>
+                  </a:txBody>
+                  <a:tcPr marL="91440" marR="91440" marT="45720" marB="45720">
+                    <a:solidFill>
+                      <a:srgbClr val="F1F1F1"/>
+                    </a:solidFill>
+                  </a:tcPr>
+                </a:tc>
+                <a:tc>
+                  <a:txBody>
+                    <a:bodyPr/>
+                    <a:lstStyle/>
+                    <a:p>
+                      <a:r>
+                        <a:rPr sz="1500" b="1">
+                          <a:solidFill>
+                            <a:srgbClr val="161616"/>
+                          </a:solidFill>
+                          <a:latin typeface="Arial"/>
+                          <a:ea typeface="Arial"/>
+                          <a:cs typeface="Arial"/>
+                        </a:rPr>
+                        <a:t>AS IS</a:t>
+                      </a:r>
+                    </a:p>
+                  </a:txBody>
+                  <a:tcPr marL="91440" marR="91440" marT="45720" marB="45720">
+                    <a:solidFill>
+                      <a:srgbClr val="F1F1F1"/>
+                    </a:solidFill>
+                  </a:tcPr>
+                </a:tc>
+                <a:tc>
+                  <a:txBody>
+                    <a:bodyPr/>
+                    <a:lstStyle/>
+                    <a:p>
+                      <a:r>
+                        <a:rPr sz="1500" b="1">
+                          <a:solidFill>
+                            <a:srgbClr val="161616"/>
+                          </a:solidFill>
+                          <a:latin typeface="Arial"/>
+                          <a:ea typeface="Arial"/>
+                          <a:cs typeface="Arial"/>
+                        </a:rPr>
+                        <a:t>TO BE</a:t>
+                      </a:r>
+                    </a:p>
+                  </a:txBody>
+                  <a:tcPr marL="91440" marR="91440" marT="45720" marB="45720">
+                    <a:solidFill>
+                      <a:srgbClr val="F1F1F1"/>
+                    </a:solidFill>
+                  </a:tcPr>
+                </a:tc>
+              </a:tr>
+              <a:tr h="534458">
+                <a:tc>
+                  <a:txBody>
+                    <a:bodyPr/>
+                    <a:lstStyle/>
+                    <a:p>
+                      <a:r>
+                        <a:rPr sz="1500" b="0">
+                          <a:solidFill>
+                            <a:srgbClr val="161616"/>
+                          </a:solidFill>
+                          <a:latin typeface="Arial"/>
+                          <a:ea typeface="Arial"/>
+                          <a:cs typeface="Arial"/>
+                        </a:rPr>
+                        <a:t>Хранение</a:t>
+                      </a:r>
+                    </a:p>
+                  </a:txBody>
+                  <a:tcPr marL="91440" marR="91440" marT="45720" marB="45720">
+                    <a:solidFill>
+                      <a:srgbClr val="FFFFFF"/>
+                    </a:solidFill>
+                  </a:tcPr>
+                </a:tc>
+                <a:tc>
+                  <a:txBody>
+                    <a:bodyPr/>
+                    <a:lstStyle/>
+                    <a:p>
+                      <a:r>
+                        <a:rPr sz="1500" b="0">
+                          <a:solidFill>
+                            <a:srgbClr val="161616"/>
+                          </a:solidFill>
+                          <a:latin typeface="Arial"/>
+                          <a:ea typeface="Arial"/>
+                          <a:cs typeface="Arial"/>
+                        </a:rPr>
+                        <a:t>Файлы и переписка</a:t>
+                      </a:r>
+                    </a:p>
+                  </a:txBody>
+                  <a:tcPr marL="91440" marR="91440" marT="45720" marB="45720">
+                    <a:solidFill>
+                      <a:srgbClr val="FFFFFF"/>
+                    </a:solidFill>
+                  </a:tcPr>
+                </a:tc>
+                <a:tc>
+                  <a:txBody>
+                    <a:bodyPr/>
+                    <a:lstStyle/>
+                    <a:p>
+                      <a:r>
+                        <a:rPr sz="1500" b="0">
+                          <a:solidFill>
+                            <a:srgbClr val="161616"/>
+                          </a:solidFill>
+                          <a:latin typeface="Arial"/>
+                          <a:ea typeface="Arial"/>
+                          <a:cs typeface="Arial"/>
+                        </a:rPr>
+                        <a:t>Единая ИС и версии</a:t>
+                      </a:r>
+                    </a:p>
+                  </a:txBody>
+                  <a:tcPr marL="91440" marR="91440" marT="45720" marB="45720">
+                    <a:solidFill>
+                      <a:srgbClr val="FFFFFF"/>
+                    </a:solidFill>
+                  </a:tcPr>
+                </a:tc>
+              </a:tr>
+              <a:tr h="534458">
+                <a:tc>
+                  <a:txBody>
+                    <a:bodyPr/>
+                    <a:lstStyle/>
+                    <a:p>
+                      <a:r>
+                        <a:rPr sz="1500" b="0">
+                          <a:solidFill>
+                            <a:srgbClr val="161616"/>
+                          </a:solidFill>
+                          <a:latin typeface="Arial"/>
+                          <a:ea typeface="Arial"/>
+                          <a:cs typeface="Arial"/>
+                        </a:rPr>
+                        <a:t>Ввод</a:t>
+                      </a:r>
+                    </a:p>
+                  </a:txBody>
+                  <a:tcPr marL="91440" marR="91440" marT="45720" marB="45720">
+                    <a:solidFill>
+                      <a:srgbClr val="FFFFFF"/>
+                    </a:solidFill>
+                  </a:tcPr>
+                </a:tc>
+                <a:tc>
+                  <a:txBody>
+                    <a:bodyPr/>
+                    <a:lstStyle/>
+                    <a:p>
+                      <a:r>
+                        <a:rPr sz="1500" b="0">
+                          <a:solidFill>
+                            <a:srgbClr val="161616"/>
+                          </a:solidFill>
+                          <a:latin typeface="Arial"/>
+                          <a:ea typeface="Arial"/>
+                          <a:cs typeface="Arial"/>
+                        </a:rPr>
+                        <a:t>Копирование и повторный ввод</a:t>
+                      </a:r>
+                    </a:p>
+                  </a:txBody>
+                  <a:tcPr marL="91440" marR="91440" marT="45720" marB="45720">
+                    <a:solidFill>
+                      <a:srgbClr val="FFFFFF"/>
+                    </a:solidFill>
+                  </a:tcPr>
+                </a:tc>
+                <a:tc>
+                  <a:txBody>
+                    <a:bodyPr/>
+                    <a:lstStyle/>
+                    <a:p>
+                      <a:r>
+                        <a:rPr sz="1500" b="0">
+                          <a:solidFill>
+                            <a:srgbClr val="161616"/>
+                          </a:solidFill>
+                          <a:latin typeface="Arial"/>
+                          <a:ea typeface="Arial"/>
+                          <a:cs typeface="Arial"/>
+                        </a:rPr>
+                        <a:t>Карточка из снимка</a:t>
+                      </a:r>
+                    </a:p>
+                  </a:txBody>
+                  <a:tcPr marL="91440" marR="91440" marT="45720" marB="45720">
+                    <a:solidFill>
+                      <a:srgbClr val="FFFFFF"/>
+                    </a:solidFill>
+                  </a:tcPr>
+                </a:tc>
+              </a:tr>
+              <a:tr h="534458">
+                <a:tc>
+                  <a:txBody>
+                    <a:bodyPr/>
+                    <a:lstStyle/>
+                    <a:p>
+                      <a:r>
+                        <a:rPr sz="1500" b="0">
+                          <a:solidFill>
+                            <a:srgbClr val="161616"/>
+                          </a:solidFill>
+                          <a:latin typeface="Arial"/>
+                          <a:ea typeface="Arial"/>
+                          <a:cs typeface="Arial"/>
+                        </a:rPr>
+                        <a:t>Совместимость</a:t>
+                      </a:r>
+                    </a:p>
+                  </a:txBody>
+                  <a:tcPr marL="91440" marR="91440" marT="45720" marB="45720">
+                    <a:solidFill>
+                      <a:srgbClr val="FFFFFF"/>
+                    </a:solidFill>
+                  </a:tcPr>
+                </a:tc>
+                <a:tc>
+                  <a:txBody>
+                    <a:bodyPr/>
+                    <a:lstStyle/>
+                    <a:p>
+                      <a:r>
+                        <a:rPr sz="1500" b="0">
+                          <a:solidFill>
+                            <a:srgbClr val="161616"/>
+                          </a:solidFill>
+                          <a:latin typeface="Arial"/>
+                          <a:ea typeface="Arial"/>
+                          <a:cs typeface="Arial"/>
+                        </a:rPr>
+                        <a:t>Опыт и сайты</a:t>
+                      </a:r>
+                    </a:p>
+                  </a:txBody>
+                  <a:tcPr marL="91440" marR="91440" marT="45720" marB="45720">
+                    <a:solidFill>
+                      <a:srgbClr val="FFFFFF"/>
+                    </a:solidFill>
+                  </a:tcPr>
+                </a:tc>
+                <a:tc>
+                  <a:txBody>
+                    <a:bodyPr/>
+                    <a:lstStyle/>
+                    <a:p>
+                      <a:r>
+                        <a:rPr sz="1500" b="0">
+                          <a:solidFill>
+                            <a:srgbClr val="161616"/>
+                          </a:solidFill>
+                          <a:latin typeface="Arial"/>
+                          <a:ea typeface="Arial"/>
+                          <a:cs typeface="Arial"/>
+                        </a:rPr>
+                        <a:t>Механизм правил</a:t>
+                      </a:r>
+                    </a:p>
+                  </a:txBody>
+                  <a:tcPr marL="91440" marR="91440" marT="45720" marB="45720">
+                    <a:solidFill>
+                      <a:srgbClr val="FFFFFF"/>
+                    </a:solidFill>
+                  </a:tcPr>
+                </a:tc>
+              </a:tr>
+              <a:tr h="534458">
+                <a:tc>
+                  <a:txBody>
+                    <a:bodyPr/>
+                    <a:lstStyle/>
+                    <a:p>
+                      <a:r>
+                        <a:rPr sz="1500" b="0">
+                          <a:solidFill>
+                            <a:srgbClr val="161616"/>
+                          </a:solidFill>
+                          <a:latin typeface="Arial"/>
+                          <a:ea typeface="Arial"/>
+                          <a:cs typeface="Arial"/>
+                        </a:rPr>
+                        <a:t>Предложения</a:t>
+                      </a:r>
+                    </a:p>
+                  </a:txBody>
+                  <a:tcPr marL="91440" marR="91440" marT="45720" marB="45720">
+                    <a:solidFill>
+                      <a:srgbClr val="FFFFFF"/>
+                    </a:solidFill>
+                  </a:tcPr>
+                </a:tc>
+                <a:tc>
+                  <a:txBody>
+                    <a:bodyPr/>
+                    <a:lstStyle/>
+                    <a:p>
+                      <a:r>
+                        <a:rPr sz="1500" b="0">
+                          <a:solidFill>
+                            <a:srgbClr val="161616"/>
+                          </a:solidFill>
+                          <a:latin typeface="Arial"/>
+                          <a:ea typeface="Arial"/>
+                          <a:cs typeface="Arial"/>
+                        </a:rPr>
+                        <a:t>Ручное сведение</a:t>
+                      </a:r>
+                    </a:p>
+                  </a:txBody>
+                  <a:tcPr marL="91440" marR="91440" marT="45720" marB="45720">
+                    <a:solidFill>
+                      <a:srgbClr val="FFFFFF"/>
+                    </a:solidFill>
+                  </a:tcPr>
+                </a:tc>
+                <a:tc>
+                  <a:txBody>
+                    <a:bodyPr/>
+                    <a:lstStyle/>
+                    <a:p>
+                      <a:r>
+                        <a:rPr sz="1500" b="0">
+                          <a:solidFill>
+                            <a:srgbClr val="161616"/>
+                          </a:solidFill>
+                          <a:latin typeface="Arial"/>
+                          <a:ea typeface="Arial"/>
+                          <a:cs typeface="Arial"/>
+                        </a:rPr>
+                        <a:t>Импорт и контроль времени</a:t>
+                      </a:r>
+                    </a:p>
+                  </a:txBody>
+                  <a:tcPr marL="91440" marR="91440" marT="45720" marB="45720">
+                    <a:solidFill>
+                      <a:srgbClr val="FFFFFF"/>
+                    </a:solidFill>
+                  </a:tcPr>
+                </a:tc>
+              </a:tr>
+              <a:tr h="534458">
+                <a:tc>
+                  <a:txBody>
+                    <a:bodyPr/>
+                    <a:lstStyle/>
+                    <a:p>
+                      <a:r>
+                        <a:rPr sz="1500" b="0">
+                          <a:solidFill>
+                            <a:srgbClr val="161616"/>
+                          </a:solidFill>
+                          <a:latin typeface="Arial"/>
+                          <a:ea typeface="Arial"/>
+                          <a:cs typeface="Arial"/>
+                        </a:rPr>
+                        <a:t>Расчёты</a:t>
+                      </a:r>
+                    </a:p>
+                  </a:txBody>
+                  <a:tcPr marL="91440" marR="91440" marT="45720" marB="45720">
+                    <a:solidFill>
+                      <a:srgbClr val="FFFFFF"/>
+                    </a:solidFill>
+                  </a:tcPr>
+                </a:tc>
+                <a:tc>
+                  <a:txBody>
+                    <a:bodyPr/>
+                    <a:lstStyle/>
+                    <a:p>
+                      <a:r>
+                        <a:rPr sz="1500" b="0">
+                          <a:solidFill>
+                            <a:srgbClr val="161616"/>
+                          </a:solidFill>
+                          <a:latin typeface="Arial"/>
+                          <a:ea typeface="Arial"/>
+                          <a:cs typeface="Arial"/>
+                        </a:rPr>
+                        <a:t>Excel и калькулятор</a:t>
+                      </a:r>
+                    </a:p>
+                  </a:txBody>
+                  <a:tcPr marL="91440" marR="91440" marT="45720" marB="45720">
+                    <a:solidFill>
+                      <a:srgbClr val="FFFFFF"/>
+                    </a:solidFill>
+                  </a:tcPr>
+                </a:tc>
+                <a:tc>
+                  <a:txBody>
+                    <a:bodyPr/>
+                    <a:lstStyle/>
+                    <a:p>
+                      <a:r>
+                        <a:rPr sz="1500" b="0">
+                          <a:solidFill>
+                            <a:srgbClr val="161616"/>
+                          </a:solidFill>
+                          <a:latin typeface="Arial"/>
+                          <a:ea typeface="Arial"/>
+                          <a:cs typeface="Arial"/>
+                        </a:rPr>
+                        <a:t>Воспроизводимый расчёт</a:t>
+                      </a:r>
+                    </a:p>
+                  </a:txBody>
+                  <a:tcPr marL="91440" marR="91440" marT="45720" marB="45720">
+                    <a:solidFill>
+                      <a:srgbClr val="FFFFFF"/>
+                    </a:solidFill>
+                  </a:tcPr>
+                </a:tc>
+              </a:tr>
+              <a:tr h="534458">
+                <a:tc>
+                  <a:txBody>
+                    <a:bodyPr/>
+                    <a:lstStyle/>
+                    <a:p>
+                      <a:r>
+                        <a:rPr sz="1500" b="0">
+                          <a:solidFill>
+                            <a:srgbClr val="161616"/>
+                          </a:solidFill>
+                          <a:latin typeface="Arial"/>
+                          <a:ea typeface="Arial"/>
+                          <a:cs typeface="Arial"/>
+                        </a:rPr>
+                        <a:t>Публикация</a:t>
+                      </a:r>
+                    </a:p>
+                  </a:txBody>
+                  <a:tcPr marL="91440" marR="91440" marT="45720" marB="45720">
+                    <a:solidFill>
+                      <a:srgbClr val="FFFFFF"/>
+                    </a:solidFill>
+                  </a:tcPr>
+                </a:tc>
+                <a:tc>
+                  <a:txBody>
+                    <a:bodyPr/>
+                    <a:lstStyle/>
+                    <a:p>
+                      <a:r>
+                        <a:rPr sz="1500" b="0">
+                          <a:solidFill>
+                            <a:srgbClr val="161616"/>
+                          </a:solidFill>
+                          <a:latin typeface="Arial"/>
+                          <a:ea typeface="Arial"/>
+                          <a:cs typeface="Arial"/>
+                        </a:rPr>
+                        <a:t>Ручное заполнение</a:t>
+                      </a:r>
+                    </a:p>
+                  </a:txBody>
+                  <a:tcPr marL="91440" marR="91440" marT="45720" marB="45720">
+                    <a:solidFill>
+                      <a:srgbClr val="FFFFFF"/>
+                    </a:solidFill>
+                  </a:tcPr>
+                </a:tc>
+                <a:tc>
+                  <a:txBody>
+                    <a:bodyPr/>
+                    <a:lstStyle/>
+                    <a:p>
+                      <a:r>
+                        <a:rPr sz="1500" b="0">
+                          <a:solidFill>
+                            <a:srgbClr val="161616"/>
+                          </a:solidFill>
+                          <a:latin typeface="Arial"/>
+                          <a:ea typeface="Arial"/>
+                          <a:cs typeface="Arial"/>
+                        </a:rPr>
+                        <a:t>Утверждение и очередь</a:t>
+                      </a:r>
+                    </a:p>
+                  </a:txBody>
+                  <a:tcPr marL="91440" marR="91440" marT="45720" marB="45720">
+                    <a:solidFill>
+                      <a:srgbClr val="FFFFFF"/>
+                    </a:solidFill>
+                  </a:tcPr>
+                </a:tc>
+              </a:tr>
+              <a:tr h="534458">
+                <a:tc>
+                  <a:txBody>
+                    <a:bodyPr/>
+                    <a:lstStyle/>
+                    <a:p>
+                      <a:r>
+                        <a:rPr sz="1500" b="0">
+                          <a:solidFill>
+                            <a:srgbClr val="161616"/>
+                          </a:solidFill>
+                          <a:latin typeface="Arial"/>
+                          <a:ea typeface="Arial"/>
+                          <a:cs typeface="Arial"/>
+                        </a:rPr>
+                        <a:t>Аудит</a:t>
+                      </a:r>
+                    </a:p>
+                  </a:txBody>
+                  <a:tcPr marL="91440" marR="91440" marT="45720" marB="45720">
+                    <a:solidFill>
+                      <a:srgbClr val="FFFFFF"/>
+                    </a:solidFill>
+                  </a:tcPr>
+                </a:tc>
+                <a:tc>
+                  <a:txBody>
+                    <a:bodyPr/>
+                    <a:lstStyle/>
+                    <a:p>
+                      <a:r>
+                        <a:rPr sz="1500" b="0">
+                          <a:solidFill>
+                            <a:srgbClr val="161616"/>
+                          </a:solidFill>
+                          <a:latin typeface="Arial"/>
+                          <a:ea typeface="Arial"/>
+                          <a:cs typeface="Arial"/>
+                        </a:rPr>
+                        <a:t>Разрозненная история</a:t>
+                      </a:r>
+                    </a:p>
+                  </a:txBody>
+                  <a:tcPr marL="91440" marR="91440" marT="45720" marB="45720">
+                    <a:solidFill>
+                      <a:srgbClr val="FFFFFF"/>
+                    </a:solidFill>
+                  </a:tcPr>
+                </a:tc>
+                <a:tc>
+                  <a:txBody>
+                    <a:bodyPr/>
+                    <a:lstStyle/>
+                    <a:p>
+                      <a:r>
+                        <a:rPr sz="1500" b="0">
+                          <a:solidFill>
+                            <a:srgbClr val="161616"/>
+                          </a:solidFill>
+                          <a:latin typeface="Arial"/>
+                          <a:ea typeface="Arial"/>
+                          <a:cs typeface="Arial"/>
+                        </a:rPr>
+                        <a:t>Журнал и уведомления</a:t>
+                      </a:r>
+                    </a:p>
+                  </a:txBody>
+                  <a:tcPr marL="91440" marR="91440" marT="45720" marB="45720">
+                    <a:solidFill>
+                      <a:srgbClr val="FFFFFF"/>
+                    </a:solidFill>
+                  </a:tcPr>
+                </a:tc>
+              </a:tr>
+              <a:tr h="534458">
+                <a:tc>
+                  <a:txBody>
+                    <a:bodyPr/>
+                    <a:lstStyle/>
+                    <a:p>
+                      <a:r>
+                        <a:rPr sz="1500" b="0">
+                          <a:solidFill>
+                            <a:srgbClr val="161616"/>
+                          </a:solidFill>
+                          <a:latin typeface="Arial"/>
+                          <a:ea typeface="Arial"/>
+                          <a:cs typeface="Arial"/>
+                        </a:rPr>
+                        <a:t>Ошибки</a:t>
+                      </a:r>
+                    </a:p>
+                  </a:txBody>
+                  <a:tcPr marL="91440" marR="91440" marT="45720" marB="45720">
+                    <a:solidFill>
+                      <a:srgbClr val="FFFFFF"/>
+                    </a:solidFill>
+                  </a:tcPr>
+                </a:tc>
+                <a:tc>
+                  <a:txBody>
+                    <a:bodyPr/>
+                    <a:lstStyle/>
+                    <a:p>
+                      <a:r>
+                        <a:rPr sz="1500" b="0">
+                          <a:solidFill>
+                            <a:srgbClr val="161616"/>
+                          </a:solidFill>
+                          <a:latin typeface="Arial"/>
+                          <a:ea typeface="Arial"/>
+                          <a:cs typeface="Arial"/>
+                        </a:rPr>
+                        <a:t>Неуправляемые циклы</a:t>
+                      </a:r>
+                    </a:p>
+                  </a:txBody>
+                  <a:tcPr marL="91440" marR="91440" marT="45720" marB="45720">
+                    <a:solidFill>
+                      <a:srgbClr val="FFFFFF"/>
+                    </a:solidFill>
+                  </a:tcPr>
+                </a:tc>
+                <a:tc>
+                  <a:txBody>
+                    <a:bodyPr/>
+                    <a:lstStyle/>
+                    <a:p>
+                      <a:r>
+                        <a:rPr sz="1500" b="0">
+                          <a:solidFill>
+                            <a:srgbClr val="161616"/>
+                          </a:solidFill>
+                          <a:latin typeface="Arial"/>
+                          <a:ea typeface="Arial"/>
+                          <a:cs typeface="Arial"/>
+                        </a:rPr>
+                        <a:t>Бизнес-возврат и повторы</a:t>
+                      </a:r>
+                    </a:p>
+                  </a:txBody>
+                  <a:tcPr marL="91440" marR="91440" marT="45720" marB="45720">
+                    <a:solidFill>
+                      <a:srgbClr val="FFFFFF"/>
+                    </a:solidFill>
+                  </a:tcPr>
+                </a:tc>
+              </a:tr>
+            </a:tbl>
+          </a:graphicData>
+        </a:graphic>
+      </p:graphicFrame>
     </p:spTree>
     <p:extLst>
       <p:ext uri="{BB962C8B-B14F-4D97-AF65-F5344CB8AC3E}">
-        <p14:creationId xmlns:p14="http://schemas.microsoft.com/office/powerpoint/2010/main" val="1490167073"/>
+        <p14:creationId xmlns:p14="http://schemas.microsoft.com/office/powerpoint/2010/main" val="431561848"/>
       </p:ext>
     </p:extLst>
   </p:cSld>
@@ -1831,10 +3173,10 @@
       </p:grpSpPr>
       <p:sp>
         <p:nvSpPr>
-          <p:cNvPr id="10" name="">
+          <p:cNvPr id="3" name="">
             <a:extLst xmlns:a="http://schemas.openxmlformats.org/drawingml/2006/main">
               <a:ext uri="{FF2B5EF4-FFF2-40B4-BE49-F238E27FC236}">
-                <a16:creationId xmlns:a16="http://schemas.microsoft.com/office/drawing/2014/main" id="{C4FADDED-F846-4234-BD02-78AC37B811C5}"/>
+                <a16:creationId xmlns:a16="http://schemas.microsoft.com/office/drawing/2014/main" id="{01FA1B25-8D17-436B-A118-220AA130670D}"/>
               </a:ext>
             </a:extLst>
           </p:cNvPr>
@@ -1845,8 +3187,8 @@
         </p:nvSpPr>
         <p:spPr>
           <a:xfrm xmlns:a="http://schemas.openxmlformats.org/drawingml/2006/main">
-            <a:off x="552450" y="333375"/>
-            <a:ext cx="11049000" cy="857250"/>
+            <a:off x="552450" y="266700"/>
+            <a:ext cx="11049000" cy="742950"/>
           </a:xfrm>
           <a:prstGeom xmlns:a="http://schemas.openxmlformats.org/drawingml/2006/main" prst="rect">
             <a:avLst/>
@@ -1857,13 +3199,13 @@
           </a:ln>
         </p:spPr>
         <p:txBody>
-          <a:bodyPr xmlns:a="http://schemas.openxmlformats.org/drawingml/2006/main">
+          <a:bodyPr xmlns:a="http://schemas.openxmlformats.org/drawingml/2006/main" anchor="ctr">
             <a:noAutofit/>
           </a:bodyPr>
           <a:lstStyle xmlns:a="http://schemas.openxmlformats.org/drawingml/2006/main"/>
           <a:p xmlns:a="http://schemas.openxmlformats.org/drawingml/2006/main">
-            <a:pPr>
-              <a:defRPr sz="3150" b="1">
+            <a:pPr algn="l">
+              <a:defRPr sz="2700" b="1">
                 <a:solidFill>
                   <a:srgbClr val="161616"/>
                 </a:solidFill>
@@ -1873,7 +3215,7 @@
               </a:defRPr>
             </a:pPr>
             <a:r>
-              <a:rPr sz="3150" b="1">
+              <a:rPr sz="2700" b="1">
                 <a:solidFill>
                   <a:srgbClr val="161616"/>
                 </a:solidFill>
@@ -1881,498 +3223,37 @@
                 <a:ea typeface="Arial"/>
                 <a:cs typeface="Arial"/>
               </a:rPr>
-              <a:t>Функциональная структура</a:t>
+              <a:t>IDEF0 TO BE: контекст управляемого процесса</a:t>
             </a:r>
           </a:p>
         </p:txBody>
       </p:sp>
-      <p:sp>
-        <p:nvSpPr>
-          <p:cNvPr id="2" name="">
-            <a:extLst xmlns:a="http://schemas.openxmlformats.org/drawingml/2006/main">
-              <a:ext uri="{FF2B5EF4-FFF2-40B4-BE49-F238E27FC236}">
-                <a16:creationId xmlns:a16="http://schemas.microsoft.com/office/drawing/2014/main" id="{A750EE10-BBB3-405C-BA00-40D93C80C8DD}"/>
-              </a:ext>
-            </a:extLst>
-          </p:cNvPr>
-          <p:cNvSpPr>
-            <a:spLocks xmlns:a="http://schemas.openxmlformats.org/drawingml/2006/main" noGrp="1"/>
-          </p:cNvSpPr>
+      <p:pic>
+        <p:nvPicPr>
+          <p:cNvPr id="4" name=""/>
+          <p:cNvPicPr>
+            <a:picLocks xmlns:a="http://schemas.openxmlformats.org/drawingml/2006/main" noChangeAspect="1"/>
+          </p:cNvPicPr>
           <p:nvPr/>
-        </p:nvSpPr>
+        </p:nvPicPr>
+        <p:blipFill>
+          <a:blip xmlns:r="http://schemas.openxmlformats.org/officeDocument/2006/relationships" xmlns:a="http://schemas.openxmlformats.org/drawingml/2006/main" r:embed="R650eb5b03a414289"/>
+          <a:stretch xmlns:a="http://schemas.openxmlformats.org/drawingml/2006/main"/>
+        </p:blipFill>
         <p:spPr>
           <a:xfrm xmlns:a="http://schemas.openxmlformats.org/drawingml/2006/main">
-            <a:off x="714375" y="2238375"/>
-            <a:ext cx="2416969" cy="1428750"/>
-          </a:xfrm>
-          <a:prstGeom xmlns:a="http://schemas.openxmlformats.org/drawingml/2006/main" prst="roundRect">
-            <a:avLst>
-              <a:gd name="adj" fmla="val 5333"/>
-            </a:avLst>
-          </a:prstGeom>
-          <a:solidFill xmlns:a="http://schemas.openxmlformats.org/drawingml/2006/main">
-            <a:srgbClr val="FFFFFF"/>
-          </a:solidFill>
-          <a:ln xmlns:a="http://schemas.openxmlformats.org/drawingml/2006/main" w="19050">
-            <a:solidFill>
-              <a:srgbClr val="333333"/>
-            </a:solidFill>
-          </a:ln>
-        </p:spPr>
-        <p:txBody>
-          <a:bodyPr xmlns:a="http://schemas.openxmlformats.org/drawingml/2006/main" anchor="ctr"/>
-          <a:lstStyle xmlns:a="http://schemas.openxmlformats.org/drawingml/2006/main"/>
-          <a:p xmlns:a="http://schemas.openxmlformats.org/drawingml/2006/main">
-            <a:pPr algn="ctr">
-              <a:defRPr sz="1875">
-                <a:solidFill>
-                  <a:srgbClr val="111111"/>
-                </a:solidFill>
-                <a:latin typeface="Arial"/>
-                <a:ea typeface="Arial"/>
-                <a:cs typeface="Arial"/>
-              </a:defRPr>
-            </a:pPr>
-            <a:r>
-              <a:rPr sz="1875">
-                <a:solidFill>
-                  <a:srgbClr val="111111"/>
-                </a:solidFill>
-                <a:latin typeface="Arial"/>
-                <a:ea typeface="Arial"/>
-                <a:cs typeface="Arial"/>
-              </a:rPr>
-              <a:t>BOM</a:t>
-            </a:r>
-          </a:p>
-          <a:p xmlns:a="http://schemas.openxmlformats.org/drawingml/2006/main">
-            <a:pPr algn="ctr">
-              <a:defRPr sz="1875">
-                <a:solidFill>
-                  <a:srgbClr val="111111"/>
-                </a:solidFill>
-                <a:latin typeface="Arial"/>
-                <a:ea typeface="Arial"/>
-                <a:cs typeface="Arial"/>
-              </a:defRPr>
-            </a:pPr>
-            <a:r>
-              <a:rPr sz="1875">
-                <a:solidFill>
-                  <a:srgbClr val="111111"/>
-                </a:solidFill>
-                <a:latin typeface="Arial"/>
-                <a:ea typeface="Arial"/>
-                <a:cs typeface="Arial"/>
-              </a:rPr>
-              <a:t>и правила</a:t>
-            </a:r>
-          </a:p>
-        </p:txBody>
-      </p:sp>
-      <p:sp>
-        <p:nvSpPr>
-          <p:cNvPr id="3" name="">
-            <a:extLst xmlns:a="http://schemas.openxmlformats.org/drawingml/2006/main">
-              <a:ext uri="{FF2B5EF4-FFF2-40B4-BE49-F238E27FC236}">
-                <a16:creationId xmlns:a16="http://schemas.microsoft.com/office/drawing/2014/main" id="{90BFCFCB-D6A3-4401-AD55-FCF1C6B2136B}"/>
-              </a:ext>
-            </a:extLst>
-          </p:cNvPr>
-          <p:cNvSpPr>
-            <a:spLocks xmlns:a="http://schemas.openxmlformats.org/drawingml/2006/main" noGrp="1"/>
-          </p:cNvSpPr>
-          <p:nvPr/>
-        </p:nvSpPr>
-        <p:spPr>
-          <a:xfrm xmlns:a="http://schemas.openxmlformats.org/drawingml/2006/main">
-            <a:off x="3188494" y="2800350"/>
-            <a:ext cx="228600" cy="266700"/>
-          </a:xfrm>
-          <a:prstGeom xmlns:a="http://schemas.openxmlformats.org/drawingml/2006/main" prst="rightArrow">
-            <a:avLst/>
-          </a:prstGeom>
-          <a:solidFill xmlns:a="http://schemas.openxmlformats.org/drawingml/2006/main">
-            <a:srgbClr val="444444"/>
-          </a:solidFill>
-          <a:ln xmlns:a="http://schemas.openxmlformats.org/drawingml/2006/main" w="0">
-            <a:noFill/>
-          </a:ln>
-        </p:spPr>
-      </p:sp>
-      <p:sp>
-        <p:nvSpPr>
-          <p:cNvPr id="4" name="">
-            <a:extLst xmlns:a="http://schemas.openxmlformats.org/drawingml/2006/main">
-              <a:ext uri="{FF2B5EF4-FFF2-40B4-BE49-F238E27FC236}">
-                <a16:creationId xmlns:a16="http://schemas.microsoft.com/office/drawing/2014/main" id="{99EA846A-D1C3-4E5B-9434-52F8C3A5B2E0}"/>
-              </a:ext>
-            </a:extLst>
-          </p:cNvPr>
-          <p:cNvSpPr>
-            <a:spLocks xmlns:a="http://schemas.openxmlformats.org/drawingml/2006/main" noGrp="1"/>
-          </p:cNvSpPr>
-          <p:nvPr/>
-        </p:nvSpPr>
-        <p:spPr>
-          <a:xfrm xmlns:a="http://schemas.openxmlformats.org/drawingml/2006/main">
-            <a:off x="3464719" y="2238375"/>
-            <a:ext cx="2416969" cy="1428750"/>
-          </a:xfrm>
-          <a:prstGeom xmlns:a="http://schemas.openxmlformats.org/drawingml/2006/main" prst="roundRect">
-            <a:avLst>
-              <a:gd name="adj" fmla="val 5333"/>
-            </a:avLst>
-          </a:prstGeom>
-          <a:solidFill xmlns:a="http://schemas.openxmlformats.org/drawingml/2006/main">
-            <a:srgbClr val="FFFFFF"/>
-          </a:solidFill>
-          <a:ln xmlns:a="http://schemas.openxmlformats.org/drawingml/2006/main" w="19050">
-            <a:solidFill>
-              <a:srgbClr val="333333"/>
-            </a:solidFill>
-          </a:ln>
-        </p:spPr>
-        <p:txBody>
-          <a:bodyPr xmlns:a="http://schemas.openxmlformats.org/drawingml/2006/main" anchor="ctr"/>
-          <a:lstStyle xmlns:a="http://schemas.openxmlformats.org/drawingml/2006/main"/>
-          <a:p xmlns:a="http://schemas.openxmlformats.org/drawingml/2006/main">
-            <a:pPr algn="ctr">
-              <a:defRPr sz="1875">
-                <a:solidFill>
-                  <a:srgbClr val="111111"/>
-                </a:solidFill>
-                <a:latin typeface="Arial"/>
-                <a:ea typeface="Arial"/>
-                <a:cs typeface="Arial"/>
-              </a:defRPr>
-            </a:pPr>
-            <a:r>
-              <a:rPr sz="1875">
-                <a:solidFill>
-                  <a:srgbClr val="111111"/>
-                </a:solidFill>
-                <a:latin typeface="Arial"/>
-                <a:ea typeface="Arial"/>
-                <a:cs typeface="Arial"/>
-              </a:rPr>
-              <a:t>Предложения</a:t>
-            </a:r>
-          </a:p>
-          <a:p xmlns:a="http://schemas.openxmlformats.org/drawingml/2006/main">
-            <a:pPr algn="ctr">
-              <a:defRPr sz="1875">
-                <a:solidFill>
-                  <a:srgbClr val="111111"/>
-                </a:solidFill>
-                <a:latin typeface="Arial"/>
-                <a:ea typeface="Arial"/>
-                <a:cs typeface="Arial"/>
-              </a:defRPr>
-            </a:pPr>
-            <a:r>
-              <a:rPr sz="1875">
-                <a:solidFill>
-                  <a:srgbClr val="111111"/>
-                </a:solidFill>
-                <a:latin typeface="Arial"/>
-                <a:ea typeface="Arial"/>
-                <a:cs typeface="Arial"/>
-              </a:rPr>
-              <a:t>поставщиков</a:t>
-            </a:r>
-          </a:p>
-        </p:txBody>
-      </p:sp>
-      <p:sp>
-        <p:nvSpPr>
-          <p:cNvPr id="5" name="">
-            <a:extLst xmlns:a="http://schemas.openxmlformats.org/drawingml/2006/main">
-              <a:ext uri="{FF2B5EF4-FFF2-40B4-BE49-F238E27FC236}">
-                <a16:creationId xmlns:a16="http://schemas.microsoft.com/office/drawing/2014/main" id="{BEADF8E4-61F9-4E90-BD63-9B6086FB0BF1}"/>
-              </a:ext>
-            </a:extLst>
-          </p:cNvPr>
-          <p:cNvSpPr>
-            <a:spLocks xmlns:a="http://schemas.openxmlformats.org/drawingml/2006/main" noGrp="1"/>
-          </p:cNvSpPr>
-          <p:nvPr/>
-        </p:nvSpPr>
-        <p:spPr>
-          <a:xfrm xmlns:a="http://schemas.openxmlformats.org/drawingml/2006/main">
-            <a:off x="5938838" y="2800350"/>
-            <a:ext cx="228600" cy="266700"/>
-          </a:xfrm>
-          <a:prstGeom xmlns:a="http://schemas.openxmlformats.org/drawingml/2006/main" prst="rightArrow">
-            <a:avLst/>
-          </a:prstGeom>
-          <a:solidFill xmlns:a="http://schemas.openxmlformats.org/drawingml/2006/main">
-            <a:srgbClr val="444444"/>
-          </a:solidFill>
-          <a:ln xmlns:a="http://schemas.openxmlformats.org/drawingml/2006/main" w="0">
-            <a:noFill/>
-          </a:ln>
-        </p:spPr>
-      </p:sp>
-      <p:sp>
-        <p:nvSpPr>
-          <p:cNvPr id="6" name="">
-            <a:extLst xmlns:a="http://schemas.openxmlformats.org/drawingml/2006/main">
-              <a:ext uri="{FF2B5EF4-FFF2-40B4-BE49-F238E27FC236}">
-                <a16:creationId xmlns:a16="http://schemas.microsoft.com/office/drawing/2014/main" id="{BEF267C3-4327-44DB-9788-B29481FD5A6E}"/>
-              </a:ext>
-            </a:extLst>
-          </p:cNvPr>
-          <p:cNvSpPr>
-            <a:spLocks xmlns:a="http://schemas.openxmlformats.org/drawingml/2006/main" noGrp="1"/>
-          </p:cNvSpPr>
-          <p:nvPr/>
-        </p:nvSpPr>
-        <p:spPr>
-          <a:xfrm xmlns:a="http://schemas.openxmlformats.org/drawingml/2006/main">
-            <a:off x="6215063" y="2238375"/>
-            <a:ext cx="2416969" cy="1428750"/>
-          </a:xfrm>
-          <a:prstGeom xmlns:a="http://schemas.openxmlformats.org/drawingml/2006/main" prst="roundRect">
-            <a:avLst>
-              <a:gd name="adj" fmla="val 5333"/>
-            </a:avLst>
-          </a:prstGeom>
-          <a:solidFill xmlns:a="http://schemas.openxmlformats.org/drawingml/2006/main">
-            <a:srgbClr val="FFFFFF"/>
-          </a:solidFill>
-          <a:ln xmlns:a="http://schemas.openxmlformats.org/drawingml/2006/main" w="19050">
-            <a:solidFill>
-              <a:srgbClr val="333333"/>
-            </a:solidFill>
-          </a:ln>
-        </p:spPr>
-        <p:txBody>
-          <a:bodyPr xmlns:a="http://schemas.openxmlformats.org/drawingml/2006/main" anchor="ctr"/>
-          <a:lstStyle xmlns:a="http://schemas.openxmlformats.org/drawingml/2006/main"/>
-          <a:p xmlns:a="http://schemas.openxmlformats.org/drawingml/2006/main">
-            <a:pPr algn="ctr">
-              <a:defRPr sz="1875">
-                <a:solidFill>
-                  <a:srgbClr val="111111"/>
-                </a:solidFill>
-                <a:latin typeface="Arial"/>
-                <a:ea typeface="Arial"/>
-                <a:cs typeface="Arial"/>
-              </a:defRPr>
-            </a:pPr>
-            <a:r>
-              <a:rPr sz="1875">
-                <a:solidFill>
-                  <a:srgbClr val="111111"/>
-                </a:solidFill>
-                <a:latin typeface="Arial"/>
-                <a:ea typeface="Arial"/>
-                <a:cs typeface="Arial"/>
-              </a:rPr>
-              <a:t>Расчёты</a:t>
-            </a:r>
-          </a:p>
-          <a:p xmlns:a="http://schemas.openxmlformats.org/drawingml/2006/main">
-            <a:pPr algn="ctr">
-              <a:defRPr sz="1875">
-                <a:solidFill>
-                  <a:srgbClr val="111111"/>
-                </a:solidFill>
-                <a:latin typeface="Arial"/>
-                <a:ea typeface="Arial"/>
-                <a:cs typeface="Arial"/>
-              </a:defRPr>
-            </a:pPr>
-            <a:r>
-              <a:rPr sz="1875">
-                <a:solidFill>
-                  <a:srgbClr val="111111"/>
-                </a:solidFill>
-                <a:latin typeface="Arial"/>
-                <a:ea typeface="Arial"/>
-                <a:cs typeface="Arial"/>
-              </a:rPr>
-              <a:t>и контент</a:t>
-            </a:r>
-          </a:p>
-        </p:txBody>
-      </p:sp>
-      <p:sp>
-        <p:nvSpPr>
-          <p:cNvPr id="7" name="">
-            <a:extLst xmlns:a="http://schemas.openxmlformats.org/drawingml/2006/main">
-              <a:ext uri="{FF2B5EF4-FFF2-40B4-BE49-F238E27FC236}">
-                <a16:creationId xmlns:a16="http://schemas.microsoft.com/office/drawing/2014/main" id="{6B95835D-0458-4304-A471-2E9A83980506}"/>
-              </a:ext>
-            </a:extLst>
-          </p:cNvPr>
-          <p:cNvSpPr>
-            <a:spLocks xmlns:a="http://schemas.openxmlformats.org/drawingml/2006/main" noGrp="1"/>
-          </p:cNvSpPr>
-          <p:nvPr/>
-        </p:nvSpPr>
-        <p:spPr>
-          <a:xfrm xmlns:a="http://schemas.openxmlformats.org/drawingml/2006/main">
-            <a:off x="8689181" y="2800350"/>
-            <a:ext cx="228600" cy="266700"/>
-          </a:xfrm>
-          <a:prstGeom xmlns:a="http://schemas.openxmlformats.org/drawingml/2006/main" prst="rightArrow">
-            <a:avLst/>
-          </a:prstGeom>
-          <a:solidFill xmlns:a="http://schemas.openxmlformats.org/drawingml/2006/main">
-            <a:srgbClr val="444444"/>
-          </a:solidFill>
-          <a:ln xmlns:a="http://schemas.openxmlformats.org/drawingml/2006/main" w="0">
-            <a:noFill/>
-          </a:ln>
-        </p:spPr>
-      </p:sp>
-      <p:sp>
-        <p:nvSpPr>
-          <p:cNvPr id="8" name="">
-            <a:extLst xmlns:a="http://schemas.openxmlformats.org/drawingml/2006/main">
-              <a:ext uri="{FF2B5EF4-FFF2-40B4-BE49-F238E27FC236}">
-                <a16:creationId xmlns:a16="http://schemas.microsoft.com/office/drawing/2014/main" id="{2D04CBAC-9755-47BF-B26C-8BF50DA027CD}"/>
-              </a:ext>
-            </a:extLst>
-          </p:cNvPr>
-          <p:cNvSpPr>
-            <a:spLocks xmlns:a="http://schemas.openxmlformats.org/drawingml/2006/main" noGrp="1"/>
-          </p:cNvSpPr>
-          <p:nvPr/>
-        </p:nvSpPr>
-        <p:spPr>
-          <a:xfrm xmlns:a="http://schemas.openxmlformats.org/drawingml/2006/main">
-            <a:off x="8965406" y="2238375"/>
-            <a:ext cx="2416969" cy="1428750"/>
-          </a:xfrm>
-          <a:prstGeom xmlns:a="http://schemas.openxmlformats.org/drawingml/2006/main" prst="roundRect">
-            <a:avLst>
-              <a:gd name="adj" fmla="val 5333"/>
-            </a:avLst>
-          </a:prstGeom>
-          <a:solidFill xmlns:a="http://schemas.openxmlformats.org/drawingml/2006/main">
-            <a:srgbClr val="FFFFFF"/>
-          </a:solidFill>
-          <a:ln xmlns:a="http://schemas.openxmlformats.org/drawingml/2006/main" w="19050">
-            <a:solidFill>
-              <a:srgbClr val="333333"/>
-            </a:solidFill>
-          </a:ln>
-        </p:spPr>
-        <p:txBody>
-          <a:bodyPr xmlns:a="http://schemas.openxmlformats.org/drawingml/2006/main" anchor="ctr"/>
-          <a:lstStyle xmlns:a="http://schemas.openxmlformats.org/drawingml/2006/main"/>
-          <a:p xmlns:a="http://schemas.openxmlformats.org/drawingml/2006/main">
-            <a:pPr algn="ctr">
-              <a:defRPr sz="1875">
-                <a:solidFill>
-                  <a:srgbClr val="111111"/>
-                </a:solidFill>
-                <a:latin typeface="Arial"/>
-                <a:ea typeface="Arial"/>
-                <a:cs typeface="Arial"/>
-              </a:defRPr>
-            </a:pPr>
-            <a:r>
-              <a:rPr sz="1875">
-                <a:solidFill>
-                  <a:srgbClr val="111111"/>
-                </a:solidFill>
-                <a:latin typeface="Arial"/>
-                <a:ea typeface="Arial"/>
-                <a:cs typeface="Arial"/>
-              </a:rPr>
-              <a:t>Публикация</a:t>
-            </a:r>
-          </a:p>
-          <a:p xmlns:a="http://schemas.openxmlformats.org/drawingml/2006/main">
-            <a:pPr algn="ctr">
-              <a:defRPr sz="1875">
-                <a:solidFill>
-                  <a:srgbClr val="111111"/>
-                </a:solidFill>
-                <a:latin typeface="Arial"/>
-                <a:ea typeface="Arial"/>
-                <a:cs typeface="Arial"/>
-              </a:defRPr>
-            </a:pPr>
-            <a:r>
-              <a:rPr sz="1875">
-                <a:solidFill>
-                  <a:srgbClr val="111111"/>
-                </a:solidFill>
-                <a:latin typeface="Arial"/>
-                <a:ea typeface="Arial"/>
-                <a:cs typeface="Arial"/>
-              </a:rPr>
-              <a:t>и статус</a:t>
-            </a:r>
-          </a:p>
-        </p:txBody>
-      </p:sp>
-      <p:sp>
-        <p:nvSpPr>
-          <p:cNvPr id="9" name="">
-            <a:extLst xmlns:a="http://schemas.openxmlformats.org/drawingml/2006/main">
-              <a:ext uri="{FF2B5EF4-FFF2-40B4-BE49-F238E27FC236}">
-                <a16:creationId xmlns:a16="http://schemas.microsoft.com/office/drawing/2014/main" id="{4202227A-C5E6-48E0-B4D0-50CB3601B9AE}"/>
-              </a:ext>
-            </a:extLst>
-          </p:cNvPr>
-          <p:cNvSpPr>
-            <a:spLocks xmlns:a="http://schemas.openxmlformats.org/drawingml/2006/main" noGrp="1"/>
-          </p:cNvSpPr>
-          <p:nvPr/>
-        </p:nvSpPr>
-        <p:spPr>
-          <a:xfrm xmlns:a="http://schemas.openxmlformats.org/drawingml/2006/main">
-            <a:off x="714375" y="4429125"/>
-            <a:ext cx="10572750" cy="1285875"/>
+            <a:off x="1791338" y="1285875"/>
+            <a:ext cx="8609323" cy="5000625"/>
           </a:xfrm>
           <a:prstGeom xmlns:a="http://schemas.openxmlformats.org/drawingml/2006/main" prst="rect">
             <a:avLst/>
           </a:prstGeom>
-          <a:noFill xmlns:a="http://schemas.openxmlformats.org/drawingml/2006/main"/>
-          <a:ln xmlns:a="http://schemas.openxmlformats.org/drawingml/2006/main" w="0">
-            <a:noFill/>
-          </a:ln>
         </p:spPr>
-        <p:txBody>
-          <a:bodyPr xmlns:a="http://schemas.openxmlformats.org/drawingml/2006/main">
-            <a:noAutofit/>
-          </a:bodyPr>
-          <a:lstStyle xmlns:a="http://schemas.openxmlformats.org/drawingml/2006/main"/>
-          <a:p xmlns:a="http://schemas.openxmlformats.org/drawingml/2006/main">
-            <a:pPr>
-              <a:defRPr sz="2175" b="0">
-                <a:solidFill>
-                  <a:srgbClr val="161616"/>
-                </a:solidFill>
-                <a:latin typeface="Arial"/>
-                <a:ea typeface="Arial"/>
-                <a:cs typeface="Arial"/>
-              </a:defRPr>
-            </a:pPr>
-            <a:r>
-              <a:rPr sz="2175" b="0">
-                <a:solidFill>
-                  <a:srgbClr val="161616"/>
-                </a:solidFill>
-                <a:latin typeface="Arial"/>
-                <a:ea typeface="Arial"/>
-                <a:cs typeface="Arial"/>
-              </a:rPr>
-              <a:t>Администрирование обеспечивает доступ, справочники и аудит для всех функций.</a:t>
-            </a:r>
-          </a:p>
-        </p:txBody>
-      </p:sp>
+      </p:pic>
     </p:spTree>
     <p:extLst>
       <p:ext uri="{BB962C8B-B14F-4D97-AF65-F5344CB8AC3E}">
-        <p14:creationId xmlns:p14="http://schemas.microsoft.com/office/powerpoint/2010/main" val="946360803"/>
+        <p14:creationId xmlns:p14="http://schemas.microsoft.com/office/powerpoint/2010/main" val="1983434303"/>
       </p:ext>
     </p:extLst>
   </p:cSld>
@@ -2400,10 +3281,10 @@
       </p:grpSpPr>
       <p:sp>
         <p:nvSpPr>
-          <p:cNvPr id="10" name="">
+          <p:cNvPr id="3" name="">
             <a:extLst xmlns:a="http://schemas.openxmlformats.org/drawingml/2006/main">
               <a:ext uri="{FF2B5EF4-FFF2-40B4-BE49-F238E27FC236}">
-                <a16:creationId xmlns:a16="http://schemas.microsoft.com/office/drawing/2014/main" id="{55A44C84-0939-4BFE-9FB0-E7079E664175}"/>
+                <a16:creationId xmlns:a16="http://schemas.microsoft.com/office/drawing/2014/main" id="{710B5173-2E38-4DF1-AB03-3C1C6CE11C93}"/>
               </a:ext>
             </a:extLst>
           </p:cNvPr>
@@ -2414,8 +3295,8 @@
         </p:nvSpPr>
         <p:spPr>
           <a:xfrm xmlns:a="http://schemas.openxmlformats.org/drawingml/2006/main">
-            <a:off x="552450" y="333375"/>
-            <a:ext cx="11049000" cy="857250"/>
+            <a:off x="552450" y="266700"/>
+            <a:ext cx="11049000" cy="742950"/>
           </a:xfrm>
           <a:prstGeom xmlns:a="http://schemas.openxmlformats.org/drawingml/2006/main" prst="rect">
             <a:avLst/>
@@ -2426,13 +3307,13 @@
           </a:ln>
         </p:spPr>
         <p:txBody>
-          <a:bodyPr xmlns:a="http://schemas.openxmlformats.org/drawingml/2006/main">
+          <a:bodyPr xmlns:a="http://schemas.openxmlformats.org/drawingml/2006/main" anchor="ctr">
             <a:noAutofit/>
           </a:bodyPr>
           <a:lstStyle xmlns:a="http://schemas.openxmlformats.org/drawingml/2006/main"/>
           <a:p xmlns:a="http://schemas.openxmlformats.org/drawingml/2006/main">
-            <a:pPr>
-              <a:defRPr sz="3150" b="1">
+            <a:pPr algn="l">
+              <a:defRPr sz="2700" b="1">
                 <a:solidFill>
                   <a:srgbClr val="161616"/>
                 </a:solidFill>
@@ -2442,7 +3323,7 @@
               </a:defRPr>
             </a:pPr>
             <a:r>
-              <a:rPr sz="3150" b="1">
+              <a:rPr sz="2700" b="1">
                 <a:solidFill>
                   <a:srgbClr val="161616"/>
                 </a:solidFill>
@@ -2450,498 +3331,37 @@
                 <a:ea typeface="Arial"/>
                 <a:cs typeface="Arial"/>
               </a:rPr>
-              <a:t>Компоненты модульного монолита</a:t>
+              <a:t>IDEF0 TO BE: шесть целевых функций</a:t>
             </a:r>
           </a:p>
         </p:txBody>
       </p:sp>
-      <p:sp>
-        <p:nvSpPr>
-          <p:cNvPr id="2" name="">
-            <a:extLst xmlns:a="http://schemas.openxmlformats.org/drawingml/2006/main">
-              <a:ext uri="{FF2B5EF4-FFF2-40B4-BE49-F238E27FC236}">
-                <a16:creationId xmlns:a16="http://schemas.microsoft.com/office/drawing/2014/main" id="{28A4FE69-B88D-456E-9E3C-E64935F10D58}"/>
-              </a:ext>
-            </a:extLst>
-          </p:cNvPr>
-          <p:cNvSpPr>
-            <a:spLocks xmlns:a="http://schemas.openxmlformats.org/drawingml/2006/main" noGrp="1"/>
-          </p:cNvSpPr>
+      <p:pic>
+        <p:nvPicPr>
+          <p:cNvPr id="4" name=""/>
+          <p:cNvPicPr>
+            <a:picLocks xmlns:a="http://schemas.openxmlformats.org/drawingml/2006/main" noChangeAspect="1"/>
+          </p:cNvPicPr>
           <p:nvPr/>
-        </p:nvSpPr>
+        </p:nvPicPr>
+        <p:blipFill>
+          <a:blip xmlns:r="http://schemas.openxmlformats.org/officeDocument/2006/relationships" xmlns:a="http://schemas.openxmlformats.org/drawingml/2006/main" r:embed="Ra05978a3df834ce2"/>
+          <a:stretch xmlns:a="http://schemas.openxmlformats.org/drawingml/2006/main"/>
+        </p:blipFill>
         <p:spPr>
           <a:xfrm xmlns:a="http://schemas.openxmlformats.org/drawingml/2006/main">
-            <a:off x="714375" y="2238375"/>
-            <a:ext cx="2416969" cy="1428750"/>
-          </a:xfrm>
-          <a:prstGeom xmlns:a="http://schemas.openxmlformats.org/drawingml/2006/main" prst="roundRect">
-            <a:avLst>
-              <a:gd name="adj" fmla="val 5333"/>
-            </a:avLst>
-          </a:prstGeom>
-          <a:solidFill xmlns:a="http://schemas.openxmlformats.org/drawingml/2006/main">
-            <a:srgbClr val="FFFFFF"/>
-          </a:solidFill>
-          <a:ln xmlns:a="http://schemas.openxmlformats.org/drawingml/2006/main" w="19050">
-            <a:solidFill>
-              <a:srgbClr val="333333"/>
-            </a:solidFill>
-          </a:ln>
-        </p:spPr>
-        <p:txBody>
-          <a:bodyPr xmlns:a="http://schemas.openxmlformats.org/drawingml/2006/main" anchor="ctr"/>
-          <a:lstStyle xmlns:a="http://schemas.openxmlformats.org/drawingml/2006/main"/>
-          <a:p xmlns:a="http://schemas.openxmlformats.org/drawingml/2006/main">
-            <a:pPr algn="ctr">
-              <a:defRPr sz="1875">
-                <a:solidFill>
-                  <a:srgbClr val="111111"/>
-                </a:solidFill>
-                <a:latin typeface="Arial"/>
-                <a:ea typeface="Arial"/>
-                <a:cs typeface="Arial"/>
-              </a:defRPr>
-            </a:pPr>
-            <a:r>
-              <a:rPr sz="1875">
-                <a:solidFill>
-                  <a:srgbClr val="111111"/>
-                </a:solidFill>
-                <a:latin typeface="Arial"/>
-                <a:ea typeface="Arial"/>
-                <a:cs typeface="Arial"/>
-              </a:rPr>
-              <a:t>Web</a:t>
-            </a:r>
-          </a:p>
-          <a:p xmlns:a="http://schemas.openxmlformats.org/drawingml/2006/main">
-            <a:pPr algn="ctr">
-              <a:defRPr sz="1875">
-                <a:solidFill>
-                  <a:srgbClr val="111111"/>
-                </a:solidFill>
-                <a:latin typeface="Arial"/>
-                <a:ea typeface="Arial"/>
-                <a:cs typeface="Arial"/>
-              </a:defRPr>
-            </a:pPr>
-            <a:r>
-              <a:rPr sz="1875">
-                <a:solidFill>
-                  <a:srgbClr val="111111"/>
-                </a:solidFill>
-                <a:latin typeface="Arial"/>
-                <a:ea typeface="Arial"/>
-                <a:cs typeface="Arial"/>
-              </a:rPr>
-              <a:t>интерфейс</a:t>
-            </a:r>
-          </a:p>
-        </p:txBody>
-      </p:sp>
-      <p:sp>
-        <p:nvSpPr>
-          <p:cNvPr id="3" name="">
-            <a:extLst xmlns:a="http://schemas.openxmlformats.org/drawingml/2006/main">
-              <a:ext uri="{FF2B5EF4-FFF2-40B4-BE49-F238E27FC236}">
-                <a16:creationId xmlns:a16="http://schemas.microsoft.com/office/drawing/2014/main" id="{3B66BFD1-7518-4FDB-9FA7-4D7E43F95237}"/>
-              </a:ext>
-            </a:extLst>
-          </p:cNvPr>
-          <p:cNvSpPr>
-            <a:spLocks xmlns:a="http://schemas.openxmlformats.org/drawingml/2006/main" noGrp="1"/>
-          </p:cNvSpPr>
-          <p:nvPr/>
-        </p:nvSpPr>
-        <p:spPr>
-          <a:xfrm xmlns:a="http://schemas.openxmlformats.org/drawingml/2006/main">
-            <a:off x="3188494" y="2800350"/>
-            <a:ext cx="228600" cy="266700"/>
-          </a:xfrm>
-          <a:prstGeom xmlns:a="http://schemas.openxmlformats.org/drawingml/2006/main" prst="rightArrow">
-            <a:avLst/>
-          </a:prstGeom>
-          <a:solidFill xmlns:a="http://schemas.openxmlformats.org/drawingml/2006/main">
-            <a:srgbClr val="444444"/>
-          </a:solidFill>
-          <a:ln xmlns:a="http://schemas.openxmlformats.org/drawingml/2006/main" w="0">
-            <a:noFill/>
-          </a:ln>
-        </p:spPr>
-      </p:sp>
-      <p:sp>
-        <p:nvSpPr>
-          <p:cNvPr id="4" name="">
-            <a:extLst xmlns:a="http://schemas.openxmlformats.org/drawingml/2006/main">
-              <a:ext uri="{FF2B5EF4-FFF2-40B4-BE49-F238E27FC236}">
-                <a16:creationId xmlns:a16="http://schemas.microsoft.com/office/drawing/2014/main" id="{3DDFE02E-174D-4BD5-9963-8F895386310D}"/>
-              </a:ext>
-            </a:extLst>
-          </p:cNvPr>
-          <p:cNvSpPr>
-            <a:spLocks xmlns:a="http://schemas.openxmlformats.org/drawingml/2006/main" noGrp="1"/>
-          </p:cNvSpPr>
-          <p:nvPr/>
-        </p:nvSpPr>
-        <p:spPr>
-          <a:xfrm xmlns:a="http://schemas.openxmlformats.org/drawingml/2006/main">
-            <a:off x="3464719" y="2238375"/>
-            <a:ext cx="2416969" cy="1428750"/>
-          </a:xfrm>
-          <a:prstGeom xmlns:a="http://schemas.openxmlformats.org/drawingml/2006/main" prst="roundRect">
-            <a:avLst>
-              <a:gd name="adj" fmla="val 5333"/>
-            </a:avLst>
-          </a:prstGeom>
-          <a:solidFill xmlns:a="http://schemas.openxmlformats.org/drawingml/2006/main">
-            <a:srgbClr val="FFFFFF"/>
-          </a:solidFill>
-          <a:ln xmlns:a="http://schemas.openxmlformats.org/drawingml/2006/main" w="19050">
-            <a:solidFill>
-              <a:srgbClr val="333333"/>
-            </a:solidFill>
-          </a:ln>
-        </p:spPr>
-        <p:txBody>
-          <a:bodyPr xmlns:a="http://schemas.openxmlformats.org/drawingml/2006/main" anchor="ctr"/>
-          <a:lstStyle xmlns:a="http://schemas.openxmlformats.org/drawingml/2006/main"/>
-          <a:p xmlns:a="http://schemas.openxmlformats.org/drawingml/2006/main">
-            <a:pPr algn="ctr">
-              <a:defRPr sz="1875">
-                <a:solidFill>
-                  <a:srgbClr val="111111"/>
-                </a:solidFill>
-                <a:latin typeface="Arial"/>
-                <a:ea typeface="Arial"/>
-                <a:cs typeface="Arial"/>
-              </a:defRPr>
-            </a:pPr>
-            <a:r>
-              <a:rPr sz="1875">
-                <a:solidFill>
-                  <a:srgbClr val="111111"/>
-                </a:solidFill>
-                <a:latin typeface="Arial"/>
-                <a:ea typeface="Arial"/>
-                <a:cs typeface="Arial"/>
-              </a:rPr>
-              <a:t>Бизнес</a:t>
-            </a:r>
-          </a:p>
-          <a:p xmlns:a="http://schemas.openxmlformats.org/drawingml/2006/main">
-            <a:pPr algn="ctr">
-              <a:defRPr sz="1875">
-                <a:solidFill>
-                  <a:srgbClr val="111111"/>
-                </a:solidFill>
-                <a:latin typeface="Arial"/>
-                <a:ea typeface="Arial"/>
-                <a:cs typeface="Arial"/>
-              </a:defRPr>
-            </a:pPr>
-            <a:r>
-              <a:rPr sz="1875">
-                <a:solidFill>
-                  <a:srgbClr val="111111"/>
-                </a:solidFill>
-                <a:latin typeface="Arial"/>
-                <a:ea typeface="Arial"/>
-                <a:cs typeface="Arial"/>
-              </a:rPr>
-              <a:t>сервисы</a:t>
-            </a:r>
-          </a:p>
-        </p:txBody>
-      </p:sp>
-      <p:sp>
-        <p:nvSpPr>
-          <p:cNvPr id="5" name="">
-            <a:extLst xmlns:a="http://schemas.openxmlformats.org/drawingml/2006/main">
-              <a:ext uri="{FF2B5EF4-FFF2-40B4-BE49-F238E27FC236}">
-                <a16:creationId xmlns:a16="http://schemas.microsoft.com/office/drawing/2014/main" id="{7DC5D8EF-0555-4CC0-8C06-415F14645D37}"/>
-              </a:ext>
-            </a:extLst>
-          </p:cNvPr>
-          <p:cNvSpPr>
-            <a:spLocks xmlns:a="http://schemas.openxmlformats.org/drawingml/2006/main" noGrp="1"/>
-          </p:cNvSpPr>
-          <p:nvPr/>
-        </p:nvSpPr>
-        <p:spPr>
-          <a:xfrm xmlns:a="http://schemas.openxmlformats.org/drawingml/2006/main">
-            <a:off x="5938838" y="2800350"/>
-            <a:ext cx="228600" cy="266700"/>
-          </a:xfrm>
-          <a:prstGeom xmlns:a="http://schemas.openxmlformats.org/drawingml/2006/main" prst="rightArrow">
-            <a:avLst/>
-          </a:prstGeom>
-          <a:solidFill xmlns:a="http://schemas.openxmlformats.org/drawingml/2006/main">
-            <a:srgbClr val="444444"/>
-          </a:solidFill>
-          <a:ln xmlns:a="http://schemas.openxmlformats.org/drawingml/2006/main" w="0">
-            <a:noFill/>
-          </a:ln>
-        </p:spPr>
-      </p:sp>
-      <p:sp>
-        <p:nvSpPr>
-          <p:cNvPr id="6" name="">
-            <a:extLst xmlns:a="http://schemas.openxmlformats.org/drawingml/2006/main">
-              <a:ext uri="{FF2B5EF4-FFF2-40B4-BE49-F238E27FC236}">
-                <a16:creationId xmlns:a16="http://schemas.microsoft.com/office/drawing/2014/main" id="{DC04E6E8-C547-4514-830C-0ED562E3DA8C}"/>
-              </a:ext>
-            </a:extLst>
-          </p:cNvPr>
-          <p:cNvSpPr>
-            <a:spLocks xmlns:a="http://schemas.openxmlformats.org/drawingml/2006/main" noGrp="1"/>
-          </p:cNvSpPr>
-          <p:nvPr/>
-        </p:nvSpPr>
-        <p:spPr>
-          <a:xfrm xmlns:a="http://schemas.openxmlformats.org/drawingml/2006/main">
-            <a:off x="6215063" y="2238375"/>
-            <a:ext cx="2416969" cy="1428750"/>
-          </a:xfrm>
-          <a:prstGeom xmlns:a="http://schemas.openxmlformats.org/drawingml/2006/main" prst="roundRect">
-            <a:avLst>
-              <a:gd name="adj" fmla="val 5333"/>
-            </a:avLst>
-          </a:prstGeom>
-          <a:solidFill xmlns:a="http://schemas.openxmlformats.org/drawingml/2006/main">
-            <a:srgbClr val="FFFFFF"/>
-          </a:solidFill>
-          <a:ln xmlns:a="http://schemas.openxmlformats.org/drawingml/2006/main" w="19050">
-            <a:solidFill>
-              <a:srgbClr val="333333"/>
-            </a:solidFill>
-          </a:ln>
-        </p:spPr>
-        <p:txBody>
-          <a:bodyPr xmlns:a="http://schemas.openxmlformats.org/drawingml/2006/main" anchor="ctr"/>
-          <a:lstStyle xmlns:a="http://schemas.openxmlformats.org/drawingml/2006/main"/>
-          <a:p xmlns:a="http://schemas.openxmlformats.org/drawingml/2006/main">
-            <a:pPr algn="ctr">
-              <a:defRPr sz="1875">
-                <a:solidFill>
-                  <a:srgbClr val="111111"/>
-                </a:solidFill>
-                <a:latin typeface="Arial"/>
-                <a:ea typeface="Arial"/>
-                <a:cs typeface="Arial"/>
-              </a:defRPr>
-            </a:pPr>
-            <a:r>
-              <a:rPr sz="1875">
-                <a:solidFill>
-                  <a:srgbClr val="111111"/>
-                </a:solidFill>
-                <a:latin typeface="Arial"/>
-                <a:ea typeface="Arial"/>
-                <a:cs typeface="Arial"/>
-              </a:rPr>
-              <a:t>Данные</a:t>
-            </a:r>
-          </a:p>
-          <a:p xmlns:a="http://schemas.openxmlformats.org/drawingml/2006/main">
-            <a:pPr algn="ctr">
-              <a:defRPr sz="1875">
-                <a:solidFill>
-                  <a:srgbClr val="111111"/>
-                </a:solidFill>
-                <a:latin typeface="Arial"/>
-                <a:ea typeface="Arial"/>
-                <a:cs typeface="Arial"/>
-              </a:defRPr>
-            </a:pPr>
-            <a:r>
-              <a:rPr sz="1875">
-                <a:solidFill>
-                  <a:srgbClr val="111111"/>
-                </a:solidFill>
-                <a:latin typeface="Arial"/>
-                <a:ea typeface="Arial"/>
-                <a:cs typeface="Arial"/>
-              </a:rPr>
-              <a:t>и очередь</a:t>
-            </a:r>
-          </a:p>
-        </p:txBody>
-      </p:sp>
-      <p:sp>
-        <p:nvSpPr>
-          <p:cNvPr id="7" name="">
-            <a:extLst xmlns:a="http://schemas.openxmlformats.org/drawingml/2006/main">
-              <a:ext uri="{FF2B5EF4-FFF2-40B4-BE49-F238E27FC236}">
-                <a16:creationId xmlns:a16="http://schemas.microsoft.com/office/drawing/2014/main" id="{B9DCE8CC-48B1-4999-8982-7B67B8E22F97}"/>
-              </a:ext>
-            </a:extLst>
-          </p:cNvPr>
-          <p:cNvSpPr>
-            <a:spLocks xmlns:a="http://schemas.openxmlformats.org/drawingml/2006/main" noGrp="1"/>
-          </p:cNvSpPr>
-          <p:nvPr/>
-        </p:nvSpPr>
-        <p:spPr>
-          <a:xfrm xmlns:a="http://schemas.openxmlformats.org/drawingml/2006/main">
-            <a:off x="8689181" y="2800350"/>
-            <a:ext cx="228600" cy="266700"/>
-          </a:xfrm>
-          <a:prstGeom xmlns:a="http://schemas.openxmlformats.org/drawingml/2006/main" prst="rightArrow">
-            <a:avLst/>
-          </a:prstGeom>
-          <a:solidFill xmlns:a="http://schemas.openxmlformats.org/drawingml/2006/main">
-            <a:srgbClr val="444444"/>
-          </a:solidFill>
-          <a:ln xmlns:a="http://schemas.openxmlformats.org/drawingml/2006/main" w="0">
-            <a:noFill/>
-          </a:ln>
-        </p:spPr>
-      </p:sp>
-      <p:sp>
-        <p:nvSpPr>
-          <p:cNvPr id="8" name="">
-            <a:extLst xmlns:a="http://schemas.openxmlformats.org/drawingml/2006/main">
-              <a:ext uri="{FF2B5EF4-FFF2-40B4-BE49-F238E27FC236}">
-                <a16:creationId xmlns:a16="http://schemas.microsoft.com/office/drawing/2014/main" id="{716E34C6-8497-4888-85C5-C0420D564F0F}"/>
-              </a:ext>
-            </a:extLst>
-          </p:cNvPr>
-          <p:cNvSpPr>
-            <a:spLocks xmlns:a="http://schemas.openxmlformats.org/drawingml/2006/main" noGrp="1"/>
-          </p:cNvSpPr>
-          <p:nvPr/>
-        </p:nvSpPr>
-        <p:spPr>
-          <a:xfrm xmlns:a="http://schemas.openxmlformats.org/drawingml/2006/main">
-            <a:off x="8965406" y="2238375"/>
-            <a:ext cx="2416969" cy="1428750"/>
-          </a:xfrm>
-          <a:prstGeom xmlns:a="http://schemas.openxmlformats.org/drawingml/2006/main" prst="roundRect">
-            <a:avLst>
-              <a:gd name="adj" fmla="val 5333"/>
-            </a:avLst>
-          </a:prstGeom>
-          <a:solidFill xmlns:a="http://schemas.openxmlformats.org/drawingml/2006/main">
-            <a:srgbClr val="FFFFFF"/>
-          </a:solidFill>
-          <a:ln xmlns:a="http://schemas.openxmlformats.org/drawingml/2006/main" w="19050">
-            <a:solidFill>
-              <a:srgbClr val="333333"/>
-            </a:solidFill>
-          </a:ln>
-        </p:spPr>
-        <p:txBody>
-          <a:bodyPr xmlns:a="http://schemas.openxmlformats.org/drawingml/2006/main" anchor="ctr"/>
-          <a:lstStyle xmlns:a="http://schemas.openxmlformats.org/drawingml/2006/main"/>
-          <a:p xmlns:a="http://schemas.openxmlformats.org/drawingml/2006/main">
-            <a:pPr algn="ctr">
-              <a:defRPr sz="1875">
-                <a:solidFill>
-                  <a:srgbClr val="111111"/>
-                </a:solidFill>
-                <a:latin typeface="Arial"/>
-                <a:ea typeface="Arial"/>
-                <a:cs typeface="Arial"/>
-              </a:defRPr>
-            </a:pPr>
-            <a:r>
-              <a:rPr sz="1875">
-                <a:solidFill>
-                  <a:srgbClr val="111111"/>
-                </a:solidFill>
-                <a:latin typeface="Arial"/>
-                <a:ea typeface="Arial"/>
-                <a:cs typeface="Arial"/>
-              </a:rPr>
-              <a:t>Worker</a:t>
-            </a:r>
-          </a:p>
-          <a:p xmlns:a="http://schemas.openxmlformats.org/drawingml/2006/main">
-            <a:pPr algn="ctr">
-              <a:defRPr sz="1875">
-                <a:solidFill>
-                  <a:srgbClr val="111111"/>
-                </a:solidFill>
-                <a:latin typeface="Arial"/>
-                <a:ea typeface="Arial"/>
-                <a:cs typeface="Arial"/>
-              </a:defRPr>
-            </a:pPr>
-            <a:r>
-              <a:rPr sz="1875">
-                <a:solidFill>
-                  <a:srgbClr val="111111"/>
-                </a:solidFill>
-                <a:latin typeface="Arial"/>
-                <a:ea typeface="Arial"/>
-                <a:cs typeface="Arial"/>
-              </a:rPr>
-              <a:t>и адаптеры</a:t>
-            </a:r>
-          </a:p>
-        </p:txBody>
-      </p:sp>
-      <p:sp>
-        <p:nvSpPr>
-          <p:cNvPr id="9" name="">
-            <a:extLst xmlns:a="http://schemas.openxmlformats.org/drawingml/2006/main">
-              <a:ext uri="{FF2B5EF4-FFF2-40B4-BE49-F238E27FC236}">
-                <a16:creationId xmlns:a16="http://schemas.microsoft.com/office/drawing/2014/main" id="{66614773-DC50-4773-B1DA-0D4EAB51F308}"/>
-              </a:ext>
-            </a:extLst>
-          </p:cNvPr>
-          <p:cNvSpPr>
-            <a:spLocks xmlns:a="http://schemas.openxmlformats.org/drawingml/2006/main" noGrp="1"/>
-          </p:cNvSpPr>
-          <p:nvPr/>
-        </p:nvSpPr>
-        <p:spPr>
-          <a:xfrm xmlns:a="http://schemas.openxmlformats.org/drawingml/2006/main">
-            <a:off x="714375" y="4429125"/>
-            <a:ext cx="10572750" cy="1285875"/>
+            <a:off x="2015931" y="1285875"/>
+            <a:ext cx="8160137" cy="5000625"/>
           </a:xfrm>
           <a:prstGeom xmlns:a="http://schemas.openxmlformats.org/drawingml/2006/main" prst="rect">
             <a:avLst/>
           </a:prstGeom>
-          <a:noFill xmlns:a="http://schemas.openxmlformats.org/drawingml/2006/main"/>
-          <a:ln xmlns:a="http://schemas.openxmlformats.org/drawingml/2006/main" w="0">
-            <a:noFill/>
-          </a:ln>
         </p:spPr>
-        <p:txBody>
-          <a:bodyPr xmlns:a="http://schemas.openxmlformats.org/drawingml/2006/main">
-            <a:noAutofit/>
-          </a:bodyPr>
-          <a:lstStyle xmlns:a="http://schemas.openxmlformats.org/drawingml/2006/main"/>
-          <a:p xmlns:a="http://schemas.openxmlformats.org/drawingml/2006/main">
-            <a:pPr>
-              <a:defRPr sz="2175" b="0">
-                <a:solidFill>
-                  <a:srgbClr val="161616"/>
-                </a:solidFill>
-                <a:latin typeface="Arial"/>
-                <a:ea typeface="Arial"/>
-                <a:cs typeface="Arial"/>
-              </a:defRPr>
-            </a:pPr>
-            <a:r>
-              <a:rPr sz="2175" b="0">
-                <a:solidFill>
-                  <a:srgbClr val="161616"/>
-                </a:solidFill>
-                <a:latin typeface="Arial"/>
-                <a:ea typeface="Arial"/>
-                <a:cs typeface="Arial"/>
-              </a:rPr>
-              <a:t>PostgreSQL хранит версии и устойчивую очередь. Изображения находятся в отдельном хранилище.</a:t>
-            </a:r>
-          </a:p>
-        </p:txBody>
-      </p:sp>
+      </p:pic>
     </p:spTree>
     <p:extLst>
       <p:ext uri="{BB962C8B-B14F-4D97-AF65-F5344CB8AC3E}">
-        <p14:creationId xmlns:p14="http://schemas.microsoft.com/office/powerpoint/2010/main" val="1132671301"/>
+        <p14:creationId xmlns:p14="http://schemas.microsoft.com/office/powerpoint/2010/main" val="1710262036"/>
       </p:ext>
     </p:extLst>
   </p:cSld>
@@ -2972,7 +3392,7 @@
           <p:cNvPr id="3" name="">
             <a:extLst xmlns:a="http://schemas.openxmlformats.org/drawingml/2006/main">
               <a:ext uri="{FF2B5EF4-FFF2-40B4-BE49-F238E27FC236}">
-                <a16:creationId xmlns:a16="http://schemas.microsoft.com/office/drawing/2014/main" id="{ACF30A78-887E-4BD9-82C1-0ECEDAA2EEEC}"/>
+                <a16:creationId xmlns:a16="http://schemas.microsoft.com/office/drawing/2014/main" id="{E14D51D8-69AA-4DAD-9BEB-DDFAC5F22492}"/>
               </a:ext>
             </a:extLst>
           </p:cNvPr>
@@ -2983,8 +3403,8 @@
         </p:nvSpPr>
         <p:spPr>
           <a:xfrm xmlns:a="http://schemas.openxmlformats.org/drawingml/2006/main">
-            <a:off x="552450" y="333375"/>
-            <a:ext cx="11049000" cy="857250"/>
+            <a:off x="552450" y="266700"/>
+            <a:ext cx="11049000" cy="742950"/>
           </a:xfrm>
           <a:prstGeom xmlns:a="http://schemas.openxmlformats.org/drawingml/2006/main" prst="rect">
             <a:avLst/>
@@ -2995,13 +3415,13 @@
           </a:ln>
         </p:spPr>
         <p:txBody>
-          <a:bodyPr xmlns:a="http://schemas.openxmlformats.org/drawingml/2006/main">
+          <a:bodyPr xmlns:a="http://schemas.openxmlformats.org/drawingml/2006/main" anchor="ctr">
             <a:noAutofit/>
           </a:bodyPr>
           <a:lstStyle xmlns:a="http://schemas.openxmlformats.org/drawingml/2006/main"/>
           <a:p xmlns:a="http://schemas.openxmlformats.org/drawingml/2006/main">
-            <a:pPr>
-              <a:defRPr sz="3150" b="1">
+            <a:pPr algn="l">
+              <a:defRPr sz="2700" b="1">
                 <a:solidFill>
                   <a:srgbClr val="161616"/>
                 </a:solidFill>
@@ -3011,7 +3431,7 @@
               </a:defRPr>
             </a:pPr>
             <a:r>
-              <a:rPr sz="3150" b="1">
+              <a:rPr sz="2700" b="1">
                 <a:solidFill>
                   <a:srgbClr val="161616"/>
                 </a:solidFill>
@@ -3019,408 +3439,37 @@
                 <a:ea typeface="Arial"/>
                 <a:cs typeface="Arial"/>
               </a:rPr>
-              <a:t>Ключевые сценарии</a:t>
+              <a:t>BPMN TO BE: общий процесс</a:t>
             </a:r>
           </a:p>
         </p:txBody>
       </p:sp>
-      <p:graphicFrame>
-        <p:nvGraphicFramePr>
+      <p:pic>
+        <p:nvPicPr>
           <p:cNvPr id="4" name=""/>
-          <p:cNvGraphicFramePr/>
+          <p:cNvPicPr>
+            <a:picLocks xmlns:a="http://schemas.openxmlformats.org/drawingml/2006/main" noChangeAspect="1"/>
+          </p:cNvPicPr>
           <p:nvPr/>
-        </p:nvGraphicFramePr>
-        <p:xfrm>
-          <a:off xmlns:a="http://schemas.openxmlformats.org/drawingml/2006/main" x="571500" y="1428750"/>
-          <a:ext xmlns:a="http://schemas.openxmlformats.org/drawingml/2006/main" cx="11049000" cy="4572000"/>
-        </p:xfrm>
-        <a:graphic xmlns:a="http://schemas.openxmlformats.org/drawingml/2006/main">
-          <a:graphicData uri="http://schemas.openxmlformats.org/drawingml/2006/table">
-            <a:tbl>
-              <a:tblPr/>
-              <a:tblGrid>
-                <a:gridCol w="3810000"/>
-                <a:gridCol w="3048000"/>
-                <a:gridCol w="4191000"/>
-              </a:tblGrid>
-              <a:tr h="914400">
-                <a:tc>
-                  <a:txBody>
-                    <a:bodyPr/>
-                    <a:lstStyle/>
-                    <a:p>
-                      <a:r>
-                        <a:rPr sz="1800" b="1">
-                          <a:solidFill>
-                            <a:srgbClr val="161616"/>
-                          </a:solidFill>
-                          <a:latin typeface="Arial"/>
-                          <a:ea typeface="Arial"/>
-                          <a:cs typeface="Arial"/>
-                        </a:rPr>
-                        <a:t>Сценарий</a:t>
-                      </a:r>
-                    </a:p>
-                  </a:txBody>
-                  <a:tcPr marL="91440" marR="91440" marT="45720" marB="45720">
-                    <a:solidFill>
-                      <a:srgbClr val="F1F1F1"/>
-                    </a:solidFill>
-                  </a:tcPr>
-                </a:tc>
-                <a:tc>
-                  <a:txBody>
-                    <a:bodyPr/>
-                    <a:lstStyle/>
-                    <a:p>
-                      <a:r>
-                        <a:rPr sz="1800" b="1">
-                          <a:solidFill>
-                            <a:srgbClr val="161616"/>
-                          </a:solidFill>
-                          <a:latin typeface="Arial"/>
-                          <a:ea typeface="Arial"/>
-                          <a:cs typeface="Arial"/>
-                        </a:rPr>
-                        <a:t>Ответственный</a:t>
-                      </a:r>
-                    </a:p>
-                  </a:txBody>
-                  <a:tcPr marL="91440" marR="91440" marT="45720" marB="45720">
-                    <a:solidFill>
-                      <a:srgbClr val="F1F1F1"/>
-                    </a:solidFill>
-                  </a:tcPr>
-                </a:tc>
-                <a:tc>
-                  <a:txBody>
-                    <a:bodyPr/>
-                    <a:lstStyle/>
-                    <a:p>
-                      <a:r>
-                        <a:rPr sz="1800" b="1">
-                          <a:solidFill>
-                            <a:srgbClr val="161616"/>
-                          </a:solidFill>
-                          <a:latin typeface="Arial"/>
-                          <a:ea typeface="Arial"/>
-                          <a:cs typeface="Arial"/>
-                        </a:rPr>
-                        <a:t>Результат</a:t>
-                      </a:r>
-                    </a:p>
-                  </a:txBody>
-                  <a:tcPr marL="91440" marR="91440" marT="45720" marB="45720">
-                    <a:solidFill>
-                      <a:srgbClr val="F1F1F1"/>
-                    </a:solidFill>
-                  </a:tcPr>
-                </a:tc>
-              </a:tr>
-              <a:tr h="914400">
-                <a:tc>
-                  <a:txBody>
-                    <a:bodyPr/>
-                    <a:lstStyle/>
-                    <a:p>
-                      <a:r>
-                        <a:rPr sz="1800" b="0">
-                          <a:solidFill>
-                            <a:srgbClr val="161616"/>
-                          </a:solidFill>
-                          <a:latin typeface="Arial"/>
-                          <a:ea typeface="Arial"/>
-                          <a:cs typeface="Arial"/>
-                        </a:rPr>
-                        <a:t>Создание и проверка BOM</a:t>
-                      </a:r>
-                    </a:p>
-                  </a:txBody>
-                  <a:tcPr marL="91440" marR="91440" marT="45720" marB="45720">
-                    <a:solidFill>
-                      <a:srgbClr val="FFFFFF"/>
-                    </a:solidFill>
-                  </a:tcPr>
-                </a:tc>
-                <a:tc>
-                  <a:txBody>
-                    <a:bodyPr/>
-                    <a:lstStyle/>
-                    <a:p>
-                      <a:r>
-                        <a:rPr sz="1800" b="0">
-                          <a:solidFill>
-                            <a:srgbClr val="161616"/>
-                          </a:solidFill>
-                          <a:latin typeface="Arial"/>
-                          <a:ea typeface="Arial"/>
-                          <a:cs typeface="Arial"/>
-                        </a:rPr>
-                        <a:t>Инженер</a:t>
-                      </a:r>
-                    </a:p>
-                  </a:txBody>
-                  <a:tcPr marL="91440" marR="91440" marT="45720" marB="45720">
-                    <a:solidFill>
-                      <a:srgbClr val="FFFFFF"/>
-                    </a:solidFill>
-                  </a:tcPr>
-                </a:tc>
-                <a:tc>
-                  <a:txBody>
-                    <a:bodyPr/>
-                    <a:lstStyle/>
-                    <a:p>
-                      <a:r>
-                        <a:rPr sz="1800" b="0">
-                          <a:solidFill>
-                            <a:srgbClr val="161616"/>
-                          </a:solidFill>
-                          <a:latin typeface="Arial"/>
-                          <a:ea typeface="Arial"/>
-                          <a:cs typeface="Arial"/>
-                        </a:rPr>
-                        <a:t>Проверенная версия</a:t>
-                      </a:r>
-                    </a:p>
-                  </a:txBody>
-                  <a:tcPr marL="91440" marR="91440" marT="45720" marB="45720">
-                    <a:solidFill>
-                      <a:srgbClr val="FFFFFF"/>
-                    </a:solidFill>
-                  </a:tcPr>
-                </a:tc>
-              </a:tr>
-              <a:tr h="914400">
-                <a:tc>
-                  <a:txBody>
-                    <a:bodyPr/>
-                    <a:lstStyle/>
-                    <a:p>
-                      <a:r>
-                        <a:rPr sz="1800" b="0">
-                          <a:solidFill>
-                            <a:srgbClr val="161616"/>
-                          </a:solidFill>
-                          <a:latin typeface="Arial"/>
-                          <a:ea typeface="Arial"/>
-                          <a:cs typeface="Arial"/>
-                        </a:rPr>
-                        <a:t>Обновление предложений</a:t>
-                      </a:r>
-                    </a:p>
-                  </a:txBody>
-                  <a:tcPr marL="91440" marR="91440" marT="45720" marB="45720">
-                    <a:solidFill>
-                      <a:srgbClr val="FFFFFF"/>
-                    </a:solidFill>
-                  </a:tcPr>
-                </a:tc>
-                <a:tc>
-                  <a:txBody>
-                    <a:bodyPr/>
-                    <a:lstStyle/>
-                    <a:p>
-                      <a:r>
-                        <a:rPr sz="1800" b="0">
-                          <a:solidFill>
-                            <a:srgbClr val="161616"/>
-                          </a:solidFill>
-                          <a:latin typeface="Arial"/>
-                          <a:ea typeface="Arial"/>
-                          <a:cs typeface="Arial"/>
-                        </a:rPr>
-                        <a:t>Склад</a:t>
-                      </a:r>
-                    </a:p>
-                  </a:txBody>
-                  <a:tcPr marL="91440" marR="91440" marT="45720" marB="45720">
-                    <a:solidFill>
-                      <a:srgbClr val="FFFFFF"/>
-                    </a:solidFill>
-                  </a:tcPr>
-                </a:tc>
-                <a:tc>
-                  <a:txBody>
-                    <a:bodyPr/>
-                    <a:lstStyle/>
-                    <a:p>
-                      <a:r>
-                        <a:rPr sz="1800" b="0">
-                          <a:solidFill>
-                            <a:srgbClr val="161616"/>
-                          </a:solidFill>
-                          <a:latin typeface="Arial"/>
-                          <a:ea typeface="Arial"/>
-                          <a:cs typeface="Arial"/>
-                        </a:rPr>
-                        <a:t>Свежие снимки</a:t>
-                      </a:r>
-                    </a:p>
-                  </a:txBody>
-                  <a:tcPr marL="91440" marR="91440" marT="45720" marB="45720">
-                    <a:solidFill>
-                      <a:srgbClr val="FFFFFF"/>
-                    </a:solidFill>
-                  </a:tcPr>
-                </a:tc>
-              </a:tr>
-              <a:tr h="914400">
-                <a:tc>
-                  <a:txBody>
-                    <a:bodyPr/>
-                    <a:lstStyle/>
-                    <a:p>
-                      <a:r>
-                        <a:rPr sz="1800" b="0">
-                          <a:solidFill>
-                            <a:srgbClr val="161616"/>
-                          </a:solidFill>
-                          <a:latin typeface="Arial"/>
-                          <a:ea typeface="Arial"/>
-                          <a:cs typeface="Arial"/>
-                        </a:rPr>
-                        <a:t>Массовая замена</a:t>
-                      </a:r>
-                    </a:p>
-                  </a:txBody>
-                  <a:tcPr marL="91440" marR="91440" marT="45720" marB="45720">
-                    <a:solidFill>
-                      <a:srgbClr val="FFFFFF"/>
-                    </a:solidFill>
-                  </a:tcPr>
-                </a:tc>
-                <a:tc>
-                  <a:txBody>
-                    <a:bodyPr/>
-                    <a:lstStyle/>
-                    <a:p>
-                      <a:r>
-                        <a:rPr sz="1800" b="0">
-                          <a:solidFill>
-                            <a:srgbClr val="161616"/>
-                          </a:solidFill>
-                          <a:latin typeface="Arial"/>
-                          <a:ea typeface="Arial"/>
-                          <a:cs typeface="Arial"/>
-                        </a:rPr>
-                        <a:t>Инженер</a:t>
-                      </a:r>
-                    </a:p>
-                  </a:txBody>
-                  <a:tcPr marL="91440" marR="91440" marT="45720" marB="45720">
-                    <a:solidFill>
-                      <a:srgbClr val="FFFFFF"/>
-                    </a:solidFill>
-                  </a:tcPr>
-                </a:tc>
-                <a:tc>
-                  <a:txBody>
-                    <a:bodyPr/>
-                    <a:lstStyle/>
-                    <a:p>
-                      <a:r>
-                        <a:rPr sz="1800" b="0">
-                          <a:solidFill>
-                            <a:srgbClr val="161616"/>
-                          </a:solidFill>
-                          <a:latin typeface="Arial"/>
-                          <a:ea typeface="Arial"/>
-                          <a:cs typeface="Arial"/>
-                        </a:rPr>
-                        <a:t>Версии и конфликты</a:t>
-                      </a:r>
-                    </a:p>
-                  </a:txBody>
-                  <a:tcPr marL="91440" marR="91440" marT="45720" marB="45720">
-                    <a:solidFill>
-                      <a:srgbClr val="FFFFFF"/>
-                    </a:solidFill>
-                  </a:tcPr>
-                </a:tc>
-              </a:tr>
-              <a:tr h="914400">
-                <a:tc>
-                  <a:txBody>
-                    <a:bodyPr/>
-                    <a:lstStyle/>
-                    <a:p>
-                      <a:r>
-                        <a:rPr sz="1800" b="0">
-                          <a:solidFill>
-                            <a:srgbClr val="161616"/>
-                          </a:solidFill>
-                          <a:latin typeface="Arial"/>
-                          <a:ea typeface="Arial"/>
-                          <a:cs typeface="Arial"/>
-                        </a:rPr>
-                        <a:t>Подготовка и публикация</a:t>
-                      </a:r>
-                    </a:p>
-                  </a:txBody>
-                  <a:tcPr marL="91440" marR="91440" marT="45720" marB="45720">
-                    <a:solidFill>
-                      <a:srgbClr val="FFFFFF"/>
-                    </a:solidFill>
-                  </a:tcPr>
-                </a:tc>
-                <a:tc>
-                  <a:txBody>
-                    <a:bodyPr/>
-                    <a:lstStyle/>
-                    <a:p>
-                      <a:r>
-                        <a:rPr sz="1800" b="0">
-                          <a:solidFill>
-                            <a:srgbClr val="161616"/>
-                          </a:solidFill>
-                          <a:latin typeface="Arial"/>
-                          <a:ea typeface="Arial"/>
-                          <a:cs typeface="Arial"/>
-                        </a:rPr>
-                        <a:t>Менеджер, дизайнер, ИС</a:t>
-                      </a:r>
-                    </a:p>
-                  </a:txBody>
-                  <a:tcPr marL="91440" marR="91440" marT="45720" marB="45720">
-                    <a:solidFill>
-                      <a:srgbClr val="FFFFFF"/>
-                    </a:solidFill>
-                  </a:tcPr>
-                </a:tc>
-                <a:tc>
-                  <a:txBody>
-                    <a:bodyPr/>
-                    <a:lstStyle/>
-                    <a:p>
-                      <a:r>
-                        <a:rPr sz="1800" b="0">
-                          <a:solidFill>
-                            <a:srgbClr val="161616"/>
-                          </a:solidFill>
-                          <a:latin typeface="Arial"/>
-                          <a:ea typeface="Arial"/>
-                          <a:cs typeface="Arial"/>
-                        </a:rPr>
-                        <a:t>Карточка и итог отправки</a:t>
-                      </a:r>
-                    </a:p>
-                  </a:txBody>
-                  <a:tcPr marL="91440" marR="91440" marT="45720" marB="45720">
-                    <a:solidFill>
-                      <a:srgbClr val="FFFFFF"/>
-                    </a:solidFill>
-                  </a:tcPr>
-                </a:tc>
-              </a:tr>
-            </a:tbl>
-          </a:graphicData>
-        </a:graphic>
-      </p:graphicFrame>
+        </p:nvPicPr>
+        <p:blipFill>
+          <a:blip xmlns:r="http://schemas.openxmlformats.org/officeDocument/2006/relationships" xmlns:a="http://schemas.openxmlformats.org/drawingml/2006/main" r:embed="R2b7397343fa346f5"/>
+          <a:stretch xmlns:a="http://schemas.openxmlformats.org/drawingml/2006/main"/>
+        </p:blipFill>
+        <p:spPr>
+          <a:xfrm xmlns:a="http://schemas.openxmlformats.org/drawingml/2006/main">
+            <a:off x="1623029" y="1285875"/>
+            <a:ext cx="8945942" cy="5000625"/>
+          </a:xfrm>
+          <a:prstGeom xmlns:a="http://schemas.openxmlformats.org/drawingml/2006/main" prst="rect">
+            <a:avLst/>
+          </a:prstGeom>
+        </p:spPr>
+      </p:pic>
     </p:spTree>
     <p:extLst>
       <p:ext uri="{BB962C8B-B14F-4D97-AF65-F5344CB8AC3E}">
-        <p14:creationId xmlns:p14="http://schemas.microsoft.com/office/powerpoint/2010/main" val="1892063765"/>
+        <p14:creationId xmlns:p14="http://schemas.microsoft.com/office/powerpoint/2010/main" val="200329520"/>
       </p:ext>
     </p:extLst>
   </p:cSld>
@@ -3448,10 +3497,10 @@
       </p:grpSpPr>
       <p:sp>
         <p:nvSpPr>
-          <p:cNvPr id="6" name="">
+          <p:cNvPr id="3" name="">
             <a:extLst xmlns:a="http://schemas.openxmlformats.org/drawingml/2006/main">
               <a:ext uri="{FF2B5EF4-FFF2-40B4-BE49-F238E27FC236}">
-                <a16:creationId xmlns:a16="http://schemas.microsoft.com/office/drawing/2014/main" id="{E0821EA9-345F-4BFA-9E4C-4A7F41BF5AA5}"/>
+                <a16:creationId xmlns:a16="http://schemas.microsoft.com/office/drawing/2014/main" id="{31A67978-C35D-4353-B49E-00C123E97D03}"/>
               </a:ext>
             </a:extLst>
           </p:cNvPr>
@@ -3462,8 +3511,8 @@
         </p:nvSpPr>
         <p:spPr>
           <a:xfrm xmlns:a="http://schemas.openxmlformats.org/drawingml/2006/main">
-            <a:off x="552450" y="333375"/>
-            <a:ext cx="11049000" cy="857250"/>
+            <a:off x="552450" y="266700"/>
+            <a:ext cx="11049000" cy="742950"/>
           </a:xfrm>
           <a:prstGeom xmlns:a="http://schemas.openxmlformats.org/drawingml/2006/main" prst="rect">
             <a:avLst/>
@@ -3474,13 +3523,13 @@
           </a:ln>
         </p:spPr>
         <p:txBody>
-          <a:bodyPr xmlns:a="http://schemas.openxmlformats.org/drawingml/2006/main">
+          <a:bodyPr xmlns:a="http://schemas.openxmlformats.org/drawingml/2006/main" anchor="ctr">
             <a:noAutofit/>
           </a:bodyPr>
           <a:lstStyle xmlns:a="http://schemas.openxmlformats.org/drawingml/2006/main"/>
           <a:p xmlns:a="http://schemas.openxmlformats.org/drawingml/2006/main">
-            <a:pPr>
-              <a:defRPr sz="3150" b="1">
+            <a:pPr algn="l">
+              <a:defRPr sz="2700" b="1">
                 <a:solidFill>
                   <a:srgbClr val="161616"/>
                 </a:solidFill>
@@ -3490,7 +3539,7 @@
               </a:defRPr>
             </a:pPr>
             <a:r>
-              <a:rPr sz="3150" b="1">
+              <a:rPr sz="2700" b="1">
                 <a:solidFill>
                   <a:srgbClr val="161616"/>
                 </a:solidFill>
@@ -3498,17 +3547,68 @@
                 <a:ea typeface="Arial"/>
                 <a:cs typeface="Arial"/>
               </a:rPr>
-              <a:t>Условия согласованности</a:t>
+              <a:t>BPMN TO BE: подготовка</a:t>
             </a:r>
           </a:p>
         </p:txBody>
       </p:sp>
-      <p:sp>
-        <p:nvSpPr>
-          <p:cNvPr id="2" name="">
+      <p:pic>
+        <p:nvPicPr>
+          <p:cNvPr id="4" name=""/>
+          <p:cNvPicPr>
+            <a:picLocks xmlns:a="http://schemas.openxmlformats.org/drawingml/2006/main" noChangeAspect="1"/>
+          </p:cNvPicPr>
+          <p:nvPr/>
+        </p:nvPicPr>
+        <p:blipFill>
+          <a:blip xmlns:r="http://schemas.openxmlformats.org/officeDocument/2006/relationships" xmlns:a="http://schemas.openxmlformats.org/drawingml/2006/main" r:embed="R7de597416b074cc1"/>
+          <a:stretch xmlns:a="http://schemas.openxmlformats.org/drawingml/2006/main"/>
+        </p:blipFill>
+        <p:spPr>
+          <a:xfrm xmlns:a="http://schemas.openxmlformats.org/drawingml/2006/main">
+            <a:off x="1758507" y="1285875"/>
+            <a:ext cx="8674986" cy="5000625"/>
+          </a:xfrm>
+          <a:prstGeom xmlns:a="http://schemas.openxmlformats.org/drawingml/2006/main" prst="rect">
+            <a:avLst/>
+          </a:prstGeom>
+        </p:spPr>
+      </p:pic>
+    </p:spTree>
+    <p:extLst>
+      <p:ext uri="{BB962C8B-B14F-4D97-AF65-F5344CB8AC3E}">
+        <p14:creationId xmlns:p14="http://schemas.microsoft.com/office/powerpoint/2010/main" val="272483068"/>
+      </p:ext>
+    </p:extLst>
+  </p:cSld>
+</p:sld>
+</file>
+
+<file path=ppt/slides/slide7.xml><?xml version="1.0" encoding="utf-8"?>
+<p:sld xmlns:p="http://schemas.openxmlformats.org/presentationml/2006/main">
+  <p:cSld>
+    <p:bg>
+      <p:bgPr>
+        <a:solidFill xmlns:a="http://schemas.openxmlformats.org/drawingml/2006/main">
+          <a:srgbClr val="FFFFFF"/>
+        </a:solidFill>
+      </p:bgPr>
+    </p:bg>
+    <p:spTree>
+      <p:nvGrpSpPr>
+        <p:cNvPr id="1" name=""/>
+        <p:cNvGrpSpPr/>
+        <p:nvPr/>
+      </p:nvGrpSpPr>
+      <p:grpSpPr>
+        <a:xfrm xmlns:a="http://schemas.openxmlformats.org/drawingml/2006/main"/>
+      </p:grpSpPr>
+      <p:sp>
+        <p:nvSpPr>
+          <p:cNvPr id="3" name="">
             <a:extLst xmlns:a="http://schemas.openxmlformats.org/drawingml/2006/main">
               <a:ext uri="{FF2B5EF4-FFF2-40B4-BE49-F238E27FC236}">
-                <a16:creationId xmlns:a16="http://schemas.microsoft.com/office/drawing/2014/main" id="{D7E8FBA1-DBCF-4FEB-85C2-91FDAFA7382E}"/>
+                <a16:creationId xmlns:a16="http://schemas.microsoft.com/office/drawing/2014/main" id="{05CCFDD6-F518-4A87-AD75-7BD2B72D4588}"/>
               </a:ext>
             </a:extLst>
           </p:cNvPr>
@@ -3519,8 +3619,8 @@
         </p:nvSpPr>
         <p:spPr>
           <a:xfrm xmlns:a="http://schemas.openxmlformats.org/drawingml/2006/main">
-            <a:off x="666750" y="1524000"/>
-            <a:ext cx="10763250" cy="914400"/>
+            <a:off x="552450" y="266700"/>
+            <a:ext cx="11049000" cy="742950"/>
           </a:xfrm>
           <a:prstGeom xmlns:a="http://schemas.openxmlformats.org/drawingml/2006/main" prst="rect">
             <a:avLst/>
@@ -3531,13 +3631,13 @@
           </a:ln>
         </p:spPr>
         <p:txBody>
-          <a:bodyPr xmlns:a="http://schemas.openxmlformats.org/drawingml/2006/main">
+          <a:bodyPr xmlns:a="http://schemas.openxmlformats.org/drawingml/2006/main" anchor="ctr">
             <a:noAutofit/>
           </a:bodyPr>
           <a:lstStyle xmlns:a="http://schemas.openxmlformats.org/drawingml/2006/main"/>
           <a:p xmlns:a="http://schemas.openxmlformats.org/drawingml/2006/main">
-            <a:pPr>
-              <a:defRPr sz="2175" b="0">
+            <a:pPr algn="l">
+              <a:defRPr sz="2700" b="1">
                 <a:solidFill>
                   <a:srgbClr val="161616"/>
                 </a:solidFill>
@@ -3547,7 +3647,7 @@
               </a:defRPr>
             </a:pPr>
             <a:r>
-              <a:rPr sz="2175" b="0">
+              <a:rPr sz="2700" b="1">
                 <a:solidFill>
                   <a:srgbClr val="161616"/>
                 </a:solidFill>
@@ -3555,17 +3655,68 @@
                 <a:ea typeface="Arial"/>
                 <a:cs typeface="Arial"/>
               </a:rPr>
-              <a:t>Изменение состава повторно запускает совместимость, цену, массу и полноту.</a:t>
+              <a:t>BPMN TO BE: очередь и результат</a:t>
             </a:r>
           </a:p>
         </p:txBody>
       </p:sp>
+      <p:pic>
+        <p:nvPicPr>
+          <p:cNvPr id="4" name=""/>
+          <p:cNvPicPr>
+            <a:picLocks xmlns:a="http://schemas.openxmlformats.org/drawingml/2006/main" noChangeAspect="1"/>
+          </p:cNvPicPr>
+          <p:nvPr/>
+        </p:nvPicPr>
+        <p:blipFill>
+          <a:blip xmlns:r="http://schemas.openxmlformats.org/officeDocument/2006/relationships" xmlns:a="http://schemas.openxmlformats.org/drawingml/2006/main" r:embed="R4329ac5b80c94734"/>
+          <a:stretch xmlns:a="http://schemas.openxmlformats.org/drawingml/2006/main"/>
+        </p:blipFill>
+        <p:spPr>
+          <a:xfrm xmlns:a="http://schemas.openxmlformats.org/drawingml/2006/main">
+            <a:off x="571500" y="1655719"/>
+            <a:ext cx="11049000" cy="4260937"/>
+          </a:xfrm>
+          <a:prstGeom xmlns:a="http://schemas.openxmlformats.org/drawingml/2006/main" prst="rect">
+            <a:avLst/>
+          </a:prstGeom>
+        </p:spPr>
+      </p:pic>
+    </p:spTree>
+    <p:extLst>
+      <p:ext uri="{BB962C8B-B14F-4D97-AF65-F5344CB8AC3E}">
+        <p14:creationId xmlns:p14="http://schemas.microsoft.com/office/powerpoint/2010/main" val="1379534739"/>
+      </p:ext>
+    </p:extLst>
+  </p:cSld>
+</p:sld>
+</file>
+
+<file path=ppt/slides/slide8.xml><?xml version="1.0" encoding="utf-8"?>
+<p:sld xmlns:p="http://schemas.openxmlformats.org/presentationml/2006/main">
+  <p:cSld>
+    <p:bg>
+      <p:bgPr>
+        <a:solidFill xmlns:a="http://schemas.openxmlformats.org/drawingml/2006/main">
+          <a:srgbClr val="FFFFFF"/>
+        </a:solidFill>
+      </p:bgPr>
+    </p:bg>
+    <p:spTree>
+      <p:nvGrpSpPr>
+        <p:cNvPr id="1" name=""/>
+        <p:cNvGrpSpPr/>
+        <p:nvPr/>
+      </p:nvGrpSpPr>
+      <p:grpSpPr>
+        <a:xfrm xmlns:a="http://schemas.openxmlformats.org/drawingml/2006/main"/>
+      </p:grpSpPr>
       <p:sp>
         <p:nvSpPr>
           <p:cNvPr id="3" name="">
             <a:extLst xmlns:a="http://schemas.openxmlformats.org/drawingml/2006/main">
               <a:ext uri="{FF2B5EF4-FFF2-40B4-BE49-F238E27FC236}">
-                <a16:creationId xmlns:a16="http://schemas.microsoft.com/office/drawing/2014/main" id="{05EFF22A-40F7-424B-A937-04FC58B77B0F}"/>
+                <a16:creationId xmlns:a16="http://schemas.microsoft.com/office/drawing/2014/main" id="{44744F4D-5F81-4D42-9BF1-1C71A3A904C5}"/>
               </a:ext>
             </a:extLst>
           </p:cNvPr>
@@ -3576,8 +3727,8 @@
         </p:nvSpPr>
         <p:spPr>
           <a:xfrm xmlns:a="http://schemas.openxmlformats.org/drawingml/2006/main">
-            <a:off x="666750" y="2590800"/>
-            <a:ext cx="10763250" cy="914400"/>
+            <a:off x="552450" y="266700"/>
+            <a:ext cx="11049000" cy="742950"/>
           </a:xfrm>
           <a:prstGeom xmlns:a="http://schemas.openxmlformats.org/drawingml/2006/main" prst="rect">
             <a:avLst/>
@@ -3588,13 +3739,13 @@
           </a:ln>
         </p:spPr>
         <p:txBody>
-          <a:bodyPr xmlns:a="http://schemas.openxmlformats.org/drawingml/2006/main">
+          <a:bodyPr xmlns:a="http://schemas.openxmlformats.org/drawingml/2006/main" anchor="ctr">
             <a:noAutofit/>
           </a:bodyPr>
           <a:lstStyle xmlns:a="http://schemas.openxmlformats.org/drawingml/2006/main"/>
           <a:p xmlns:a="http://schemas.openxmlformats.org/drawingml/2006/main">
-            <a:pPr>
-              <a:defRPr sz="2175" b="0">
+            <a:pPr algn="l">
+              <a:defRPr sz="2700" b="1">
                 <a:solidFill>
                   <a:srgbClr val="161616"/>
                 </a:solidFill>
@@ -3604,7 +3755,7 @@
               </a:defRPr>
             </a:pPr>
             <a:r>
-              <a:rPr sz="2175" b="0">
+              <a:rPr sz="2700" b="1">
                 <a:solidFill>
                   <a:srgbClr val="161616"/>
                 </a:solidFill>
@@ -3612,17 +3763,68 @@
                 <a:ea typeface="Arial"/>
                 <a:cs typeface="Arial"/>
               </a:rPr>
-              <a:t>Менеджер утверждает конкретную версию перед публикацией.</a:t>
+              <a:t>Дерево функций системы</a:t>
             </a:r>
           </a:p>
         </p:txBody>
       </p:sp>
-      <p:sp>
-        <p:nvSpPr>
-          <p:cNvPr id="4" name="">
+      <p:pic>
+        <p:nvPicPr>
+          <p:cNvPr id="4" name=""/>
+          <p:cNvPicPr>
+            <a:picLocks xmlns:a="http://schemas.openxmlformats.org/drawingml/2006/main" noChangeAspect="1"/>
+          </p:cNvPicPr>
+          <p:nvPr/>
+        </p:nvPicPr>
+        <p:blipFill>
+          <a:blip xmlns:r="http://schemas.openxmlformats.org/officeDocument/2006/relationships" xmlns:a="http://schemas.openxmlformats.org/drawingml/2006/main" r:embed="R155f4bf9d4a445b3"/>
+          <a:stretch xmlns:a="http://schemas.openxmlformats.org/drawingml/2006/main"/>
+        </p:blipFill>
+        <p:spPr>
+          <a:xfrm xmlns:a="http://schemas.openxmlformats.org/drawingml/2006/main">
+            <a:off x="854857" y="1285875"/>
+            <a:ext cx="10482286" cy="5000625"/>
+          </a:xfrm>
+          <a:prstGeom xmlns:a="http://schemas.openxmlformats.org/drawingml/2006/main" prst="rect">
+            <a:avLst/>
+          </a:prstGeom>
+        </p:spPr>
+      </p:pic>
+    </p:spTree>
+    <p:extLst>
+      <p:ext uri="{BB962C8B-B14F-4D97-AF65-F5344CB8AC3E}">
+        <p14:creationId xmlns:p14="http://schemas.microsoft.com/office/powerpoint/2010/main" val="701808855"/>
+      </p:ext>
+    </p:extLst>
+  </p:cSld>
+</p:sld>
+</file>
+
+<file path=ppt/slides/slide9.xml><?xml version="1.0" encoding="utf-8"?>
+<p:sld xmlns:p="http://schemas.openxmlformats.org/presentationml/2006/main">
+  <p:cSld>
+    <p:bg>
+      <p:bgPr>
+        <a:solidFill xmlns:a="http://schemas.openxmlformats.org/drawingml/2006/main">
+          <a:srgbClr val="FFFFFF"/>
+        </a:solidFill>
+      </p:bgPr>
+    </p:bg>
+    <p:spTree>
+      <p:nvGrpSpPr>
+        <p:cNvPr id="1" name=""/>
+        <p:cNvGrpSpPr/>
+        <p:nvPr/>
+      </p:nvGrpSpPr>
+      <p:grpSpPr>
+        <a:xfrm xmlns:a="http://schemas.openxmlformats.org/drawingml/2006/main"/>
+      </p:grpSpPr>
+      <p:sp>
+        <p:nvSpPr>
+          <p:cNvPr id="3" name="">
             <a:extLst xmlns:a="http://schemas.openxmlformats.org/drawingml/2006/main">
               <a:ext uri="{FF2B5EF4-FFF2-40B4-BE49-F238E27FC236}">
-                <a16:creationId xmlns:a16="http://schemas.microsoft.com/office/drawing/2014/main" id="{BE3C1508-ED15-4373-91D6-E660FEBEBED5}"/>
+                <a16:creationId xmlns:a16="http://schemas.microsoft.com/office/drawing/2014/main" id="{3878AD17-B71E-4CF1-8F36-9EAF8A4551B7}"/>
               </a:ext>
             </a:extLst>
           </p:cNvPr>
@@ -3633,8 +3835,8 @@
         </p:nvSpPr>
         <p:spPr>
           <a:xfrm xmlns:a="http://schemas.openxmlformats.org/drawingml/2006/main">
-            <a:off x="666750" y="3657600"/>
-            <a:ext cx="10763250" cy="914400"/>
+            <a:off x="552450" y="266700"/>
+            <a:ext cx="11049000" cy="742950"/>
           </a:xfrm>
           <a:prstGeom xmlns:a="http://schemas.openxmlformats.org/drawingml/2006/main" prst="rect">
             <a:avLst/>
@@ -3645,13 +3847,13 @@
           </a:ln>
         </p:spPr>
         <p:txBody>
-          <a:bodyPr xmlns:a="http://schemas.openxmlformats.org/drawingml/2006/main">
+          <a:bodyPr xmlns:a="http://schemas.openxmlformats.org/drawingml/2006/main" anchor="ctr">
             <a:noAutofit/>
           </a:bodyPr>
           <a:lstStyle xmlns:a="http://schemas.openxmlformats.org/drawingml/2006/main"/>
           <a:p xmlns:a="http://schemas.openxmlformats.org/drawingml/2006/main">
-            <a:pPr>
-              <a:defRPr sz="2175" b="0">
+            <a:pPr algn="l">
+              <a:defRPr sz="2700" b="1">
                 <a:solidFill>
                   <a:srgbClr val="161616"/>
                 </a:solidFill>
@@ -3661,7 +3863,7 @@
               </a:defRPr>
             </a:pPr>
             <a:r>
-              <a:rPr sz="2175" b="0">
+              <a:rPr sz="2700" b="1">
                 <a:solidFill>
                   <a:srgbClr val="161616"/>
                 </a:solidFill>
@@ -3669,72 +3871,37 @@
                 <a:ea typeface="Arial"/>
                 <a:cs typeface="Arial"/>
               </a:rPr>
-              <a:t>При потере ответа сначала сверяется результат внешней операции.</a:t>
+              <a:t>Компоненты целевой системы</a:t>
             </a:r>
           </a:p>
         </p:txBody>
       </p:sp>
-      <p:sp>
-        <p:nvSpPr>
-          <p:cNvPr id="5" name="">
-            <a:extLst xmlns:a="http://schemas.openxmlformats.org/drawingml/2006/main">
-              <a:ext uri="{FF2B5EF4-FFF2-40B4-BE49-F238E27FC236}">
-                <a16:creationId xmlns:a16="http://schemas.microsoft.com/office/drawing/2014/main" id="{DB512D3B-8C09-4F45-8CF5-BF9EC19CE201}"/>
-              </a:ext>
-            </a:extLst>
-          </p:cNvPr>
-          <p:cNvSpPr>
-            <a:spLocks xmlns:a="http://schemas.openxmlformats.org/drawingml/2006/main" noGrp="1"/>
-          </p:cNvSpPr>
+      <p:pic>
+        <p:nvPicPr>
+          <p:cNvPr id="4" name=""/>
+          <p:cNvPicPr>
+            <a:picLocks xmlns:a="http://schemas.openxmlformats.org/drawingml/2006/main" noChangeAspect="1"/>
+          </p:cNvPicPr>
           <p:nvPr/>
-        </p:nvSpPr>
+        </p:nvPicPr>
+        <p:blipFill>
+          <a:blip xmlns:r="http://schemas.openxmlformats.org/officeDocument/2006/relationships" xmlns:a="http://schemas.openxmlformats.org/drawingml/2006/main" r:embed="R2c5d847692ff4c03"/>
+          <a:stretch xmlns:a="http://schemas.openxmlformats.org/drawingml/2006/main"/>
+        </p:blipFill>
         <p:spPr>
           <a:xfrm xmlns:a="http://schemas.openxmlformats.org/drawingml/2006/main">
-            <a:off x="666750" y="4724400"/>
-            <a:ext cx="10763250" cy="914400"/>
+            <a:off x="2478555" y="1285875"/>
+            <a:ext cx="7234890" cy="5000625"/>
           </a:xfrm>
           <a:prstGeom xmlns:a="http://schemas.openxmlformats.org/drawingml/2006/main" prst="rect">
             <a:avLst/>
           </a:prstGeom>
-          <a:noFill xmlns:a="http://schemas.openxmlformats.org/drawingml/2006/main"/>
-          <a:ln xmlns:a="http://schemas.openxmlformats.org/drawingml/2006/main" w="0">
-            <a:noFill/>
-          </a:ln>
         </p:spPr>
-        <p:txBody>
-          <a:bodyPr xmlns:a="http://schemas.openxmlformats.org/drawingml/2006/main">
-            <a:noAutofit/>
-          </a:bodyPr>
-          <a:lstStyle xmlns:a="http://schemas.openxmlformats.org/drawingml/2006/main"/>
-          <a:p xmlns:a="http://schemas.openxmlformats.org/drawingml/2006/main">
-            <a:pPr>
-              <a:defRPr sz="2175" b="0">
-                <a:solidFill>
-                  <a:srgbClr val="161616"/>
-                </a:solidFill>
-                <a:latin typeface="Arial"/>
-                <a:ea typeface="Arial"/>
-                <a:cs typeface="Arial"/>
-              </a:defRPr>
-            </a:pPr>
-            <a:r>
-              <a:rPr sz="2175" b="0">
-                <a:solidFill>
-                  <a:srgbClr val="161616"/>
-                </a:solidFill>
-                <a:latin typeface="Arial"/>
-                <a:ea typeface="Arial"/>
-                <a:cs typeface="Arial"/>
-              </a:rPr>
-              <a:t>Целевые NFR требуют проверки на будущей реализации.</a:t>
-            </a:r>
-          </a:p>
-        </p:txBody>
-      </p:sp>
+      </p:pic>
     </p:spTree>
     <p:extLst>
       <p:ext uri="{BB962C8B-B14F-4D97-AF65-F5344CB8AC3E}">
-        <p14:creationId xmlns:p14="http://schemas.microsoft.com/office/powerpoint/2010/main" val="2109622428"/>
+        <p14:creationId xmlns:p14="http://schemas.microsoft.com/office/powerpoint/2010/main" val="186878433"/>
       </p:ext>
     </p:extLst>
   </p:cSld>

--- a/4/РОП/Практики_1-8/Презентации/РОП_Практическая_2_АлбахтинИВ.pptx
+++ b/4/РОП/Практики_1-8/Презентации/РОП_Практическая_2_АлбахтинИВ.pptx
@@ -2,22 +2,22 @@
 <file path=ppt/presentation.xml><?xml version="1.0" encoding="utf-8"?>
 <p:presentation xmlns:p="http://schemas.openxmlformats.org/presentationml/2006/main">
   <p:sldMasterIdLst>
-    <p:sldMasterId xmlns:r="http://schemas.openxmlformats.org/officeDocument/2006/relationships" id="2147483648" r:id="Rce27e07b7af54927"/>
+    <p:sldMasterId xmlns:r="http://schemas.openxmlformats.org/officeDocument/2006/relationships" id="2147483648" r:id="Rf36d6e36f22b488d"/>
   </p:sldMasterIdLst>
   <p:notesMasterIdLst>
-    <p:notesMasterId xmlns:r="http://schemas.openxmlformats.org/officeDocument/2006/relationships" r:id="R27898d9a58b54fa9"/>
+    <p:notesMasterId xmlns:r="http://schemas.openxmlformats.org/officeDocument/2006/relationships" r:id="R8560a40f4c274f94"/>
   </p:notesMasterIdLst>
   <p:sldIdLst>
-    <p:sldId xmlns:r="http://schemas.openxmlformats.org/officeDocument/2006/relationships" id="256" r:id="R1444b47de6e841ad"/>
-    <p:sldId xmlns:r="http://schemas.openxmlformats.org/officeDocument/2006/relationships" id="257" r:id="R2900f1b5280e46fd"/>
-    <p:sldId xmlns:r="http://schemas.openxmlformats.org/officeDocument/2006/relationships" id="258" r:id="R70ed6bdfa231451f"/>
-    <p:sldId xmlns:r="http://schemas.openxmlformats.org/officeDocument/2006/relationships" id="259" r:id="Rf8e451a207b34d60"/>
-    <p:sldId xmlns:r="http://schemas.openxmlformats.org/officeDocument/2006/relationships" id="260" r:id="Rbe1a9242a7694f04"/>
-    <p:sldId xmlns:r="http://schemas.openxmlformats.org/officeDocument/2006/relationships" id="261" r:id="R3d766ebddff34504"/>
-    <p:sldId xmlns:r="http://schemas.openxmlformats.org/officeDocument/2006/relationships" id="262" r:id="R265c084f1ad64469"/>
-    <p:sldId xmlns:r="http://schemas.openxmlformats.org/officeDocument/2006/relationships" id="263" r:id="R23de7ee831c44ea1"/>
-    <p:sldId xmlns:r="http://schemas.openxmlformats.org/officeDocument/2006/relationships" id="264" r:id="Ra740c3197a3b4322"/>
-    <p:sldId xmlns:r="http://schemas.openxmlformats.org/officeDocument/2006/relationships" id="265" r:id="Rbf016e4c05564332"/>
+    <p:sldId xmlns:r="http://schemas.openxmlformats.org/officeDocument/2006/relationships" id="256" r:id="R695af3602dd14d92"/>
+    <p:sldId xmlns:r="http://schemas.openxmlformats.org/officeDocument/2006/relationships" id="257" r:id="R660f3bf21dad4c6b"/>
+    <p:sldId xmlns:r="http://schemas.openxmlformats.org/officeDocument/2006/relationships" id="258" r:id="R8657fd6bef734da3"/>
+    <p:sldId xmlns:r="http://schemas.openxmlformats.org/officeDocument/2006/relationships" id="259" r:id="R54f2c5e1cb19470a"/>
+    <p:sldId xmlns:r="http://schemas.openxmlformats.org/officeDocument/2006/relationships" id="260" r:id="R01426e8cdd0b4f63"/>
+    <p:sldId xmlns:r="http://schemas.openxmlformats.org/officeDocument/2006/relationships" id="261" r:id="R3a820b7c447c404f"/>
+    <p:sldId xmlns:r="http://schemas.openxmlformats.org/officeDocument/2006/relationships" id="262" r:id="Rb46309d4fc40414f"/>
+    <p:sldId xmlns:r="http://schemas.openxmlformats.org/officeDocument/2006/relationships" id="263" r:id="Rb54c44e178c343b3"/>
+    <p:sldId xmlns:r="http://schemas.openxmlformats.org/officeDocument/2006/relationships" id="264" r:id="R27046f9affff4bea"/>
+    <p:sldId xmlns:r="http://schemas.openxmlformats.org/officeDocument/2006/relationships" id="265" r:id="Rd905692064a1412c"/>
   </p:sldIdLst>
   <p:sldSz cx="12192000" cy="6858000"/>
   <p:notesSz cx="6858000" cy="9144000"/>
@@ -1199,7 +1199,7 @@
   </p:cSld>
   <p:clrMap bg1="lt1" tx1="dk1" bg2="lt2" tx2="dk2" accent1="accent1" accent2="accent2" accent3="accent3" accent4="accent4" accent5="accent5" accent6="accent6" hlink="hlink" folHlink="folHlink"/>
   <p:sldLayoutIdLst>
-    <p:sldLayoutId xmlns:r="http://schemas.openxmlformats.org/officeDocument/2006/relationships" id="2147483649" r:id="R4c7a67f223a84253"/>
+    <p:sldLayoutId xmlns:r="http://schemas.openxmlformats.org/officeDocument/2006/relationships" id="2147483649" r:id="R0cf629dc12124d89"/>
   </p:sldLayoutIdLst>
   <p:txStyles>
     <p:titleStyle>
@@ -1750,7 +1750,7 @@
           <p:cNvPr id="5" name="">
             <a:extLst xmlns:a="http://schemas.openxmlformats.org/drawingml/2006/main">
               <a:ext uri="{FF2B5EF4-FFF2-40B4-BE49-F238E27FC236}">
-                <a16:creationId xmlns:a16="http://schemas.microsoft.com/office/drawing/2014/main" id="{F6FEFB8B-2D88-4716-92AF-6AEB90DD866A}"/>
+                <a16:creationId xmlns:a16="http://schemas.microsoft.com/office/drawing/2014/main" id="{697E6290-C797-46C1-AA56-FADFE45282E6}"/>
               </a:ext>
             </a:extLst>
           </p:cNvPr>
@@ -1807,7 +1807,7 @@
           <p:cNvPr id="2" name="">
             <a:extLst xmlns:a="http://schemas.openxmlformats.org/drawingml/2006/main">
               <a:ext uri="{FF2B5EF4-FFF2-40B4-BE49-F238E27FC236}">
-                <a16:creationId xmlns:a16="http://schemas.microsoft.com/office/drawing/2014/main" id="{DE982CB5-61C5-4EEB-98AB-3BCCEC9F48ED}"/>
+                <a16:creationId xmlns:a16="http://schemas.microsoft.com/office/drawing/2014/main" id="{2ED27E64-4A41-4700-88E9-9C1531C7DAA2}"/>
               </a:ext>
             </a:extLst>
           </p:cNvPr>
@@ -1864,7 +1864,7 @@
           <p:cNvPr id="3" name="">
             <a:extLst xmlns:a="http://schemas.openxmlformats.org/drawingml/2006/main">
               <a:ext uri="{FF2B5EF4-FFF2-40B4-BE49-F238E27FC236}">
-                <a16:creationId xmlns:a16="http://schemas.microsoft.com/office/drawing/2014/main" id="{0AD4A068-CFB7-427C-9713-8A57517FF611}"/>
+                <a16:creationId xmlns:a16="http://schemas.microsoft.com/office/drawing/2014/main" id="{A526088F-0772-46CD-9F4A-F74C826968D9}"/>
               </a:ext>
             </a:extLst>
           </p:cNvPr>
@@ -1921,7 +1921,7 @@
           <p:cNvPr id="4" name="">
             <a:extLst xmlns:a="http://schemas.openxmlformats.org/drawingml/2006/main">
               <a:ext uri="{FF2B5EF4-FFF2-40B4-BE49-F238E27FC236}">
-                <a16:creationId xmlns:a16="http://schemas.microsoft.com/office/drawing/2014/main" id="{8A579162-666E-414D-8CCE-E06FBC0FCE2B}"/>
+                <a16:creationId xmlns:a16="http://schemas.microsoft.com/office/drawing/2014/main" id="{1A58FFA2-896A-4763-88B9-02952E0FC4A1}"/>
               </a:ext>
             </a:extLst>
           </p:cNvPr>
@@ -1999,7 +1999,7 @@
     </p:spTree>
     <p:extLst>
       <p:ext uri="{BB962C8B-B14F-4D97-AF65-F5344CB8AC3E}">
-        <p14:creationId xmlns:p14="http://schemas.microsoft.com/office/powerpoint/2010/main" val="1338108103"/>
+        <p14:creationId xmlns:p14="http://schemas.microsoft.com/office/powerpoint/2010/main" val="1495567075"/>
       </p:ext>
     </p:extLst>
   </p:cSld>
@@ -2030,7 +2030,7 @@
           <p:cNvPr id="7" name="">
             <a:extLst xmlns:a="http://schemas.openxmlformats.org/drawingml/2006/main">
               <a:ext uri="{FF2B5EF4-FFF2-40B4-BE49-F238E27FC236}">
-                <a16:creationId xmlns:a16="http://schemas.microsoft.com/office/drawing/2014/main" id="{F850D884-DF75-4E5C-A265-79E6BC321152}"/>
+                <a16:creationId xmlns:a16="http://schemas.microsoft.com/office/drawing/2014/main" id="{6ACC0576-2890-41E3-B9DA-6EFDCAA77928}"/>
               </a:ext>
             </a:extLst>
           </p:cNvPr>
@@ -2087,7 +2087,7 @@
           <p:cNvPr id="2" name="">
             <a:extLst xmlns:a="http://schemas.openxmlformats.org/drawingml/2006/main">
               <a:ext uri="{FF2B5EF4-FFF2-40B4-BE49-F238E27FC236}">
-                <a16:creationId xmlns:a16="http://schemas.microsoft.com/office/drawing/2014/main" id="{A4ABB443-9B62-4D6B-99D7-EB59B8BEF558}"/>
+                <a16:creationId xmlns:a16="http://schemas.microsoft.com/office/drawing/2014/main" id="{B8E3303E-4EBA-4A33-8630-E7B2D3458F7B}"/>
               </a:ext>
             </a:extLst>
           </p:cNvPr>
@@ -2144,7 +2144,7 @@
           <p:cNvPr id="3" name="">
             <a:extLst xmlns:a="http://schemas.openxmlformats.org/drawingml/2006/main">
               <a:ext uri="{FF2B5EF4-FFF2-40B4-BE49-F238E27FC236}">
-                <a16:creationId xmlns:a16="http://schemas.microsoft.com/office/drawing/2014/main" id="{0834875B-877D-477C-9F9B-0F8A706121C1}"/>
+                <a16:creationId xmlns:a16="http://schemas.microsoft.com/office/drawing/2014/main" id="{01253FB5-5591-45D6-8422-CF690FC8B83F}"/>
               </a:ext>
             </a:extLst>
           </p:cNvPr>
@@ -2201,7 +2201,7 @@
           <p:cNvPr id="4" name="">
             <a:extLst xmlns:a="http://schemas.openxmlformats.org/drawingml/2006/main">
               <a:ext uri="{FF2B5EF4-FFF2-40B4-BE49-F238E27FC236}">
-                <a16:creationId xmlns:a16="http://schemas.microsoft.com/office/drawing/2014/main" id="{B1968688-8594-4EEB-ACF2-7D1D71717BBF}"/>
+                <a16:creationId xmlns:a16="http://schemas.microsoft.com/office/drawing/2014/main" id="{46522086-3BC2-4A73-844F-1B0C6E1D338A}"/>
               </a:ext>
             </a:extLst>
           </p:cNvPr>
@@ -2258,7 +2258,7 @@
           <p:cNvPr id="5" name="">
             <a:extLst xmlns:a="http://schemas.openxmlformats.org/drawingml/2006/main">
               <a:ext uri="{FF2B5EF4-FFF2-40B4-BE49-F238E27FC236}">
-                <a16:creationId xmlns:a16="http://schemas.microsoft.com/office/drawing/2014/main" id="{6A04CDBD-D8FB-4257-B5D0-2FF95412FAAF}"/>
+                <a16:creationId xmlns:a16="http://schemas.microsoft.com/office/drawing/2014/main" id="{A8B64772-6727-48F1-B3B6-CCB4EDD5E5DD}"/>
               </a:ext>
             </a:extLst>
           </p:cNvPr>
@@ -2315,7 +2315,7 @@
           <p:cNvPr id="6" name="">
             <a:extLst xmlns:a="http://schemas.openxmlformats.org/drawingml/2006/main">
               <a:ext uri="{FF2B5EF4-FFF2-40B4-BE49-F238E27FC236}">
-                <a16:creationId xmlns:a16="http://schemas.microsoft.com/office/drawing/2014/main" id="{107EC6B3-44C4-43AB-82C9-51C68D47A44C}"/>
+                <a16:creationId xmlns:a16="http://schemas.microsoft.com/office/drawing/2014/main" id="{C5BE58CE-0DDE-4C44-9AFC-3598A253897D}"/>
               </a:ext>
             </a:extLst>
           </p:cNvPr>
@@ -2370,7 +2370,7 @@
     </p:spTree>
     <p:extLst>
       <p:ext uri="{BB962C8B-B14F-4D97-AF65-F5344CB8AC3E}">
-        <p14:creationId xmlns:p14="http://schemas.microsoft.com/office/powerpoint/2010/main" val="193277266"/>
+        <p14:creationId xmlns:p14="http://schemas.microsoft.com/office/powerpoint/2010/main" val="2038280515"/>
       </p:ext>
     </p:extLst>
   </p:cSld>
@@ -2401,7 +2401,7 @@
           <p:cNvPr id="3" name="">
             <a:extLst xmlns:a="http://schemas.openxmlformats.org/drawingml/2006/main">
               <a:ext uri="{FF2B5EF4-FFF2-40B4-BE49-F238E27FC236}">
-                <a16:creationId xmlns:a16="http://schemas.microsoft.com/office/drawing/2014/main" id="{EFC2DFDC-C91B-4F53-A7DA-225190DB003F}"/>
+                <a16:creationId xmlns:a16="http://schemas.microsoft.com/office/drawing/2014/main" id="{983D7EE6-972D-4AC6-B079-5067135AD2E2}"/>
               </a:ext>
             </a:extLst>
           </p:cNvPr>
@@ -3145,7 +3145,7 @@
     </p:spTree>
     <p:extLst>
       <p:ext uri="{BB962C8B-B14F-4D97-AF65-F5344CB8AC3E}">
-        <p14:creationId xmlns:p14="http://schemas.microsoft.com/office/powerpoint/2010/main" val="431561848"/>
+        <p14:creationId xmlns:p14="http://schemas.microsoft.com/office/powerpoint/2010/main" val="432924695"/>
       </p:ext>
     </p:extLst>
   </p:cSld>
@@ -3176,7 +3176,7 @@
           <p:cNvPr id="3" name="">
             <a:extLst xmlns:a="http://schemas.openxmlformats.org/drawingml/2006/main">
               <a:ext uri="{FF2B5EF4-FFF2-40B4-BE49-F238E27FC236}">
-                <a16:creationId xmlns:a16="http://schemas.microsoft.com/office/drawing/2014/main" id="{01FA1B25-8D17-436B-A118-220AA130670D}"/>
+                <a16:creationId xmlns:a16="http://schemas.microsoft.com/office/drawing/2014/main" id="{41F6FCC6-ABF2-4F4D-B703-8FAC07A2D297}"/>
               </a:ext>
             </a:extLst>
           </p:cNvPr>
@@ -3237,13 +3237,13 @@
           <p:nvPr/>
         </p:nvPicPr>
         <p:blipFill>
-          <a:blip xmlns:r="http://schemas.openxmlformats.org/officeDocument/2006/relationships" xmlns:a="http://schemas.openxmlformats.org/drawingml/2006/main" r:embed="R650eb5b03a414289"/>
+          <a:blip xmlns:r="http://schemas.openxmlformats.org/officeDocument/2006/relationships" xmlns:a="http://schemas.openxmlformats.org/drawingml/2006/main" r:embed="R32741d406475434d"/>
           <a:stretch xmlns:a="http://schemas.openxmlformats.org/drawingml/2006/main"/>
         </p:blipFill>
         <p:spPr>
           <a:xfrm xmlns:a="http://schemas.openxmlformats.org/drawingml/2006/main">
-            <a:off x="1791338" y="1285875"/>
-            <a:ext cx="8609323" cy="5000625"/>
+            <a:off x="1895475" y="1285875"/>
+            <a:ext cx="8401050" cy="5000625"/>
           </a:xfrm>
           <a:prstGeom xmlns:a="http://schemas.openxmlformats.org/drawingml/2006/main" prst="rect">
             <a:avLst/>
@@ -3253,7 +3253,7 @@
     </p:spTree>
     <p:extLst>
       <p:ext uri="{BB962C8B-B14F-4D97-AF65-F5344CB8AC3E}">
-        <p14:creationId xmlns:p14="http://schemas.microsoft.com/office/powerpoint/2010/main" val="1983434303"/>
+        <p14:creationId xmlns:p14="http://schemas.microsoft.com/office/powerpoint/2010/main" val="2023623535"/>
       </p:ext>
     </p:extLst>
   </p:cSld>
@@ -3284,7 +3284,7 @@
           <p:cNvPr id="3" name="">
             <a:extLst xmlns:a="http://schemas.openxmlformats.org/drawingml/2006/main">
               <a:ext uri="{FF2B5EF4-FFF2-40B4-BE49-F238E27FC236}">
-                <a16:creationId xmlns:a16="http://schemas.microsoft.com/office/drawing/2014/main" id="{710B5173-2E38-4DF1-AB03-3C1C6CE11C93}"/>
+                <a16:creationId xmlns:a16="http://schemas.microsoft.com/office/drawing/2014/main" id="{5CFBC7C4-6DB7-4DFA-8AAA-1EFB075D4E26}"/>
               </a:ext>
             </a:extLst>
           </p:cNvPr>
@@ -3331,7 +3331,7 @@
                 <a:ea typeface="Arial"/>
                 <a:cs typeface="Arial"/>
               </a:rPr>
-              <a:t>IDEF0 TO BE: шесть целевых функций</a:t>
+              <a:t>IDEF0 TO BE: пять целевых функций</a:t>
             </a:r>
           </a:p>
         </p:txBody>
@@ -3345,13 +3345,13 @@
           <p:nvPr/>
         </p:nvPicPr>
         <p:blipFill>
-          <a:blip xmlns:r="http://schemas.openxmlformats.org/officeDocument/2006/relationships" xmlns:a="http://schemas.openxmlformats.org/drawingml/2006/main" r:embed="Ra05978a3df834ce2"/>
+          <a:blip xmlns:r="http://schemas.openxmlformats.org/officeDocument/2006/relationships" xmlns:a="http://schemas.openxmlformats.org/drawingml/2006/main" r:embed="R365ea8ea9ae246b3"/>
           <a:stretch xmlns:a="http://schemas.openxmlformats.org/drawingml/2006/main"/>
         </p:blipFill>
         <p:spPr>
           <a:xfrm xmlns:a="http://schemas.openxmlformats.org/drawingml/2006/main">
-            <a:off x="2015931" y="1285875"/>
-            <a:ext cx="8160137" cy="5000625"/>
+            <a:off x="1895475" y="1285875"/>
+            <a:ext cx="8401050" cy="5000625"/>
           </a:xfrm>
           <a:prstGeom xmlns:a="http://schemas.openxmlformats.org/drawingml/2006/main" prst="rect">
             <a:avLst/>
@@ -3361,7 +3361,7 @@
     </p:spTree>
     <p:extLst>
       <p:ext uri="{BB962C8B-B14F-4D97-AF65-F5344CB8AC3E}">
-        <p14:creationId xmlns:p14="http://schemas.microsoft.com/office/powerpoint/2010/main" val="1710262036"/>
+        <p14:creationId xmlns:p14="http://schemas.microsoft.com/office/powerpoint/2010/main" val="1889018658"/>
       </p:ext>
     </p:extLst>
   </p:cSld>
@@ -3392,7 +3392,7 @@
           <p:cNvPr id="3" name="">
             <a:extLst xmlns:a="http://schemas.openxmlformats.org/drawingml/2006/main">
               <a:ext uri="{FF2B5EF4-FFF2-40B4-BE49-F238E27FC236}">
-                <a16:creationId xmlns:a16="http://schemas.microsoft.com/office/drawing/2014/main" id="{E14D51D8-69AA-4DAD-9BEB-DDFAC5F22492}"/>
+                <a16:creationId xmlns:a16="http://schemas.microsoft.com/office/drawing/2014/main" id="{26F3777F-2EA4-470C-8878-750B749420D2}"/>
               </a:ext>
             </a:extLst>
           </p:cNvPr>
@@ -3453,13 +3453,13 @@
           <p:nvPr/>
         </p:nvPicPr>
         <p:blipFill>
-          <a:blip xmlns:r="http://schemas.openxmlformats.org/officeDocument/2006/relationships" xmlns:a="http://schemas.openxmlformats.org/drawingml/2006/main" r:embed="R2b7397343fa346f5"/>
+          <a:blip xmlns:r="http://schemas.openxmlformats.org/officeDocument/2006/relationships" xmlns:a="http://schemas.openxmlformats.org/drawingml/2006/main" r:embed="R86c8104ba3bb491c"/>
           <a:stretch xmlns:a="http://schemas.openxmlformats.org/drawingml/2006/main"/>
         </p:blipFill>
         <p:spPr>
           <a:xfrm xmlns:a="http://schemas.openxmlformats.org/drawingml/2006/main">
-            <a:off x="1623029" y="1285875"/>
-            <a:ext cx="8945942" cy="5000625"/>
+            <a:off x="1453510" y="1285875"/>
+            <a:ext cx="9284980" cy="5000625"/>
           </a:xfrm>
           <a:prstGeom xmlns:a="http://schemas.openxmlformats.org/drawingml/2006/main" prst="rect">
             <a:avLst/>
@@ -3469,7 +3469,7 @@
     </p:spTree>
     <p:extLst>
       <p:ext uri="{BB962C8B-B14F-4D97-AF65-F5344CB8AC3E}">
-        <p14:creationId xmlns:p14="http://schemas.microsoft.com/office/powerpoint/2010/main" val="200329520"/>
+        <p14:creationId xmlns:p14="http://schemas.microsoft.com/office/powerpoint/2010/main" val="343065144"/>
       </p:ext>
     </p:extLst>
   </p:cSld>
@@ -3500,7 +3500,7 @@
           <p:cNvPr id="3" name="">
             <a:extLst xmlns:a="http://schemas.openxmlformats.org/drawingml/2006/main">
               <a:ext uri="{FF2B5EF4-FFF2-40B4-BE49-F238E27FC236}">
-                <a16:creationId xmlns:a16="http://schemas.microsoft.com/office/drawing/2014/main" id="{31A67978-C35D-4353-B49E-00C123E97D03}"/>
+                <a16:creationId xmlns:a16="http://schemas.microsoft.com/office/drawing/2014/main" id="{A08D5BE2-71F6-466D-8581-2D13858FC146}"/>
               </a:ext>
             </a:extLst>
           </p:cNvPr>
@@ -3561,13 +3561,13 @@
           <p:nvPr/>
         </p:nvPicPr>
         <p:blipFill>
-          <a:blip xmlns:r="http://schemas.openxmlformats.org/officeDocument/2006/relationships" xmlns:a="http://schemas.openxmlformats.org/drawingml/2006/main" r:embed="R7de597416b074cc1"/>
+          <a:blip xmlns:r="http://schemas.openxmlformats.org/officeDocument/2006/relationships" xmlns:a="http://schemas.openxmlformats.org/drawingml/2006/main" r:embed="R539ec704c04d4123"/>
           <a:stretch xmlns:a="http://schemas.openxmlformats.org/drawingml/2006/main"/>
         </p:blipFill>
         <p:spPr>
           <a:xfrm xmlns:a="http://schemas.openxmlformats.org/drawingml/2006/main">
-            <a:off x="1758507" y="1285875"/>
-            <a:ext cx="8674986" cy="5000625"/>
+            <a:off x="1606341" y="1285875"/>
+            <a:ext cx="8979318" cy="5000625"/>
           </a:xfrm>
           <a:prstGeom xmlns:a="http://schemas.openxmlformats.org/drawingml/2006/main" prst="rect">
             <a:avLst/>
@@ -3577,7 +3577,7 @@
     </p:spTree>
     <p:extLst>
       <p:ext uri="{BB962C8B-B14F-4D97-AF65-F5344CB8AC3E}">
-        <p14:creationId xmlns:p14="http://schemas.microsoft.com/office/powerpoint/2010/main" val="272483068"/>
+        <p14:creationId xmlns:p14="http://schemas.microsoft.com/office/powerpoint/2010/main" val="1469722470"/>
       </p:ext>
     </p:extLst>
   </p:cSld>
@@ -3608,7 +3608,7 @@
           <p:cNvPr id="3" name="">
             <a:extLst xmlns:a="http://schemas.openxmlformats.org/drawingml/2006/main">
               <a:ext uri="{FF2B5EF4-FFF2-40B4-BE49-F238E27FC236}">
-                <a16:creationId xmlns:a16="http://schemas.microsoft.com/office/drawing/2014/main" id="{05CCFDD6-F518-4A87-AD75-7BD2B72D4588}"/>
+                <a16:creationId xmlns:a16="http://schemas.microsoft.com/office/drawing/2014/main" id="{39289CA5-D1E9-4D01-AA2D-26FFB369FB2D}"/>
               </a:ext>
             </a:extLst>
           </p:cNvPr>
@@ -3669,13 +3669,13 @@
           <p:nvPr/>
         </p:nvPicPr>
         <p:blipFill>
-          <a:blip xmlns:r="http://schemas.openxmlformats.org/officeDocument/2006/relationships" xmlns:a="http://schemas.openxmlformats.org/drawingml/2006/main" r:embed="R4329ac5b80c94734"/>
+          <a:blip xmlns:r="http://schemas.openxmlformats.org/officeDocument/2006/relationships" xmlns:a="http://schemas.openxmlformats.org/drawingml/2006/main" r:embed="R34f670d516374e9b"/>
           <a:stretch xmlns:a="http://schemas.openxmlformats.org/drawingml/2006/main"/>
         </p:blipFill>
         <p:spPr>
           <a:xfrm xmlns:a="http://schemas.openxmlformats.org/drawingml/2006/main">
-            <a:off x="571500" y="1655719"/>
-            <a:ext cx="11049000" cy="4260937"/>
+            <a:off x="571500" y="1534296"/>
+            <a:ext cx="11049000" cy="4503783"/>
           </a:xfrm>
           <a:prstGeom xmlns:a="http://schemas.openxmlformats.org/drawingml/2006/main" prst="rect">
             <a:avLst/>
@@ -3685,7 +3685,7 @@
     </p:spTree>
     <p:extLst>
       <p:ext uri="{BB962C8B-B14F-4D97-AF65-F5344CB8AC3E}">
-        <p14:creationId xmlns:p14="http://schemas.microsoft.com/office/powerpoint/2010/main" val="1379534739"/>
+        <p14:creationId xmlns:p14="http://schemas.microsoft.com/office/powerpoint/2010/main" val="670667975"/>
       </p:ext>
     </p:extLst>
   </p:cSld>
@@ -3716,7 +3716,7 @@
           <p:cNvPr id="3" name="">
             <a:extLst xmlns:a="http://schemas.openxmlformats.org/drawingml/2006/main">
               <a:ext uri="{FF2B5EF4-FFF2-40B4-BE49-F238E27FC236}">
-                <a16:creationId xmlns:a16="http://schemas.microsoft.com/office/drawing/2014/main" id="{44744F4D-5F81-4D42-9BF1-1C71A3A904C5}"/>
+                <a16:creationId xmlns:a16="http://schemas.microsoft.com/office/drawing/2014/main" id="{8B1ED0BF-6EFD-424F-87EE-FC048374B8C9}"/>
               </a:ext>
             </a:extLst>
           </p:cNvPr>
@@ -3777,13 +3777,13 @@
           <p:nvPr/>
         </p:nvPicPr>
         <p:blipFill>
-          <a:blip xmlns:r="http://schemas.openxmlformats.org/officeDocument/2006/relationships" xmlns:a="http://schemas.openxmlformats.org/drawingml/2006/main" r:embed="R155f4bf9d4a445b3"/>
+          <a:blip xmlns:r="http://schemas.openxmlformats.org/officeDocument/2006/relationships" xmlns:a="http://schemas.openxmlformats.org/drawingml/2006/main" r:embed="R0a8be8497578412c"/>
           <a:stretch xmlns:a="http://schemas.openxmlformats.org/drawingml/2006/main"/>
         </p:blipFill>
         <p:spPr>
           <a:xfrm xmlns:a="http://schemas.openxmlformats.org/drawingml/2006/main">
-            <a:off x="854857" y="1285875"/>
-            <a:ext cx="10482286" cy="5000625"/>
+            <a:off x="571500" y="1297532"/>
+            <a:ext cx="11049000" cy="4977311"/>
           </a:xfrm>
           <a:prstGeom xmlns:a="http://schemas.openxmlformats.org/drawingml/2006/main" prst="rect">
             <a:avLst/>
@@ -3793,7 +3793,7 @@
     </p:spTree>
     <p:extLst>
       <p:ext uri="{BB962C8B-B14F-4D97-AF65-F5344CB8AC3E}">
-        <p14:creationId xmlns:p14="http://schemas.microsoft.com/office/powerpoint/2010/main" val="701808855"/>
+        <p14:creationId xmlns:p14="http://schemas.microsoft.com/office/powerpoint/2010/main" val="354635978"/>
       </p:ext>
     </p:extLst>
   </p:cSld>
@@ -3824,7 +3824,7 @@
           <p:cNvPr id="3" name="">
             <a:extLst xmlns:a="http://schemas.openxmlformats.org/drawingml/2006/main">
               <a:ext uri="{FF2B5EF4-FFF2-40B4-BE49-F238E27FC236}">
-                <a16:creationId xmlns:a16="http://schemas.microsoft.com/office/drawing/2014/main" id="{3878AD17-B71E-4CF1-8F36-9EAF8A4551B7}"/>
+                <a16:creationId xmlns:a16="http://schemas.microsoft.com/office/drawing/2014/main" id="{CF51E322-468C-4081-9041-3E59DAB834C1}"/>
               </a:ext>
             </a:extLst>
           </p:cNvPr>
@@ -3885,13 +3885,13 @@
           <p:nvPr/>
         </p:nvPicPr>
         <p:blipFill>
-          <a:blip xmlns:r="http://schemas.openxmlformats.org/officeDocument/2006/relationships" xmlns:a="http://schemas.openxmlformats.org/drawingml/2006/main" r:embed="R2c5d847692ff4c03"/>
+          <a:blip xmlns:r="http://schemas.openxmlformats.org/officeDocument/2006/relationships" xmlns:a="http://schemas.openxmlformats.org/drawingml/2006/main" r:embed="R6bae3c4c86b84282"/>
           <a:stretch xmlns:a="http://schemas.openxmlformats.org/drawingml/2006/main"/>
         </p:blipFill>
         <p:spPr>
           <a:xfrm xmlns:a="http://schemas.openxmlformats.org/drawingml/2006/main">
-            <a:off x="2478555" y="1285875"/>
-            <a:ext cx="7234890" cy="5000625"/>
+            <a:off x="2319908" y="1285875"/>
+            <a:ext cx="7552184" cy="5000625"/>
           </a:xfrm>
           <a:prstGeom xmlns:a="http://schemas.openxmlformats.org/drawingml/2006/main" prst="rect">
             <a:avLst/>
@@ -3901,7 +3901,7 @@
     </p:spTree>
     <p:extLst>
       <p:ext uri="{BB962C8B-B14F-4D97-AF65-F5344CB8AC3E}">
-        <p14:creationId xmlns:p14="http://schemas.microsoft.com/office/powerpoint/2010/main" val="186878433"/>
+        <p14:creationId xmlns:p14="http://schemas.microsoft.com/office/powerpoint/2010/main" val="1316292344"/>
       </p:ext>
     </p:extLst>
   </p:cSld>

--- a/4/РОП/Практики_1-8/Презентации/РОП_Практическая_2_АлбахтинИВ.pptx
+++ b/4/РОП/Практики_1-8/Презентации/РОП_Практическая_2_АлбахтинИВ.pptx
@@ -2,22 +2,22 @@
 <file path=ppt/presentation.xml><?xml version="1.0" encoding="utf-8"?>
 <p:presentation xmlns:p="http://schemas.openxmlformats.org/presentationml/2006/main">
   <p:sldMasterIdLst>
-    <p:sldMasterId xmlns:r="http://schemas.openxmlformats.org/officeDocument/2006/relationships" id="2147483648" r:id="Rf36d6e36f22b488d"/>
+    <p:sldMasterId xmlns:r="http://schemas.openxmlformats.org/officeDocument/2006/relationships" id="2147483648" r:id="Re9c6a853f5264cbc"/>
   </p:sldMasterIdLst>
   <p:notesMasterIdLst>
-    <p:notesMasterId xmlns:r="http://schemas.openxmlformats.org/officeDocument/2006/relationships" r:id="R8560a40f4c274f94"/>
+    <p:notesMasterId xmlns:r="http://schemas.openxmlformats.org/officeDocument/2006/relationships" r:id="R62e1d5ed05884f96"/>
   </p:notesMasterIdLst>
   <p:sldIdLst>
-    <p:sldId xmlns:r="http://schemas.openxmlformats.org/officeDocument/2006/relationships" id="256" r:id="R695af3602dd14d92"/>
-    <p:sldId xmlns:r="http://schemas.openxmlformats.org/officeDocument/2006/relationships" id="257" r:id="R660f3bf21dad4c6b"/>
-    <p:sldId xmlns:r="http://schemas.openxmlformats.org/officeDocument/2006/relationships" id="258" r:id="R8657fd6bef734da3"/>
-    <p:sldId xmlns:r="http://schemas.openxmlformats.org/officeDocument/2006/relationships" id="259" r:id="R54f2c5e1cb19470a"/>
-    <p:sldId xmlns:r="http://schemas.openxmlformats.org/officeDocument/2006/relationships" id="260" r:id="R01426e8cdd0b4f63"/>
-    <p:sldId xmlns:r="http://schemas.openxmlformats.org/officeDocument/2006/relationships" id="261" r:id="R3a820b7c447c404f"/>
-    <p:sldId xmlns:r="http://schemas.openxmlformats.org/officeDocument/2006/relationships" id="262" r:id="Rb46309d4fc40414f"/>
-    <p:sldId xmlns:r="http://schemas.openxmlformats.org/officeDocument/2006/relationships" id="263" r:id="Rb54c44e178c343b3"/>
-    <p:sldId xmlns:r="http://schemas.openxmlformats.org/officeDocument/2006/relationships" id="264" r:id="R27046f9affff4bea"/>
-    <p:sldId xmlns:r="http://schemas.openxmlformats.org/officeDocument/2006/relationships" id="265" r:id="Rd905692064a1412c"/>
+    <p:sldId xmlns:r="http://schemas.openxmlformats.org/officeDocument/2006/relationships" id="256" r:id="Rfbec5f3c17504976"/>
+    <p:sldId xmlns:r="http://schemas.openxmlformats.org/officeDocument/2006/relationships" id="257" r:id="R80730229b8444a87"/>
+    <p:sldId xmlns:r="http://schemas.openxmlformats.org/officeDocument/2006/relationships" id="258" r:id="R90c25645aeb44e21"/>
+    <p:sldId xmlns:r="http://schemas.openxmlformats.org/officeDocument/2006/relationships" id="259" r:id="Raffa92c6f2104e3b"/>
+    <p:sldId xmlns:r="http://schemas.openxmlformats.org/officeDocument/2006/relationships" id="260" r:id="Rd5f3222b207a4084"/>
+    <p:sldId xmlns:r="http://schemas.openxmlformats.org/officeDocument/2006/relationships" id="261" r:id="R8b225176dc914f7e"/>
+    <p:sldId xmlns:r="http://schemas.openxmlformats.org/officeDocument/2006/relationships" id="262" r:id="R204305f24e9144ca"/>
+    <p:sldId xmlns:r="http://schemas.openxmlformats.org/officeDocument/2006/relationships" id="263" r:id="R00f9fd11d34146df"/>
+    <p:sldId xmlns:r="http://schemas.openxmlformats.org/officeDocument/2006/relationships" id="264" r:id="R3d33d014a22040cf"/>
+    <p:sldId xmlns:r="http://schemas.openxmlformats.org/officeDocument/2006/relationships" id="265" r:id="R95f82111c40449ec"/>
   </p:sldIdLst>
   <p:sldSz cx="12192000" cy="6858000"/>
   <p:notesSz cx="6858000" cy="9144000"/>
@@ -207,16 +207,16 @@
         <a:srgbClr val="96607D"/>
       </a:folHlink>
     </a:clrScheme>
-    <a:fontScheme name="Office">
+    <a:fontScheme name="">
       <a:majorFont>
-        <a:latin typeface="Calibri Light"/>
-        <a:ea typeface="Calibri Light"/>
-        <a:cs typeface="Calibri Light"/>
+        <a:latin typeface="Aptos"/>
+        <a:ea typeface=""/>
+        <a:cs typeface=""/>
       </a:majorFont>
       <a:minorFont>
-        <a:latin typeface="Calibri"/>
-        <a:ea typeface="Calibri"/>
-        <a:cs typeface="Calibri"/>
+        <a:latin typeface="Aptos"/>
+        <a:ea typeface=""/>
+        <a:cs typeface=""/>
       </a:minorFont>
     </a:fontScheme>
     <a:fmtScheme name="ChatGPT">
@@ -1173,6 +1173,1661 @@
       <p:grpSpPr>
         <a:xfrm xmlns:a="http://schemas.openxmlformats.org/drawingml/2006/main"/>
       </p:grpSpPr>
+      <p:sp>
+        <p:nvSpPr>
+          <p:cNvPr id="3" name="Title">
+            <a:extLst xmlns:a="http://schemas.openxmlformats.org/drawingml/2006/main">
+              <a:ext uri="{FF2B5EF4-FFF2-40B4-BE49-F238E27FC236}">
+                <a16:creationId xmlns:a16="http://schemas.microsoft.com/office/drawing/2014/main" id="{D7E45373-AD53-493A-B062-A9C85EF67BD0}"/>
+              </a:ext>
+            </a:extLst>
+          </p:cNvPr>
+          <p:cNvSpPr>
+            <a:spLocks xmlns:a="http://schemas.openxmlformats.org/drawingml/2006/main" noGrp="1"/>
+          </p:cNvSpPr>
+          <p:nvPr>
+            <p:ph type="title" idx="0"/>
+          </p:nvPr>
+        </p:nvSpPr>
+        <p:spPr>
+          <a:xfrm xmlns:a="http://schemas.openxmlformats.org/drawingml/2006/main">
+            <a:off x="1219200" y="2590800"/>
+            <a:ext cx="9753600" cy="990600"/>
+          </a:xfrm>
+          <a:prstGeom xmlns:a="http://schemas.openxmlformats.org/drawingml/2006/main" prst="rect">
+            <a:avLst/>
+          </a:prstGeom>
+          <a:noFill xmlns:a="http://schemas.openxmlformats.org/drawingml/2006/main"/>
+          <a:ln xmlns:a="http://schemas.openxmlformats.org/drawingml/2006/main">
+            <a:noFill/>
+            <a:prstDash val="solid"/>
+          </a:ln>
+        </p:spPr>
+        <p:txBody>
+          <a:bodyPr xmlns:a="http://schemas.openxmlformats.org/drawingml/2006/main" wrap="square" lIns="0" tIns="0" rIns="0" bIns="0" anchor="ctr">
+            <a:normAutofit/>
+          </a:bodyPr>
+          <a:lstStyle xmlns:a="http://schemas.openxmlformats.org/drawingml/2006/main">
+            <a:defPPr algn="ctr">
+              <a:defRPr sz="4800" b="1">
+                <a:solidFill>
+                  <a:schemeClr val="tx1"/>
+                </a:solidFill>
+                <a:latin typeface="+mj-lt"/>
+                <a:ea typeface="+mj-lt"/>
+                <a:cs typeface="+mj-lt"/>
+              </a:defRPr>
+            </a:defPPr>
+            <a:lvl1pPr marL="0" indent="0">
+              <a:lnSpc>
+                <a:spcPct val="110000"/>
+              </a:lnSpc>
+              <a:spcBef>
+                <a:spcPts val="0"/>
+              </a:spcBef>
+              <a:spcAft>
+                <a:spcPts val="0"/>
+              </a:spcAft>
+              <a:buNone/>
+            </a:lvl1pPr>
+            <a:lvl2pPr marL="0" indent="0">
+              <a:lnSpc>
+                <a:spcPct val="110000"/>
+              </a:lnSpc>
+              <a:spcBef>
+                <a:spcPts val="0"/>
+              </a:spcBef>
+              <a:spcAft>
+                <a:spcPts val="0"/>
+              </a:spcAft>
+              <a:buNone/>
+            </a:lvl2pPr>
+            <a:lvl3pPr marL="0" indent="0">
+              <a:lnSpc>
+                <a:spcPct val="110000"/>
+              </a:lnSpc>
+              <a:spcBef>
+                <a:spcPts val="0"/>
+              </a:spcBef>
+              <a:spcAft>
+                <a:spcPts val="0"/>
+              </a:spcAft>
+              <a:buNone/>
+            </a:lvl3pPr>
+            <a:lvl4pPr marL="0" indent="0">
+              <a:lnSpc>
+                <a:spcPct val="110000"/>
+              </a:lnSpc>
+              <a:spcBef>
+                <a:spcPts val="0"/>
+              </a:spcBef>
+              <a:spcAft>
+                <a:spcPts val="0"/>
+              </a:spcAft>
+              <a:buNone/>
+            </a:lvl4pPr>
+            <a:lvl5pPr marL="0" indent="0">
+              <a:lnSpc>
+                <a:spcPct val="110000"/>
+              </a:lnSpc>
+              <a:spcBef>
+                <a:spcPts val="0"/>
+              </a:spcBef>
+              <a:spcAft>
+                <a:spcPts val="0"/>
+              </a:spcAft>
+              <a:buNone/>
+            </a:lvl5pPr>
+            <a:lvl6pPr marL="0" indent="0">
+              <a:lnSpc>
+                <a:spcPct val="110000"/>
+              </a:lnSpc>
+              <a:spcBef>
+                <a:spcPts val="0"/>
+              </a:spcBef>
+              <a:spcAft>
+                <a:spcPts val="0"/>
+              </a:spcAft>
+              <a:buNone/>
+            </a:lvl6pPr>
+            <a:lvl7pPr marL="0" indent="0">
+              <a:lnSpc>
+                <a:spcPct val="110000"/>
+              </a:lnSpc>
+              <a:spcBef>
+                <a:spcPts val="0"/>
+              </a:spcBef>
+              <a:spcAft>
+                <a:spcPts val="0"/>
+              </a:spcAft>
+              <a:buNone/>
+            </a:lvl7pPr>
+            <a:lvl8pPr marL="0" indent="0">
+              <a:lnSpc>
+                <a:spcPct val="110000"/>
+              </a:lnSpc>
+              <a:spcBef>
+                <a:spcPts val="0"/>
+              </a:spcBef>
+              <a:spcAft>
+                <a:spcPts val="0"/>
+              </a:spcAft>
+              <a:buNone/>
+            </a:lvl8pPr>
+            <a:lvl9pPr marL="0" indent="0">
+              <a:lnSpc>
+                <a:spcPct val="110000"/>
+              </a:lnSpc>
+              <a:spcBef>
+                <a:spcPts val="0"/>
+              </a:spcBef>
+              <a:spcAft>
+                <a:spcPts val="0"/>
+              </a:spcAft>
+              <a:buNone/>
+            </a:lvl9pPr>
+          </a:lstStyle>
+          <a:p xmlns:a="http://schemas.openxmlformats.org/drawingml/2006/main"/>
+        </p:txBody>
+      </p:sp>
+      <p:sp>
+        <p:nvSpPr>
+          <p:cNvPr id="2" name="Subtitle">
+            <a:extLst xmlns:a="http://schemas.openxmlformats.org/drawingml/2006/main">
+              <a:ext uri="{FF2B5EF4-FFF2-40B4-BE49-F238E27FC236}">
+                <a16:creationId xmlns:a16="http://schemas.microsoft.com/office/drawing/2014/main" id="{EA8861AC-99B2-410E-8D6B-A9FFACF0DD0B}"/>
+              </a:ext>
+            </a:extLst>
+          </p:cNvPr>
+          <p:cNvSpPr>
+            <a:spLocks xmlns:a="http://schemas.openxmlformats.org/drawingml/2006/main" noGrp="1"/>
+          </p:cNvSpPr>
+          <p:nvPr>
+            <p:ph type="subTitle" idx="1"/>
+          </p:nvPr>
+        </p:nvSpPr>
+        <p:spPr>
+          <a:xfrm xmlns:a="http://schemas.openxmlformats.org/drawingml/2006/main">
+            <a:off x="1828800" y="3771900"/>
+            <a:ext cx="8534400" cy="762000"/>
+          </a:xfrm>
+          <a:prstGeom xmlns:a="http://schemas.openxmlformats.org/drawingml/2006/main" prst="rect">
+            <a:avLst/>
+          </a:prstGeom>
+          <a:noFill xmlns:a="http://schemas.openxmlformats.org/drawingml/2006/main"/>
+          <a:ln xmlns:a="http://schemas.openxmlformats.org/drawingml/2006/main">
+            <a:noFill/>
+            <a:prstDash val="solid"/>
+          </a:ln>
+        </p:spPr>
+        <p:txBody>
+          <a:bodyPr xmlns:a="http://schemas.openxmlformats.org/drawingml/2006/main" wrap="square" lIns="0" tIns="0" rIns="0" bIns="0" anchor="ctr">
+            <a:normAutofit/>
+          </a:bodyPr>
+          <a:lstStyle xmlns:a="http://schemas.openxmlformats.org/drawingml/2006/main">
+            <a:defPPr algn="ctr">
+              <a:defRPr sz="2100" b="0">
+                <a:solidFill>
+                  <a:schemeClr val="tx1"/>
+                </a:solidFill>
+                <a:latin typeface="+mn-lt"/>
+                <a:ea typeface="+mn-lt"/>
+                <a:cs typeface="+mn-lt"/>
+              </a:defRPr>
+            </a:defPPr>
+            <a:lvl1pPr marL="0" indent="0">
+              <a:lnSpc>
+                <a:spcPct val="110000"/>
+              </a:lnSpc>
+              <a:spcBef>
+                <a:spcPts val="0"/>
+              </a:spcBef>
+              <a:spcAft>
+                <a:spcPts val="0"/>
+              </a:spcAft>
+              <a:buNone/>
+            </a:lvl1pPr>
+            <a:lvl2pPr marL="0" indent="0">
+              <a:lnSpc>
+                <a:spcPct val="110000"/>
+              </a:lnSpc>
+              <a:spcBef>
+                <a:spcPts val="0"/>
+              </a:spcBef>
+              <a:spcAft>
+                <a:spcPts val="0"/>
+              </a:spcAft>
+              <a:buNone/>
+            </a:lvl2pPr>
+            <a:lvl3pPr marL="0" indent="0">
+              <a:lnSpc>
+                <a:spcPct val="110000"/>
+              </a:lnSpc>
+              <a:spcBef>
+                <a:spcPts val="0"/>
+              </a:spcBef>
+              <a:spcAft>
+                <a:spcPts val="0"/>
+              </a:spcAft>
+              <a:buNone/>
+            </a:lvl3pPr>
+            <a:lvl4pPr marL="0" indent="0">
+              <a:lnSpc>
+                <a:spcPct val="110000"/>
+              </a:lnSpc>
+              <a:spcBef>
+                <a:spcPts val="0"/>
+              </a:spcBef>
+              <a:spcAft>
+                <a:spcPts val="0"/>
+              </a:spcAft>
+              <a:buNone/>
+            </a:lvl4pPr>
+            <a:lvl5pPr marL="0" indent="0">
+              <a:lnSpc>
+                <a:spcPct val="110000"/>
+              </a:lnSpc>
+              <a:spcBef>
+                <a:spcPts val="0"/>
+              </a:spcBef>
+              <a:spcAft>
+                <a:spcPts val="0"/>
+              </a:spcAft>
+              <a:buNone/>
+            </a:lvl5pPr>
+            <a:lvl6pPr marL="0" indent="0">
+              <a:lnSpc>
+                <a:spcPct val="110000"/>
+              </a:lnSpc>
+              <a:spcBef>
+                <a:spcPts val="0"/>
+              </a:spcBef>
+              <a:spcAft>
+                <a:spcPts val="0"/>
+              </a:spcAft>
+              <a:buNone/>
+            </a:lvl6pPr>
+            <a:lvl7pPr marL="0" indent="0">
+              <a:lnSpc>
+                <a:spcPct val="110000"/>
+              </a:lnSpc>
+              <a:spcBef>
+                <a:spcPts val="0"/>
+              </a:spcBef>
+              <a:spcAft>
+                <a:spcPts val="0"/>
+              </a:spcAft>
+              <a:buNone/>
+            </a:lvl7pPr>
+            <a:lvl8pPr marL="0" indent="0">
+              <a:lnSpc>
+                <a:spcPct val="110000"/>
+              </a:lnSpc>
+              <a:spcBef>
+                <a:spcPts val="0"/>
+              </a:spcBef>
+              <a:spcAft>
+                <a:spcPts val="0"/>
+              </a:spcAft>
+              <a:buNone/>
+            </a:lvl8pPr>
+            <a:lvl9pPr marL="0" indent="0">
+              <a:lnSpc>
+                <a:spcPct val="110000"/>
+              </a:lnSpc>
+              <a:spcBef>
+                <a:spcPts val="0"/>
+              </a:spcBef>
+              <a:spcAft>
+                <a:spcPts val="0"/>
+              </a:spcAft>
+              <a:buNone/>
+            </a:lvl9pPr>
+          </a:lstStyle>
+          <a:p xmlns:a="http://schemas.openxmlformats.org/drawingml/2006/main"/>
+        </p:txBody>
+      </p:sp>
+    </p:spTree>
+  </p:cSld>
+</p:sldLayout>
+</file>
+
+<file path=ppt/slideLayouts/slideLayout2.xml><?xml version="1.0" encoding="utf-8"?>
+<p:sldLayout xmlns:p="http://schemas.openxmlformats.org/presentationml/2006/main">
+  <p:cSld name="Section Header">
+    <p:spTree>
+      <p:nvGrpSpPr>
+        <p:cNvPr id="1" name=""/>
+        <p:cNvGrpSpPr/>
+        <p:nvPr/>
+      </p:nvGrpSpPr>
+      <p:grpSpPr>
+        <a:xfrm xmlns:a="http://schemas.openxmlformats.org/drawingml/2006/main"/>
+      </p:grpSpPr>
+      <p:sp>
+        <p:nvSpPr>
+          <p:cNvPr id="2" name="Section title">
+            <a:extLst xmlns:a="http://schemas.openxmlformats.org/drawingml/2006/main">
+              <a:ext uri="{FF2B5EF4-FFF2-40B4-BE49-F238E27FC236}">
+                <a16:creationId xmlns:a16="http://schemas.microsoft.com/office/drawing/2014/main" id="{DBAB1004-0ACA-4009-B660-C983BF880D4C}"/>
+              </a:ext>
+            </a:extLst>
+          </p:cNvPr>
+          <p:cNvSpPr>
+            <a:spLocks xmlns:a="http://schemas.openxmlformats.org/drawingml/2006/main" noGrp="1"/>
+          </p:cNvSpPr>
+          <p:nvPr>
+            <p:ph type="title" idx="0"/>
+          </p:nvPr>
+        </p:nvSpPr>
+        <p:spPr>
+          <a:xfrm xmlns:a="http://schemas.openxmlformats.org/drawingml/2006/main">
+            <a:off x="1219200" y="2857500"/>
+            <a:ext cx="9753600" cy="1143000"/>
+          </a:xfrm>
+          <a:prstGeom xmlns:a="http://schemas.openxmlformats.org/drawingml/2006/main" prst="rect">
+            <a:avLst/>
+          </a:prstGeom>
+          <a:noFill xmlns:a="http://schemas.openxmlformats.org/drawingml/2006/main"/>
+          <a:ln xmlns:a="http://schemas.openxmlformats.org/drawingml/2006/main">
+            <a:noFill/>
+            <a:prstDash val="solid"/>
+          </a:ln>
+        </p:spPr>
+        <p:txBody>
+          <a:bodyPr xmlns:a="http://schemas.openxmlformats.org/drawingml/2006/main" wrap="square" lIns="0" tIns="0" rIns="0" bIns="0" anchor="ctr">
+            <a:normAutofit/>
+          </a:bodyPr>
+          <a:lstStyle xmlns:a="http://schemas.openxmlformats.org/drawingml/2006/main">
+            <a:defPPr algn="ctr">
+              <a:defRPr sz="4200" b="1">
+                <a:solidFill>
+                  <a:schemeClr val="tx1"/>
+                </a:solidFill>
+                <a:latin typeface="+mj-lt"/>
+                <a:ea typeface="+mj-lt"/>
+                <a:cs typeface="+mj-lt"/>
+              </a:defRPr>
+            </a:defPPr>
+            <a:lvl1pPr marL="0" indent="0">
+              <a:lnSpc>
+                <a:spcPct val="110000"/>
+              </a:lnSpc>
+              <a:spcBef>
+                <a:spcPts val="0"/>
+              </a:spcBef>
+              <a:spcAft>
+                <a:spcPts val="0"/>
+              </a:spcAft>
+              <a:buNone/>
+            </a:lvl1pPr>
+            <a:lvl2pPr marL="0" indent="0">
+              <a:lnSpc>
+                <a:spcPct val="110000"/>
+              </a:lnSpc>
+              <a:spcBef>
+                <a:spcPts val="0"/>
+              </a:spcBef>
+              <a:spcAft>
+                <a:spcPts val="0"/>
+              </a:spcAft>
+              <a:buNone/>
+            </a:lvl2pPr>
+            <a:lvl3pPr marL="0" indent="0">
+              <a:lnSpc>
+                <a:spcPct val="110000"/>
+              </a:lnSpc>
+              <a:spcBef>
+                <a:spcPts val="0"/>
+              </a:spcBef>
+              <a:spcAft>
+                <a:spcPts val="0"/>
+              </a:spcAft>
+              <a:buNone/>
+            </a:lvl3pPr>
+            <a:lvl4pPr marL="0" indent="0">
+              <a:lnSpc>
+                <a:spcPct val="110000"/>
+              </a:lnSpc>
+              <a:spcBef>
+                <a:spcPts val="0"/>
+              </a:spcBef>
+              <a:spcAft>
+                <a:spcPts val="0"/>
+              </a:spcAft>
+              <a:buNone/>
+            </a:lvl4pPr>
+            <a:lvl5pPr marL="0" indent="0">
+              <a:lnSpc>
+                <a:spcPct val="110000"/>
+              </a:lnSpc>
+              <a:spcBef>
+                <a:spcPts val="0"/>
+              </a:spcBef>
+              <a:spcAft>
+                <a:spcPts val="0"/>
+              </a:spcAft>
+              <a:buNone/>
+            </a:lvl5pPr>
+            <a:lvl6pPr marL="0" indent="0">
+              <a:lnSpc>
+                <a:spcPct val="110000"/>
+              </a:lnSpc>
+              <a:spcBef>
+                <a:spcPts val="0"/>
+              </a:spcBef>
+              <a:spcAft>
+                <a:spcPts val="0"/>
+              </a:spcAft>
+              <a:buNone/>
+            </a:lvl6pPr>
+            <a:lvl7pPr marL="0" indent="0">
+              <a:lnSpc>
+                <a:spcPct val="110000"/>
+              </a:lnSpc>
+              <a:spcBef>
+                <a:spcPts val="0"/>
+              </a:spcBef>
+              <a:spcAft>
+                <a:spcPts val="0"/>
+              </a:spcAft>
+              <a:buNone/>
+            </a:lvl7pPr>
+            <a:lvl8pPr marL="0" indent="0">
+              <a:lnSpc>
+                <a:spcPct val="110000"/>
+              </a:lnSpc>
+              <a:spcBef>
+                <a:spcPts val="0"/>
+              </a:spcBef>
+              <a:spcAft>
+                <a:spcPts val="0"/>
+              </a:spcAft>
+              <a:buNone/>
+            </a:lvl8pPr>
+            <a:lvl9pPr marL="0" indent="0">
+              <a:lnSpc>
+                <a:spcPct val="110000"/>
+              </a:lnSpc>
+              <a:spcBef>
+                <a:spcPts val="0"/>
+              </a:spcBef>
+              <a:spcAft>
+                <a:spcPts val="0"/>
+              </a:spcAft>
+              <a:buNone/>
+            </a:lvl9pPr>
+          </a:lstStyle>
+          <a:p xmlns:a="http://schemas.openxmlformats.org/drawingml/2006/main"/>
+        </p:txBody>
+      </p:sp>
+    </p:spTree>
+  </p:cSld>
+</p:sldLayout>
+</file>
+
+<file path=ppt/slideLayouts/slideLayout3.xml><?xml version="1.0" encoding="utf-8"?>
+<p:sldLayout xmlns:p="http://schemas.openxmlformats.org/presentationml/2006/main">
+  <p:cSld name="Title and Body">
+    <p:spTree>
+      <p:nvGrpSpPr>
+        <p:cNvPr id="1" name=""/>
+        <p:cNvGrpSpPr/>
+        <p:nvPr/>
+      </p:nvGrpSpPr>
+      <p:grpSpPr>
+        <a:xfrm xmlns:a="http://schemas.openxmlformats.org/drawingml/2006/main"/>
+      </p:grpSpPr>
+      <p:sp>
+        <p:nvSpPr>
+          <p:cNvPr id="3" name="Title">
+            <a:extLst xmlns:a="http://schemas.openxmlformats.org/drawingml/2006/main">
+              <a:ext uri="{FF2B5EF4-FFF2-40B4-BE49-F238E27FC236}">
+                <a16:creationId xmlns:a16="http://schemas.microsoft.com/office/drawing/2014/main" id="{D9167736-1E5E-4867-8E9E-323A8103E688}"/>
+              </a:ext>
+            </a:extLst>
+          </p:cNvPr>
+          <p:cNvSpPr>
+            <a:spLocks xmlns:a="http://schemas.openxmlformats.org/drawingml/2006/main" noGrp="1"/>
+          </p:cNvSpPr>
+          <p:nvPr>
+            <p:ph type="title" idx="0"/>
+          </p:nvPr>
+        </p:nvSpPr>
+        <p:spPr>
+          <a:xfrm xmlns:a="http://schemas.openxmlformats.org/drawingml/2006/main">
+            <a:off x="685800" y="533400"/>
+            <a:ext cx="10820400" cy="838200"/>
+          </a:xfrm>
+          <a:prstGeom xmlns:a="http://schemas.openxmlformats.org/drawingml/2006/main" prst="rect">
+            <a:avLst/>
+          </a:prstGeom>
+          <a:noFill xmlns:a="http://schemas.openxmlformats.org/drawingml/2006/main"/>
+          <a:ln xmlns:a="http://schemas.openxmlformats.org/drawingml/2006/main">
+            <a:noFill/>
+            <a:prstDash val="solid"/>
+          </a:ln>
+        </p:spPr>
+        <p:txBody>
+          <a:bodyPr xmlns:a="http://schemas.openxmlformats.org/drawingml/2006/main" wrap="square" lIns="0" tIns="0" rIns="0" bIns="0" anchor="t">
+            <a:normAutofit/>
+          </a:bodyPr>
+          <a:lstStyle xmlns:a="http://schemas.openxmlformats.org/drawingml/2006/main">
+            <a:defPPr algn="l">
+              <a:defRPr sz="3300" b="1">
+                <a:solidFill>
+                  <a:schemeClr val="tx1"/>
+                </a:solidFill>
+                <a:latin typeface="+mj-lt"/>
+                <a:ea typeface="+mj-lt"/>
+                <a:cs typeface="+mj-lt"/>
+              </a:defRPr>
+            </a:defPPr>
+            <a:lvl1pPr marL="0" indent="0">
+              <a:lnSpc>
+                <a:spcPct val="110000"/>
+              </a:lnSpc>
+              <a:spcBef>
+                <a:spcPts val="0"/>
+              </a:spcBef>
+              <a:spcAft>
+                <a:spcPts val="0"/>
+              </a:spcAft>
+              <a:buNone/>
+            </a:lvl1pPr>
+            <a:lvl2pPr marL="0" indent="0">
+              <a:lnSpc>
+                <a:spcPct val="110000"/>
+              </a:lnSpc>
+              <a:spcBef>
+                <a:spcPts val="0"/>
+              </a:spcBef>
+              <a:spcAft>
+                <a:spcPts val="0"/>
+              </a:spcAft>
+              <a:buNone/>
+            </a:lvl2pPr>
+            <a:lvl3pPr marL="0" indent="0">
+              <a:lnSpc>
+                <a:spcPct val="110000"/>
+              </a:lnSpc>
+              <a:spcBef>
+                <a:spcPts val="0"/>
+              </a:spcBef>
+              <a:spcAft>
+                <a:spcPts val="0"/>
+              </a:spcAft>
+              <a:buNone/>
+            </a:lvl3pPr>
+            <a:lvl4pPr marL="0" indent="0">
+              <a:lnSpc>
+                <a:spcPct val="110000"/>
+              </a:lnSpc>
+              <a:spcBef>
+                <a:spcPts val="0"/>
+              </a:spcBef>
+              <a:spcAft>
+                <a:spcPts val="0"/>
+              </a:spcAft>
+              <a:buNone/>
+            </a:lvl4pPr>
+            <a:lvl5pPr marL="0" indent="0">
+              <a:lnSpc>
+                <a:spcPct val="110000"/>
+              </a:lnSpc>
+              <a:spcBef>
+                <a:spcPts val="0"/>
+              </a:spcBef>
+              <a:spcAft>
+                <a:spcPts val="0"/>
+              </a:spcAft>
+              <a:buNone/>
+            </a:lvl5pPr>
+            <a:lvl6pPr marL="0" indent="0">
+              <a:lnSpc>
+                <a:spcPct val="110000"/>
+              </a:lnSpc>
+              <a:spcBef>
+                <a:spcPts val="0"/>
+              </a:spcBef>
+              <a:spcAft>
+                <a:spcPts val="0"/>
+              </a:spcAft>
+              <a:buNone/>
+            </a:lvl6pPr>
+            <a:lvl7pPr marL="0" indent="0">
+              <a:lnSpc>
+                <a:spcPct val="110000"/>
+              </a:lnSpc>
+              <a:spcBef>
+                <a:spcPts val="0"/>
+              </a:spcBef>
+              <a:spcAft>
+                <a:spcPts val="0"/>
+              </a:spcAft>
+              <a:buNone/>
+            </a:lvl7pPr>
+            <a:lvl8pPr marL="0" indent="0">
+              <a:lnSpc>
+                <a:spcPct val="110000"/>
+              </a:lnSpc>
+              <a:spcBef>
+                <a:spcPts val="0"/>
+              </a:spcBef>
+              <a:spcAft>
+                <a:spcPts val="0"/>
+              </a:spcAft>
+              <a:buNone/>
+            </a:lvl8pPr>
+            <a:lvl9pPr marL="0" indent="0">
+              <a:lnSpc>
+                <a:spcPct val="110000"/>
+              </a:lnSpc>
+              <a:spcBef>
+                <a:spcPts val="0"/>
+              </a:spcBef>
+              <a:spcAft>
+                <a:spcPts val="0"/>
+              </a:spcAft>
+              <a:buNone/>
+            </a:lvl9pPr>
+          </a:lstStyle>
+          <a:p xmlns:a="http://schemas.openxmlformats.org/drawingml/2006/main"/>
+        </p:txBody>
+      </p:sp>
+      <p:sp>
+        <p:nvSpPr>
+          <p:cNvPr id="2" name="Body">
+            <a:extLst xmlns:a="http://schemas.openxmlformats.org/drawingml/2006/main">
+              <a:ext uri="{FF2B5EF4-FFF2-40B4-BE49-F238E27FC236}">
+                <a16:creationId xmlns:a16="http://schemas.microsoft.com/office/drawing/2014/main" id="{F383D4D6-E3F1-4706-92D9-5A9A693DC906}"/>
+              </a:ext>
+            </a:extLst>
+          </p:cNvPr>
+          <p:cNvSpPr>
+            <a:spLocks xmlns:a="http://schemas.openxmlformats.org/drawingml/2006/main" noGrp="1"/>
+          </p:cNvSpPr>
+          <p:nvPr>
+            <p:ph type="body" idx="1"/>
+          </p:nvPr>
+        </p:nvSpPr>
+        <p:spPr>
+          <a:xfrm xmlns:a="http://schemas.openxmlformats.org/drawingml/2006/main">
+            <a:off x="685800" y="1905000"/>
+            <a:ext cx="10820400" cy="4267200"/>
+          </a:xfrm>
+          <a:prstGeom xmlns:a="http://schemas.openxmlformats.org/drawingml/2006/main" prst="rect">
+            <a:avLst/>
+          </a:prstGeom>
+          <a:noFill xmlns:a="http://schemas.openxmlformats.org/drawingml/2006/main"/>
+          <a:ln xmlns:a="http://schemas.openxmlformats.org/drawingml/2006/main">
+            <a:noFill/>
+            <a:prstDash val="solid"/>
+          </a:ln>
+        </p:spPr>
+        <p:txBody>
+          <a:bodyPr xmlns:a="http://schemas.openxmlformats.org/drawingml/2006/main" wrap="square" lIns="0" tIns="0" rIns="0" bIns="0" anchor="t">
+            <a:normAutofit/>
+          </a:bodyPr>
+          <a:lstStyle xmlns:a="http://schemas.openxmlformats.org/drawingml/2006/main">
+            <a:defPPr algn="l">
+              <a:defRPr sz="2250" b="0">
+                <a:solidFill>
+                  <a:schemeClr val="tx1"/>
+                </a:solidFill>
+                <a:latin typeface="+mn-lt"/>
+                <a:ea typeface="+mn-lt"/>
+                <a:cs typeface="+mn-lt"/>
+              </a:defRPr>
+            </a:defPPr>
+            <a:lvl1pPr marL="228600" indent="-228600">
+              <a:lnSpc>
+                <a:spcPct val="110000"/>
+              </a:lnSpc>
+              <a:spcBef>
+                <a:spcPts val="0"/>
+              </a:spcBef>
+              <a:spcAft>
+                <a:spcPts val="1200"/>
+              </a:spcAft>
+              <a:buChar char="•"/>
+            </a:lvl1pPr>
+            <a:lvl2pPr marL="533400" indent="-228600">
+              <a:lnSpc>
+                <a:spcPct val="110000"/>
+              </a:lnSpc>
+              <a:spcBef>
+                <a:spcPts val="0"/>
+              </a:spcBef>
+              <a:spcAft>
+                <a:spcPts val="1200"/>
+              </a:spcAft>
+              <a:buChar char="•"/>
+            </a:lvl2pPr>
+            <a:lvl3pPr marL="838200" indent="-228600">
+              <a:lnSpc>
+                <a:spcPct val="110000"/>
+              </a:lnSpc>
+              <a:spcBef>
+                <a:spcPts val="0"/>
+              </a:spcBef>
+              <a:spcAft>
+                <a:spcPts val="1200"/>
+              </a:spcAft>
+              <a:buChar char="•"/>
+            </a:lvl3pPr>
+            <a:lvl4pPr marL="1143000" indent="-228600">
+              <a:lnSpc>
+                <a:spcPct val="110000"/>
+              </a:lnSpc>
+              <a:spcBef>
+                <a:spcPts val="0"/>
+              </a:spcBef>
+              <a:spcAft>
+                <a:spcPts val="1200"/>
+              </a:spcAft>
+              <a:buChar char="•"/>
+            </a:lvl4pPr>
+            <a:lvl5pPr marL="1447800" indent="-228600">
+              <a:lnSpc>
+                <a:spcPct val="110000"/>
+              </a:lnSpc>
+              <a:spcBef>
+                <a:spcPts val="0"/>
+              </a:spcBef>
+              <a:spcAft>
+                <a:spcPts val="1200"/>
+              </a:spcAft>
+              <a:buChar char="•"/>
+            </a:lvl5pPr>
+            <a:lvl6pPr marL="1752600" indent="-228600">
+              <a:lnSpc>
+                <a:spcPct val="110000"/>
+              </a:lnSpc>
+              <a:spcBef>
+                <a:spcPts val="0"/>
+              </a:spcBef>
+              <a:spcAft>
+                <a:spcPts val="1200"/>
+              </a:spcAft>
+              <a:buChar char="•"/>
+            </a:lvl6pPr>
+            <a:lvl7pPr marL="2057400" indent="-228600">
+              <a:lnSpc>
+                <a:spcPct val="110000"/>
+              </a:lnSpc>
+              <a:spcBef>
+                <a:spcPts val="0"/>
+              </a:spcBef>
+              <a:spcAft>
+                <a:spcPts val="1200"/>
+              </a:spcAft>
+              <a:buChar char="•"/>
+            </a:lvl7pPr>
+            <a:lvl8pPr marL="2362200" indent="-228600">
+              <a:lnSpc>
+                <a:spcPct val="110000"/>
+              </a:lnSpc>
+              <a:spcBef>
+                <a:spcPts val="0"/>
+              </a:spcBef>
+              <a:spcAft>
+                <a:spcPts val="1200"/>
+              </a:spcAft>
+              <a:buChar char="•"/>
+            </a:lvl8pPr>
+            <a:lvl9pPr marL="2667000" indent="-228600">
+              <a:lnSpc>
+                <a:spcPct val="110000"/>
+              </a:lnSpc>
+              <a:spcBef>
+                <a:spcPts val="0"/>
+              </a:spcBef>
+              <a:spcAft>
+                <a:spcPts val="1200"/>
+              </a:spcAft>
+              <a:buChar char="•"/>
+            </a:lvl9pPr>
+          </a:lstStyle>
+          <a:p xmlns:a="http://schemas.openxmlformats.org/drawingml/2006/main"/>
+        </p:txBody>
+      </p:sp>
+    </p:spTree>
+  </p:cSld>
+</p:sldLayout>
+</file>
+
+<file path=ppt/slideLayouts/slideLayout4.xml><?xml version="1.0" encoding="utf-8"?>
+<p:sldLayout xmlns:p="http://schemas.openxmlformats.org/presentationml/2006/main">
+  <p:cSld name="Title and Two Column">
+    <p:spTree>
+      <p:nvGrpSpPr>
+        <p:cNvPr id="1" name=""/>
+        <p:cNvGrpSpPr/>
+        <p:nvPr/>
+      </p:nvGrpSpPr>
+      <p:grpSpPr>
+        <a:xfrm xmlns:a="http://schemas.openxmlformats.org/drawingml/2006/main"/>
+      </p:grpSpPr>
+      <p:sp>
+        <p:nvSpPr>
+          <p:cNvPr id="4" name="Title">
+            <a:extLst xmlns:a="http://schemas.openxmlformats.org/drawingml/2006/main">
+              <a:ext uri="{FF2B5EF4-FFF2-40B4-BE49-F238E27FC236}">
+                <a16:creationId xmlns:a16="http://schemas.microsoft.com/office/drawing/2014/main" id="{3F8C81B0-C4D6-498F-96F7-43987A5E61C8}"/>
+              </a:ext>
+            </a:extLst>
+          </p:cNvPr>
+          <p:cNvSpPr>
+            <a:spLocks xmlns:a="http://schemas.openxmlformats.org/drawingml/2006/main" noGrp="1"/>
+          </p:cNvSpPr>
+          <p:nvPr>
+            <p:ph type="title" idx="0"/>
+          </p:nvPr>
+        </p:nvSpPr>
+        <p:spPr>
+          <a:xfrm xmlns:a="http://schemas.openxmlformats.org/drawingml/2006/main">
+            <a:off x="685800" y="533400"/>
+            <a:ext cx="10820400" cy="838200"/>
+          </a:xfrm>
+          <a:prstGeom xmlns:a="http://schemas.openxmlformats.org/drawingml/2006/main" prst="rect">
+            <a:avLst/>
+          </a:prstGeom>
+          <a:noFill xmlns:a="http://schemas.openxmlformats.org/drawingml/2006/main"/>
+          <a:ln xmlns:a="http://schemas.openxmlformats.org/drawingml/2006/main">
+            <a:noFill/>
+            <a:prstDash val="solid"/>
+          </a:ln>
+        </p:spPr>
+        <p:txBody>
+          <a:bodyPr xmlns:a="http://schemas.openxmlformats.org/drawingml/2006/main" wrap="square" lIns="0" tIns="0" rIns="0" bIns="0" anchor="t">
+            <a:normAutofit/>
+          </a:bodyPr>
+          <a:lstStyle xmlns:a="http://schemas.openxmlformats.org/drawingml/2006/main">
+            <a:defPPr algn="l">
+              <a:defRPr sz="3300" b="1">
+                <a:solidFill>
+                  <a:schemeClr val="tx1"/>
+                </a:solidFill>
+                <a:latin typeface="+mj-lt"/>
+                <a:ea typeface="+mj-lt"/>
+                <a:cs typeface="+mj-lt"/>
+              </a:defRPr>
+            </a:defPPr>
+            <a:lvl1pPr marL="0" indent="0">
+              <a:lnSpc>
+                <a:spcPct val="110000"/>
+              </a:lnSpc>
+              <a:spcBef>
+                <a:spcPts val="0"/>
+              </a:spcBef>
+              <a:spcAft>
+                <a:spcPts val="0"/>
+              </a:spcAft>
+              <a:buNone/>
+            </a:lvl1pPr>
+            <a:lvl2pPr marL="0" indent="0">
+              <a:lnSpc>
+                <a:spcPct val="110000"/>
+              </a:lnSpc>
+              <a:spcBef>
+                <a:spcPts val="0"/>
+              </a:spcBef>
+              <a:spcAft>
+                <a:spcPts val="0"/>
+              </a:spcAft>
+              <a:buNone/>
+            </a:lvl2pPr>
+            <a:lvl3pPr marL="0" indent="0">
+              <a:lnSpc>
+                <a:spcPct val="110000"/>
+              </a:lnSpc>
+              <a:spcBef>
+                <a:spcPts val="0"/>
+              </a:spcBef>
+              <a:spcAft>
+                <a:spcPts val="0"/>
+              </a:spcAft>
+              <a:buNone/>
+            </a:lvl3pPr>
+            <a:lvl4pPr marL="0" indent="0">
+              <a:lnSpc>
+                <a:spcPct val="110000"/>
+              </a:lnSpc>
+              <a:spcBef>
+                <a:spcPts val="0"/>
+              </a:spcBef>
+              <a:spcAft>
+                <a:spcPts val="0"/>
+              </a:spcAft>
+              <a:buNone/>
+            </a:lvl4pPr>
+            <a:lvl5pPr marL="0" indent="0">
+              <a:lnSpc>
+                <a:spcPct val="110000"/>
+              </a:lnSpc>
+              <a:spcBef>
+                <a:spcPts val="0"/>
+              </a:spcBef>
+              <a:spcAft>
+                <a:spcPts val="0"/>
+              </a:spcAft>
+              <a:buNone/>
+            </a:lvl5pPr>
+            <a:lvl6pPr marL="0" indent="0">
+              <a:lnSpc>
+                <a:spcPct val="110000"/>
+              </a:lnSpc>
+              <a:spcBef>
+                <a:spcPts val="0"/>
+              </a:spcBef>
+              <a:spcAft>
+                <a:spcPts val="0"/>
+              </a:spcAft>
+              <a:buNone/>
+            </a:lvl6pPr>
+            <a:lvl7pPr marL="0" indent="0">
+              <a:lnSpc>
+                <a:spcPct val="110000"/>
+              </a:lnSpc>
+              <a:spcBef>
+                <a:spcPts val="0"/>
+              </a:spcBef>
+              <a:spcAft>
+                <a:spcPts val="0"/>
+              </a:spcAft>
+              <a:buNone/>
+            </a:lvl7pPr>
+            <a:lvl8pPr marL="0" indent="0">
+              <a:lnSpc>
+                <a:spcPct val="110000"/>
+              </a:lnSpc>
+              <a:spcBef>
+                <a:spcPts val="0"/>
+              </a:spcBef>
+              <a:spcAft>
+                <a:spcPts val="0"/>
+              </a:spcAft>
+              <a:buNone/>
+            </a:lvl8pPr>
+            <a:lvl9pPr marL="0" indent="0">
+              <a:lnSpc>
+                <a:spcPct val="110000"/>
+              </a:lnSpc>
+              <a:spcBef>
+                <a:spcPts val="0"/>
+              </a:spcBef>
+              <a:spcAft>
+                <a:spcPts val="0"/>
+              </a:spcAft>
+              <a:buNone/>
+            </a:lvl9pPr>
+          </a:lstStyle>
+          <a:p xmlns:a="http://schemas.openxmlformats.org/drawingml/2006/main"/>
+        </p:txBody>
+      </p:sp>
+      <p:sp>
+        <p:nvSpPr>
+          <p:cNvPr id="2" name="Left column">
+            <a:extLst xmlns:a="http://schemas.openxmlformats.org/drawingml/2006/main">
+              <a:ext uri="{FF2B5EF4-FFF2-40B4-BE49-F238E27FC236}">
+                <a16:creationId xmlns:a16="http://schemas.microsoft.com/office/drawing/2014/main" id="{199CF0FB-F07C-4560-8700-84A56D0098E1}"/>
+              </a:ext>
+            </a:extLst>
+          </p:cNvPr>
+          <p:cNvSpPr>
+            <a:spLocks xmlns:a="http://schemas.openxmlformats.org/drawingml/2006/main" noGrp="1"/>
+          </p:cNvSpPr>
+          <p:nvPr>
+            <p:ph type="body" idx="1"/>
+          </p:nvPr>
+        </p:nvSpPr>
+        <p:spPr>
+          <a:xfrm xmlns:a="http://schemas.openxmlformats.org/drawingml/2006/main">
+            <a:off x="685800" y="1905000"/>
+            <a:ext cx="5029200" cy="4267200"/>
+          </a:xfrm>
+          <a:prstGeom xmlns:a="http://schemas.openxmlformats.org/drawingml/2006/main" prst="rect">
+            <a:avLst/>
+          </a:prstGeom>
+          <a:noFill xmlns:a="http://schemas.openxmlformats.org/drawingml/2006/main"/>
+          <a:ln xmlns:a="http://schemas.openxmlformats.org/drawingml/2006/main">
+            <a:noFill/>
+            <a:prstDash val="solid"/>
+          </a:ln>
+        </p:spPr>
+        <p:txBody>
+          <a:bodyPr xmlns:a="http://schemas.openxmlformats.org/drawingml/2006/main" wrap="square" lIns="0" tIns="0" rIns="0" bIns="0" anchor="t">
+            <a:normAutofit/>
+          </a:bodyPr>
+          <a:lstStyle xmlns:a="http://schemas.openxmlformats.org/drawingml/2006/main">
+            <a:defPPr algn="l">
+              <a:defRPr sz="2100" b="0">
+                <a:solidFill>
+                  <a:schemeClr val="tx1"/>
+                </a:solidFill>
+                <a:latin typeface="+mn-lt"/>
+                <a:ea typeface="+mn-lt"/>
+                <a:cs typeface="+mn-lt"/>
+              </a:defRPr>
+            </a:defPPr>
+            <a:lvl1pPr marL="228600" indent="-228600">
+              <a:lnSpc>
+                <a:spcPct val="110000"/>
+              </a:lnSpc>
+              <a:spcBef>
+                <a:spcPts val="0"/>
+              </a:spcBef>
+              <a:spcAft>
+                <a:spcPts val="1200"/>
+              </a:spcAft>
+              <a:buChar char="•"/>
+            </a:lvl1pPr>
+            <a:lvl2pPr marL="533400" indent="-228600">
+              <a:lnSpc>
+                <a:spcPct val="110000"/>
+              </a:lnSpc>
+              <a:spcBef>
+                <a:spcPts val="0"/>
+              </a:spcBef>
+              <a:spcAft>
+                <a:spcPts val="1200"/>
+              </a:spcAft>
+              <a:buChar char="•"/>
+            </a:lvl2pPr>
+            <a:lvl3pPr marL="838200" indent="-228600">
+              <a:lnSpc>
+                <a:spcPct val="110000"/>
+              </a:lnSpc>
+              <a:spcBef>
+                <a:spcPts val="0"/>
+              </a:spcBef>
+              <a:spcAft>
+                <a:spcPts val="1200"/>
+              </a:spcAft>
+              <a:buChar char="•"/>
+            </a:lvl3pPr>
+            <a:lvl4pPr marL="1143000" indent="-228600">
+              <a:lnSpc>
+                <a:spcPct val="110000"/>
+              </a:lnSpc>
+              <a:spcBef>
+                <a:spcPts val="0"/>
+              </a:spcBef>
+              <a:spcAft>
+                <a:spcPts val="1200"/>
+              </a:spcAft>
+              <a:buChar char="•"/>
+            </a:lvl4pPr>
+            <a:lvl5pPr marL="1447800" indent="-228600">
+              <a:lnSpc>
+                <a:spcPct val="110000"/>
+              </a:lnSpc>
+              <a:spcBef>
+                <a:spcPts val="0"/>
+              </a:spcBef>
+              <a:spcAft>
+                <a:spcPts val="1200"/>
+              </a:spcAft>
+              <a:buChar char="•"/>
+            </a:lvl5pPr>
+            <a:lvl6pPr marL="1752600" indent="-228600">
+              <a:lnSpc>
+                <a:spcPct val="110000"/>
+              </a:lnSpc>
+              <a:spcBef>
+                <a:spcPts val="0"/>
+              </a:spcBef>
+              <a:spcAft>
+                <a:spcPts val="1200"/>
+              </a:spcAft>
+              <a:buChar char="•"/>
+            </a:lvl6pPr>
+            <a:lvl7pPr marL="2057400" indent="-228600">
+              <a:lnSpc>
+                <a:spcPct val="110000"/>
+              </a:lnSpc>
+              <a:spcBef>
+                <a:spcPts val="0"/>
+              </a:spcBef>
+              <a:spcAft>
+                <a:spcPts val="1200"/>
+              </a:spcAft>
+              <a:buChar char="•"/>
+            </a:lvl7pPr>
+            <a:lvl8pPr marL="2362200" indent="-228600">
+              <a:lnSpc>
+                <a:spcPct val="110000"/>
+              </a:lnSpc>
+              <a:spcBef>
+                <a:spcPts val="0"/>
+              </a:spcBef>
+              <a:spcAft>
+                <a:spcPts val="1200"/>
+              </a:spcAft>
+              <a:buChar char="•"/>
+            </a:lvl8pPr>
+            <a:lvl9pPr marL="2667000" indent="-228600">
+              <a:lnSpc>
+                <a:spcPct val="110000"/>
+              </a:lnSpc>
+              <a:spcBef>
+                <a:spcPts val="0"/>
+              </a:spcBef>
+              <a:spcAft>
+                <a:spcPts val="1200"/>
+              </a:spcAft>
+              <a:buChar char="•"/>
+            </a:lvl9pPr>
+          </a:lstStyle>
+          <a:p xmlns:a="http://schemas.openxmlformats.org/drawingml/2006/main"/>
+        </p:txBody>
+      </p:sp>
+      <p:sp>
+        <p:nvSpPr>
+          <p:cNvPr id="3" name="Right column">
+            <a:extLst xmlns:a="http://schemas.openxmlformats.org/drawingml/2006/main">
+              <a:ext uri="{FF2B5EF4-FFF2-40B4-BE49-F238E27FC236}">
+                <a16:creationId xmlns:a16="http://schemas.microsoft.com/office/drawing/2014/main" id="{B1AB21FD-B6AE-4018-BF9C-8A96CE82851F}"/>
+              </a:ext>
+            </a:extLst>
+          </p:cNvPr>
+          <p:cNvSpPr>
+            <a:spLocks xmlns:a="http://schemas.openxmlformats.org/drawingml/2006/main" noGrp="1"/>
+          </p:cNvSpPr>
+          <p:nvPr>
+            <p:ph type="body" idx="2"/>
+          </p:nvPr>
+        </p:nvSpPr>
+        <p:spPr>
+          <a:xfrm xmlns:a="http://schemas.openxmlformats.org/drawingml/2006/main">
+            <a:off x="6477000" y="1905000"/>
+            <a:ext cx="5029200" cy="4267200"/>
+          </a:xfrm>
+          <a:prstGeom xmlns:a="http://schemas.openxmlformats.org/drawingml/2006/main" prst="rect">
+            <a:avLst/>
+          </a:prstGeom>
+          <a:noFill xmlns:a="http://schemas.openxmlformats.org/drawingml/2006/main"/>
+          <a:ln xmlns:a="http://schemas.openxmlformats.org/drawingml/2006/main">
+            <a:noFill/>
+            <a:prstDash val="solid"/>
+          </a:ln>
+        </p:spPr>
+        <p:txBody>
+          <a:bodyPr xmlns:a="http://schemas.openxmlformats.org/drawingml/2006/main" wrap="square" lIns="0" tIns="0" rIns="0" bIns="0" anchor="t">
+            <a:normAutofit/>
+          </a:bodyPr>
+          <a:lstStyle xmlns:a="http://schemas.openxmlformats.org/drawingml/2006/main">
+            <a:defPPr algn="l">
+              <a:defRPr sz="2100" b="0">
+                <a:solidFill>
+                  <a:schemeClr val="tx1"/>
+                </a:solidFill>
+                <a:latin typeface="+mn-lt"/>
+                <a:ea typeface="+mn-lt"/>
+                <a:cs typeface="+mn-lt"/>
+              </a:defRPr>
+            </a:defPPr>
+            <a:lvl1pPr marL="228600" indent="-228600">
+              <a:lnSpc>
+                <a:spcPct val="110000"/>
+              </a:lnSpc>
+              <a:spcBef>
+                <a:spcPts val="0"/>
+              </a:spcBef>
+              <a:spcAft>
+                <a:spcPts val="1200"/>
+              </a:spcAft>
+              <a:buChar char="•"/>
+            </a:lvl1pPr>
+            <a:lvl2pPr marL="533400" indent="-228600">
+              <a:lnSpc>
+                <a:spcPct val="110000"/>
+              </a:lnSpc>
+              <a:spcBef>
+                <a:spcPts val="0"/>
+              </a:spcBef>
+              <a:spcAft>
+                <a:spcPts val="1200"/>
+              </a:spcAft>
+              <a:buChar char="•"/>
+            </a:lvl2pPr>
+            <a:lvl3pPr marL="838200" indent="-228600">
+              <a:lnSpc>
+                <a:spcPct val="110000"/>
+              </a:lnSpc>
+              <a:spcBef>
+                <a:spcPts val="0"/>
+              </a:spcBef>
+              <a:spcAft>
+                <a:spcPts val="1200"/>
+              </a:spcAft>
+              <a:buChar char="•"/>
+            </a:lvl3pPr>
+            <a:lvl4pPr marL="1143000" indent="-228600">
+              <a:lnSpc>
+                <a:spcPct val="110000"/>
+              </a:lnSpc>
+              <a:spcBef>
+                <a:spcPts val="0"/>
+              </a:spcBef>
+              <a:spcAft>
+                <a:spcPts val="1200"/>
+              </a:spcAft>
+              <a:buChar char="•"/>
+            </a:lvl4pPr>
+            <a:lvl5pPr marL="1447800" indent="-228600">
+              <a:lnSpc>
+                <a:spcPct val="110000"/>
+              </a:lnSpc>
+              <a:spcBef>
+                <a:spcPts val="0"/>
+              </a:spcBef>
+              <a:spcAft>
+                <a:spcPts val="1200"/>
+              </a:spcAft>
+              <a:buChar char="•"/>
+            </a:lvl5pPr>
+            <a:lvl6pPr marL="1752600" indent="-228600">
+              <a:lnSpc>
+                <a:spcPct val="110000"/>
+              </a:lnSpc>
+              <a:spcBef>
+                <a:spcPts val="0"/>
+              </a:spcBef>
+              <a:spcAft>
+                <a:spcPts val="1200"/>
+              </a:spcAft>
+              <a:buChar char="•"/>
+            </a:lvl6pPr>
+            <a:lvl7pPr marL="2057400" indent="-228600">
+              <a:lnSpc>
+                <a:spcPct val="110000"/>
+              </a:lnSpc>
+              <a:spcBef>
+                <a:spcPts val="0"/>
+              </a:spcBef>
+              <a:spcAft>
+                <a:spcPts val="1200"/>
+              </a:spcAft>
+              <a:buChar char="•"/>
+            </a:lvl7pPr>
+            <a:lvl8pPr marL="2362200" indent="-228600">
+              <a:lnSpc>
+                <a:spcPct val="110000"/>
+              </a:lnSpc>
+              <a:spcBef>
+                <a:spcPts val="0"/>
+              </a:spcBef>
+              <a:spcAft>
+                <a:spcPts val="1200"/>
+              </a:spcAft>
+              <a:buChar char="•"/>
+            </a:lvl8pPr>
+            <a:lvl9pPr marL="2667000" indent="-228600">
+              <a:lnSpc>
+                <a:spcPct val="110000"/>
+              </a:lnSpc>
+              <a:spcBef>
+                <a:spcPts val="0"/>
+              </a:spcBef>
+              <a:spcAft>
+                <a:spcPts val="1200"/>
+              </a:spcAft>
+              <a:buChar char="•"/>
+            </a:lvl9pPr>
+          </a:lstStyle>
+          <a:p xmlns:a="http://schemas.openxmlformats.org/drawingml/2006/main"/>
+        </p:txBody>
+      </p:sp>
+    </p:spTree>
+  </p:cSld>
+</p:sldLayout>
+</file>
+
+<file path=ppt/slideLayouts/slideLayout5.xml><?xml version="1.0" encoding="utf-8"?>
+<p:sldLayout xmlns:p="http://schemas.openxmlformats.org/presentationml/2006/main">
+  <p:cSld name="Title and One Column">
+    <p:spTree>
+      <p:nvGrpSpPr>
+        <p:cNvPr id="1" name=""/>
+        <p:cNvGrpSpPr/>
+        <p:nvPr/>
+      </p:nvGrpSpPr>
+      <p:grpSpPr>
+        <a:xfrm xmlns:a="http://schemas.openxmlformats.org/drawingml/2006/main"/>
+      </p:grpSpPr>
+      <p:sp>
+        <p:nvSpPr>
+          <p:cNvPr id="3" name="Title">
+            <a:extLst xmlns:a="http://schemas.openxmlformats.org/drawingml/2006/main">
+              <a:ext uri="{FF2B5EF4-FFF2-40B4-BE49-F238E27FC236}">
+                <a16:creationId xmlns:a16="http://schemas.microsoft.com/office/drawing/2014/main" id="{52F09AC7-9C7D-4D21-BDCE-44A97C5F0FA1}"/>
+              </a:ext>
+            </a:extLst>
+          </p:cNvPr>
+          <p:cNvSpPr>
+            <a:spLocks xmlns:a="http://schemas.openxmlformats.org/drawingml/2006/main" noGrp="1"/>
+          </p:cNvSpPr>
+          <p:nvPr>
+            <p:ph type="title" idx="0"/>
+          </p:nvPr>
+        </p:nvSpPr>
+        <p:spPr>
+          <a:xfrm xmlns:a="http://schemas.openxmlformats.org/drawingml/2006/main">
+            <a:off x="685800" y="533400"/>
+            <a:ext cx="10820400" cy="838200"/>
+          </a:xfrm>
+          <a:prstGeom xmlns:a="http://schemas.openxmlformats.org/drawingml/2006/main" prst="rect">
+            <a:avLst/>
+          </a:prstGeom>
+          <a:noFill xmlns:a="http://schemas.openxmlformats.org/drawingml/2006/main"/>
+          <a:ln xmlns:a="http://schemas.openxmlformats.org/drawingml/2006/main">
+            <a:noFill/>
+            <a:prstDash val="solid"/>
+          </a:ln>
+        </p:spPr>
+        <p:txBody>
+          <a:bodyPr xmlns:a="http://schemas.openxmlformats.org/drawingml/2006/main" wrap="square" lIns="0" tIns="0" rIns="0" bIns="0" anchor="t">
+            <a:normAutofit/>
+          </a:bodyPr>
+          <a:lstStyle xmlns:a="http://schemas.openxmlformats.org/drawingml/2006/main">
+            <a:defPPr algn="l">
+              <a:defRPr sz="3300" b="1">
+                <a:solidFill>
+                  <a:schemeClr val="tx1"/>
+                </a:solidFill>
+                <a:latin typeface="+mj-lt"/>
+                <a:ea typeface="+mj-lt"/>
+                <a:cs typeface="+mj-lt"/>
+              </a:defRPr>
+            </a:defPPr>
+            <a:lvl1pPr marL="0" indent="0">
+              <a:lnSpc>
+                <a:spcPct val="110000"/>
+              </a:lnSpc>
+              <a:spcBef>
+                <a:spcPts val="0"/>
+              </a:spcBef>
+              <a:spcAft>
+                <a:spcPts val="0"/>
+              </a:spcAft>
+              <a:buNone/>
+            </a:lvl1pPr>
+            <a:lvl2pPr marL="0" indent="0">
+              <a:lnSpc>
+                <a:spcPct val="110000"/>
+              </a:lnSpc>
+              <a:spcBef>
+                <a:spcPts val="0"/>
+              </a:spcBef>
+              <a:spcAft>
+                <a:spcPts val="0"/>
+              </a:spcAft>
+              <a:buNone/>
+            </a:lvl2pPr>
+            <a:lvl3pPr marL="0" indent="0">
+              <a:lnSpc>
+                <a:spcPct val="110000"/>
+              </a:lnSpc>
+              <a:spcBef>
+                <a:spcPts val="0"/>
+              </a:spcBef>
+              <a:spcAft>
+                <a:spcPts val="0"/>
+              </a:spcAft>
+              <a:buNone/>
+            </a:lvl3pPr>
+            <a:lvl4pPr marL="0" indent="0">
+              <a:lnSpc>
+                <a:spcPct val="110000"/>
+              </a:lnSpc>
+              <a:spcBef>
+                <a:spcPts val="0"/>
+              </a:spcBef>
+              <a:spcAft>
+                <a:spcPts val="0"/>
+              </a:spcAft>
+              <a:buNone/>
+            </a:lvl4pPr>
+            <a:lvl5pPr marL="0" indent="0">
+              <a:lnSpc>
+                <a:spcPct val="110000"/>
+              </a:lnSpc>
+              <a:spcBef>
+                <a:spcPts val="0"/>
+              </a:spcBef>
+              <a:spcAft>
+                <a:spcPts val="0"/>
+              </a:spcAft>
+              <a:buNone/>
+            </a:lvl5pPr>
+            <a:lvl6pPr marL="0" indent="0">
+              <a:lnSpc>
+                <a:spcPct val="110000"/>
+              </a:lnSpc>
+              <a:spcBef>
+                <a:spcPts val="0"/>
+              </a:spcBef>
+              <a:spcAft>
+                <a:spcPts val="0"/>
+              </a:spcAft>
+              <a:buNone/>
+            </a:lvl6pPr>
+            <a:lvl7pPr marL="0" indent="0">
+              <a:lnSpc>
+                <a:spcPct val="110000"/>
+              </a:lnSpc>
+              <a:spcBef>
+                <a:spcPts val="0"/>
+              </a:spcBef>
+              <a:spcAft>
+                <a:spcPts val="0"/>
+              </a:spcAft>
+              <a:buNone/>
+            </a:lvl7pPr>
+            <a:lvl8pPr marL="0" indent="0">
+              <a:lnSpc>
+                <a:spcPct val="110000"/>
+              </a:lnSpc>
+              <a:spcBef>
+                <a:spcPts val="0"/>
+              </a:spcBef>
+              <a:spcAft>
+                <a:spcPts val="0"/>
+              </a:spcAft>
+              <a:buNone/>
+            </a:lvl8pPr>
+            <a:lvl9pPr marL="0" indent="0">
+              <a:lnSpc>
+                <a:spcPct val="110000"/>
+              </a:lnSpc>
+              <a:spcBef>
+                <a:spcPts val="0"/>
+              </a:spcBef>
+              <a:spcAft>
+                <a:spcPts val="0"/>
+              </a:spcAft>
+              <a:buNone/>
+            </a:lvl9pPr>
+          </a:lstStyle>
+          <a:p xmlns:a="http://schemas.openxmlformats.org/drawingml/2006/main"/>
+        </p:txBody>
+      </p:sp>
+      <p:sp>
+        <p:nvSpPr>
+          <p:cNvPr id="2" name="Left column">
+            <a:extLst xmlns:a="http://schemas.openxmlformats.org/drawingml/2006/main">
+              <a:ext uri="{FF2B5EF4-FFF2-40B4-BE49-F238E27FC236}">
+                <a16:creationId xmlns:a16="http://schemas.microsoft.com/office/drawing/2014/main" id="{B1A89DAF-D675-4F37-BFB0-D57455704B13}"/>
+              </a:ext>
+            </a:extLst>
+          </p:cNvPr>
+          <p:cNvSpPr>
+            <a:spLocks xmlns:a="http://schemas.openxmlformats.org/drawingml/2006/main" noGrp="1"/>
+          </p:cNvSpPr>
+          <p:nvPr>
+            <p:ph type="body" idx="1"/>
+          </p:nvPr>
+        </p:nvSpPr>
+        <p:spPr>
+          <a:xfrm xmlns:a="http://schemas.openxmlformats.org/drawingml/2006/main">
+            <a:off x="685800" y="1905000"/>
+            <a:ext cx="5029200" cy="4267200"/>
+          </a:xfrm>
+          <a:prstGeom xmlns:a="http://schemas.openxmlformats.org/drawingml/2006/main" prst="rect">
+            <a:avLst/>
+          </a:prstGeom>
+          <a:noFill xmlns:a="http://schemas.openxmlformats.org/drawingml/2006/main"/>
+          <a:ln xmlns:a="http://schemas.openxmlformats.org/drawingml/2006/main">
+            <a:noFill/>
+            <a:prstDash val="solid"/>
+          </a:ln>
+        </p:spPr>
+        <p:txBody>
+          <a:bodyPr xmlns:a="http://schemas.openxmlformats.org/drawingml/2006/main" wrap="square" lIns="0" tIns="0" rIns="0" bIns="0" anchor="t">
+            <a:normAutofit/>
+          </a:bodyPr>
+          <a:lstStyle xmlns:a="http://schemas.openxmlformats.org/drawingml/2006/main">
+            <a:defPPr algn="l">
+              <a:defRPr sz="2250" b="0">
+                <a:solidFill>
+                  <a:schemeClr val="tx1"/>
+                </a:solidFill>
+                <a:latin typeface="+mn-lt"/>
+                <a:ea typeface="+mn-lt"/>
+                <a:cs typeface="+mn-lt"/>
+              </a:defRPr>
+            </a:defPPr>
+            <a:lvl1pPr marL="228600" indent="-228600">
+              <a:lnSpc>
+                <a:spcPct val="110000"/>
+              </a:lnSpc>
+              <a:spcBef>
+                <a:spcPts val="0"/>
+              </a:spcBef>
+              <a:spcAft>
+                <a:spcPts val="1200"/>
+              </a:spcAft>
+              <a:buChar char="•"/>
+            </a:lvl1pPr>
+            <a:lvl2pPr marL="533400" indent="-228600">
+              <a:lnSpc>
+                <a:spcPct val="110000"/>
+              </a:lnSpc>
+              <a:spcBef>
+                <a:spcPts val="0"/>
+              </a:spcBef>
+              <a:spcAft>
+                <a:spcPts val="1200"/>
+              </a:spcAft>
+              <a:buChar char="•"/>
+            </a:lvl2pPr>
+            <a:lvl3pPr marL="838200" indent="-228600">
+              <a:lnSpc>
+                <a:spcPct val="110000"/>
+              </a:lnSpc>
+              <a:spcBef>
+                <a:spcPts val="0"/>
+              </a:spcBef>
+              <a:spcAft>
+                <a:spcPts val="1200"/>
+              </a:spcAft>
+              <a:buChar char="•"/>
+            </a:lvl3pPr>
+            <a:lvl4pPr marL="1143000" indent="-228600">
+              <a:lnSpc>
+                <a:spcPct val="110000"/>
+              </a:lnSpc>
+              <a:spcBef>
+                <a:spcPts val="0"/>
+              </a:spcBef>
+              <a:spcAft>
+                <a:spcPts val="1200"/>
+              </a:spcAft>
+              <a:buChar char="•"/>
+            </a:lvl4pPr>
+            <a:lvl5pPr marL="1447800" indent="-228600">
+              <a:lnSpc>
+                <a:spcPct val="110000"/>
+              </a:lnSpc>
+              <a:spcBef>
+                <a:spcPts val="0"/>
+              </a:spcBef>
+              <a:spcAft>
+                <a:spcPts val="1200"/>
+              </a:spcAft>
+              <a:buChar char="•"/>
+            </a:lvl5pPr>
+            <a:lvl6pPr marL="1752600" indent="-228600">
+              <a:lnSpc>
+                <a:spcPct val="110000"/>
+              </a:lnSpc>
+              <a:spcBef>
+                <a:spcPts val="0"/>
+              </a:spcBef>
+              <a:spcAft>
+                <a:spcPts val="1200"/>
+              </a:spcAft>
+              <a:buChar char="•"/>
+            </a:lvl6pPr>
+            <a:lvl7pPr marL="2057400" indent="-228600">
+              <a:lnSpc>
+                <a:spcPct val="110000"/>
+              </a:lnSpc>
+              <a:spcBef>
+                <a:spcPts val="0"/>
+              </a:spcBef>
+              <a:spcAft>
+                <a:spcPts val="1200"/>
+              </a:spcAft>
+              <a:buChar char="•"/>
+            </a:lvl7pPr>
+            <a:lvl8pPr marL="2362200" indent="-228600">
+              <a:lnSpc>
+                <a:spcPct val="110000"/>
+              </a:lnSpc>
+              <a:spcBef>
+                <a:spcPts val="0"/>
+              </a:spcBef>
+              <a:spcAft>
+                <a:spcPts val="1200"/>
+              </a:spcAft>
+              <a:buChar char="•"/>
+            </a:lvl8pPr>
+            <a:lvl9pPr marL="2667000" indent="-228600">
+              <a:lnSpc>
+                <a:spcPct val="110000"/>
+              </a:lnSpc>
+              <a:spcBef>
+                <a:spcPts val="0"/>
+              </a:spcBef>
+              <a:spcAft>
+                <a:spcPts val="1200"/>
+              </a:spcAft>
+              <a:buChar char="•"/>
+            </a:lvl9pPr>
+          </a:lstStyle>
+          <a:p xmlns:a="http://schemas.openxmlformats.org/drawingml/2006/main"/>
+        </p:txBody>
+      </p:sp>
+    </p:spTree>
+  </p:cSld>
+</p:sldLayout>
+</file>
+
+<file path=ppt/slideLayouts/slideLayout6.xml><?xml version="1.0" encoding="utf-8"?>
+<p:sldLayout xmlns:p="http://schemas.openxmlformats.org/presentationml/2006/main" type="blank">
+  <p:cSld name="Blank">
+    <p:spTree>
+      <p:nvGrpSpPr>
+        <p:cNvPr id="1" name=""/>
+        <p:cNvGrpSpPr/>
+        <p:nvPr/>
+      </p:nvGrpSpPr>
+      <p:grpSpPr>
+        <a:xfrm xmlns:a="http://schemas.openxmlformats.org/drawingml/2006/main"/>
+      </p:grpSpPr>
     </p:spTree>
   </p:cSld>
 </p:sldLayout>
@@ -1199,7 +2854,12 @@
   </p:cSld>
   <p:clrMap bg1="lt1" tx1="dk1" bg2="lt2" tx2="dk2" accent1="accent1" accent2="accent2" accent3="accent3" accent4="accent4" accent5="accent5" accent6="accent6" hlink="hlink" folHlink="folHlink"/>
   <p:sldLayoutIdLst>
-    <p:sldLayoutId xmlns:r="http://schemas.openxmlformats.org/officeDocument/2006/relationships" id="2147483649" r:id="R0cf629dc12124d89"/>
+    <p:sldLayoutId xmlns:r="http://schemas.openxmlformats.org/officeDocument/2006/relationships" id="2147483649" r:id="R48d70a9a314d4dca"/>
+    <p:sldLayoutId xmlns:r="http://schemas.openxmlformats.org/officeDocument/2006/relationships" id="2147483650" r:id="Rfc9f0d7ba9684454"/>
+    <p:sldLayoutId xmlns:r="http://schemas.openxmlformats.org/officeDocument/2006/relationships" id="2147483651" r:id="R3b0decc8c3894f21"/>
+    <p:sldLayoutId xmlns:r="http://schemas.openxmlformats.org/officeDocument/2006/relationships" id="2147483652" r:id="R5cba929fcab24113"/>
+    <p:sldLayoutId xmlns:r="http://schemas.openxmlformats.org/officeDocument/2006/relationships" id="2147483653" r:id="Rbbd834059cd448e0"/>
+    <p:sldLayoutId xmlns:r="http://schemas.openxmlformats.org/officeDocument/2006/relationships" id="2147483654" r:id="R20c3b23e45c44a13"/>
   </p:sldLayoutIdLst>
   <p:txStyles>
     <p:titleStyle>
@@ -1522,16 +3182,16 @@
         <a:srgbClr val="96607D"/>
       </a:folHlink>
     </a:clrScheme>
-    <a:fontScheme name="Office">
+    <a:fontScheme name="">
       <a:majorFont>
-        <a:latin typeface="Calibri Light"/>
-        <a:ea typeface="Calibri Light"/>
-        <a:cs typeface="Calibri Light"/>
+        <a:latin typeface="Aptos"/>
+        <a:ea typeface=""/>
+        <a:cs typeface=""/>
       </a:majorFont>
       <a:minorFont>
-        <a:latin typeface="Calibri"/>
-        <a:ea typeface="Calibri"/>
-        <a:cs typeface="Calibri"/>
+        <a:latin typeface="Aptos"/>
+        <a:ea typeface=""/>
+        <a:cs typeface=""/>
       </a:minorFont>
     </a:fontScheme>
     <a:fmtScheme name="ChatGPT">
@@ -1750,7 +3410,7 @@
           <p:cNvPr id="5" name="">
             <a:extLst xmlns:a="http://schemas.openxmlformats.org/drawingml/2006/main">
               <a:ext uri="{FF2B5EF4-FFF2-40B4-BE49-F238E27FC236}">
-                <a16:creationId xmlns:a16="http://schemas.microsoft.com/office/drawing/2014/main" id="{697E6290-C797-46C1-AA56-FADFE45282E6}"/>
+                <a16:creationId xmlns:a16="http://schemas.microsoft.com/office/drawing/2014/main" id="{C1974349-4A22-4C0A-B397-D1C62D918432}"/>
               </a:ext>
             </a:extLst>
           </p:cNvPr>
@@ -1776,7 +3436,18 @@
           <a:bodyPr xmlns:a="http://schemas.openxmlformats.org/drawingml/2006/main" anchor="ctr">
             <a:noAutofit/>
           </a:bodyPr>
-          <a:lstStyle xmlns:a="http://schemas.openxmlformats.org/drawingml/2006/main"/>
+          <a:lstStyle xmlns:a="http://schemas.openxmlformats.org/drawingml/2006/main">
+            <a:defPPr algn="l">
+              <a:defRPr sz="2700" b="1">
+                <a:solidFill>
+                  <a:srgbClr val="161616"/>
+                </a:solidFill>
+                <a:latin typeface="Arial"/>
+                <a:ea typeface="Arial"/>
+                <a:cs typeface="Arial"/>
+              </a:defRPr>
+            </a:defPPr>
+          </a:lstStyle>
           <a:p xmlns:a="http://schemas.openxmlformats.org/drawingml/2006/main">
             <a:pPr algn="l">
               <a:defRPr sz="2700" b="1">
@@ -1807,7 +3478,7 @@
           <p:cNvPr id="2" name="">
             <a:extLst xmlns:a="http://schemas.openxmlformats.org/drawingml/2006/main">
               <a:ext uri="{FF2B5EF4-FFF2-40B4-BE49-F238E27FC236}">
-                <a16:creationId xmlns:a16="http://schemas.microsoft.com/office/drawing/2014/main" id="{2ED27E64-4A41-4700-88E9-9C1531C7DAA2}"/>
+                <a16:creationId xmlns:a16="http://schemas.microsoft.com/office/drawing/2014/main" id="{33A87FAF-A312-4DF0-B719-3504EBF750E0}"/>
               </a:ext>
             </a:extLst>
           </p:cNvPr>
@@ -1833,7 +3504,18 @@
           <a:bodyPr xmlns:a="http://schemas.openxmlformats.org/drawingml/2006/main">
             <a:noAutofit/>
           </a:bodyPr>
-          <a:lstStyle xmlns:a="http://schemas.openxmlformats.org/drawingml/2006/main"/>
+          <a:lstStyle xmlns:a="http://schemas.openxmlformats.org/drawingml/2006/main">
+            <a:defPPr>
+              <a:defRPr sz="3750" b="1">
+                <a:solidFill>
+                  <a:srgbClr val="161616"/>
+                </a:solidFill>
+                <a:latin typeface="Arial"/>
+                <a:ea typeface="Arial"/>
+                <a:cs typeface="Arial"/>
+              </a:defRPr>
+            </a:defPPr>
+          </a:lstStyle>
           <a:p xmlns:a="http://schemas.openxmlformats.org/drawingml/2006/main">
             <a:pPr>
               <a:defRPr sz="3750" b="1">
@@ -1864,7 +3546,7 @@
           <p:cNvPr id="3" name="">
             <a:extLst xmlns:a="http://schemas.openxmlformats.org/drawingml/2006/main">
               <a:ext uri="{FF2B5EF4-FFF2-40B4-BE49-F238E27FC236}">
-                <a16:creationId xmlns:a16="http://schemas.microsoft.com/office/drawing/2014/main" id="{A526088F-0772-46CD-9F4A-F74C826968D9}"/>
+                <a16:creationId xmlns:a16="http://schemas.microsoft.com/office/drawing/2014/main" id="{C1253C69-B5F3-41F5-BD66-656E6F8DDEAF}"/>
               </a:ext>
             </a:extLst>
           </p:cNvPr>
@@ -1890,7 +3572,18 @@
           <a:bodyPr xmlns:a="http://schemas.openxmlformats.org/drawingml/2006/main">
             <a:noAutofit/>
           </a:bodyPr>
-          <a:lstStyle xmlns:a="http://schemas.openxmlformats.org/drawingml/2006/main"/>
+          <a:lstStyle xmlns:a="http://schemas.openxmlformats.org/drawingml/2006/main">
+            <a:defPPr>
+              <a:defRPr sz="2250" b="0">
+                <a:solidFill>
+                  <a:srgbClr val="161616"/>
+                </a:solidFill>
+                <a:latin typeface="Arial"/>
+                <a:ea typeface="Arial"/>
+                <a:cs typeface="Arial"/>
+              </a:defRPr>
+            </a:defPPr>
+          </a:lstStyle>
           <a:p xmlns:a="http://schemas.openxmlformats.org/drawingml/2006/main">
             <a:pPr>
               <a:defRPr sz="2250" b="0">
@@ -1921,7 +3614,7 @@
           <p:cNvPr id="4" name="">
             <a:extLst xmlns:a="http://schemas.openxmlformats.org/drawingml/2006/main">
               <a:ext uri="{FF2B5EF4-FFF2-40B4-BE49-F238E27FC236}">
-                <a16:creationId xmlns:a16="http://schemas.microsoft.com/office/drawing/2014/main" id="{1A58FFA2-896A-4763-88B9-02952E0FC4A1}"/>
+                <a16:creationId xmlns:a16="http://schemas.microsoft.com/office/drawing/2014/main" id="{097FF119-8434-40A1-994A-28E7D8C49A79}"/>
               </a:ext>
             </a:extLst>
           </p:cNvPr>
@@ -1947,7 +3640,18 @@
           <a:bodyPr xmlns:a="http://schemas.openxmlformats.org/drawingml/2006/main">
             <a:noAutofit/>
           </a:bodyPr>
-          <a:lstStyle xmlns:a="http://schemas.openxmlformats.org/drawingml/2006/main"/>
+          <a:lstStyle xmlns:a="http://schemas.openxmlformats.org/drawingml/2006/main">
+            <a:defPPr>
+              <a:defRPr sz="1800" b="0">
+                <a:solidFill>
+                  <a:srgbClr val="161616"/>
+                </a:solidFill>
+                <a:latin typeface="Arial"/>
+                <a:ea typeface="Arial"/>
+                <a:cs typeface="Arial"/>
+              </a:defRPr>
+            </a:defPPr>
+          </a:lstStyle>
           <a:p xmlns:a="http://schemas.openxmlformats.org/drawingml/2006/main">
             <a:pPr>
               <a:defRPr sz="1800" b="0">
@@ -1999,7 +3703,7 @@
     </p:spTree>
     <p:extLst>
       <p:ext uri="{BB962C8B-B14F-4D97-AF65-F5344CB8AC3E}">
-        <p14:creationId xmlns:p14="http://schemas.microsoft.com/office/powerpoint/2010/main" val="1495567075"/>
+        <p14:creationId xmlns:p14="http://schemas.microsoft.com/office/powerpoint/2010/main" val="1158707033"/>
       </p:ext>
     </p:extLst>
   </p:cSld>
@@ -2030,7 +3734,7 @@
           <p:cNvPr id="7" name="">
             <a:extLst xmlns:a="http://schemas.openxmlformats.org/drawingml/2006/main">
               <a:ext uri="{FF2B5EF4-FFF2-40B4-BE49-F238E27FC236}">
-                <a16:creationId xmlns:a16="http://schemas.microsoft.com/office/drawing/2014/main" id="{6ACC0576-2890-41E3-B9DA-6EFDCAA77928}"/>
+                <a16:creationId xmlns:a16="http://schemas.microsoft.com/office/drawing/2014/main" id="{6CD5AD34-C613-400B-9979-F91572858253}"/>
               </a:ext>
             </a:extLst>
           </p:cNvPr>
@@ -2056,7 +3760,18 @@
           <a:bodyPr xmlns:a="http://schemas.openxmlformats.org/drawingml/2006/main" anchor="ctr">
             <a:noAutofit/>
           </a:bodyPr>
-          <a:lstStyle xmlns:a="http://schemas.openxmlformats.org/drawingml/2006/main"/>
+          <a:lstStyle xmlns:a="http://schemas.openxmlformats.org/drawingml/2006/main">
+            <a:defPPr algn="l">
+              <a:defRPr sz="2700" b="1">
+                <a:solidFill>
+                  <a:srgbClr val="161616"/>
+                </a:solidFill>
+                <a:latin typeface="Arial"/>
+                <a:ea typeface="Arial"/>
+                <a:cs typeface="Arial"/>
+              </a:defRPr>
+            </a:defPPr>
+          </a:lstStyle>
           <a:p xmlns:a="http://schemas.openxmlformats.org/drawingml/2006/main">
             <a:pPr algn="l">
               <a:defRPr sz="2700" b="1">
@@ -2087,7 +3802,7 @@
           <p:cNvPr id="2" name="">
             <a:extLst xmlns:a="http://schemas.openxmlformats.org/drawingml/2006/main">
               <a:ext uri="{FF2B5EF4-FFF2-40B4-BE49-F238E27FC236}">
-                <a16:creationId xmlns:a16="http://schemas.microsoft.com/office/drawing/2014/main" id="{B8E3303E-4EBA-4A33-8630-E7B2D3458F7B}"/>
+                <a16:creationId xmlns:a16="http://schemas.microsoft.com/office/drawing/2014/main" id="{AF894987-9711-43A6-90FF-0F99CCD47839}"/>
               </a:ext>
             </a:extLst>
           </p:cNvPr>
@@ -2113,7 +3828,18 @@
           <a:bodyPr xmlns:a="http://schemas.openxmlformats.org/drawingml/2006/main">
             <a:noAutofit/>
           </a:bodyPr>
-          <a:lstStyle xmlns:a="http://schemas.openxmlformats.org/drawingml/2006/main"/>
+          <a:lstStyle xmlns:a="http://schemas.openxmlformats.org/drawingml/2006/main">
+            <a:defPPr>
+              <a:defRPr sz="2175" b="0">
+                <a:solidFill>
+                  <a:srgbClr val="161616"/>
+                </a:solidFill>
+                <a:latin typeface="Arial"/>
+                <a:ea typeface="Arial"/>
+                <a:cs typeface="Arial"/>
+              </a:defRPr>
+            </a:defPPr>
+          </a:lstStyle>
           <a:p xmlns:a="http://schemas.openxmlformats.org/drawingml/2006/main">
             <a:pPr>
               <a:defRPr sz="2175" b="0">
@@ -2144,7 +3870,7 @@
           <p:cNvPr id="3" name="">
             <a:extLst xmlns:a="http://schemas.openxmlformats.org/drawingml/2006/main">
               <a:ext uri="{FF2B5EF4-FFF2-40B4-BE49-F238E27FC236}">
-                <a16:creationId xmlns:a16="http://schemas.microsoft.com/office/drawing/2014/main" id="{01253FB5-5591-45D6-8422-CF690FC8B83F}"/>
+                <a16:creationId xmlns:a16="http://schemas.microsoft.com/office/drawing/2014/main" id="{B28A8D22-033D-491A-B590-E97C8124AEC9}"/>
               </a:ext>
             </a:extLst>
           </p:cNvPr>
@@ -2170,7 +3896,18 @@
           <a:bodyPr xmlns:a="http://schemas.openxmlformats.org/drawingml/2006/main">
             <a:noAutofit/>
           </a:bodyPr>
-          <a:lstStyle xmlns:a="http://schemas.openxmlformats.org/drawingml/2006/main"/>
+          <a:lstStyle xmlns:a="http://schemas.openxmlformats.org/drawingml/2006/main">
+            <a:defPPr>
+              <a:defRPr sz="2175" b="0">
+                <a:solidFill>
+                  <a:srgbClr val="161616"/>
+                </a:solidFill>
+                <a:latin typeface="Arial"/>
+                <a:ea typeface="Arial"/>
+                <a:cs typeface="Arial"/>
+              </a:defRPr>
+            </a:defPPr>
+          </a:lstStyle>
           <a:p xmlns:a="http://schemas.openxmlformats.org/drawingml/2006/main">
             <a:pPr>
               <a:defRPr sz="2175" b="0">
@@ -2201,7 +3938,7 @@
           <p:cNvPr id="4" name="">
             <a:extLst xmlns:a="http://schemas.openxmlformats.org/drawingml/2006/main">
               <a:ext uri="{FF2B5EF4-FFF2-40B4-BE49-F238E27FC236}">
-                <a16:creationId xmlns:a16="http://schemas.microsoft.com/office/drawing/2014/main" id="{46522086-3BC2-4A73-844F-1B0C6E1D338A}"/>
+                <a16:creationId xmlns:a16="http://schemas.microsoft.com/office/drawing/2014/main" id="{4E64A133-AC01-44BF-95BD-DE27FEE2FE68}"/>
               </a:ext>
             </a:extLst>
           </p:cNvPr>
@@ -2227,7 +3964,18 @@
           <a:bodyPr xmlns:a="http://schemas.openxmlformats.org/drawingml/2006/main">
             <a:noAutofit/>
           </a:bodyPr>
-          <a:lstStyle xmlns:a="http://schemas.openxmlformats.org/drawingml/2006/main"/>
+          <a:lstStyle xmlns:a="http://schemas.openxmlformats.org/drawingml/2006/main">
+            <a:defPPr>
+              <a:defRPr sz="2175" b="0">
+                <a:solidFill>
+                  <a:srgbClr val="161616"/>
+                </a:solidFill>
+                <a:latin typeface="Arial"/>
+                <a:ea typeface="Arial"/>
+                <a:cs typeface="Arial"/>
+              </a:defRPr>
+            </a:defPPr>
+          </a:lstStyle>
           <a:p xmlns:a="http://schemas.openxmlformats.org/drawingml/2006/main">
             <a:pPr>
               <a:defRPr sz="2175" b="0">
@@ -2258,7 +4006,7 @@
           <p:cNvPr id="5" name="">
             <a:extLst xmlns:a="http://schemas.openxmlformats.org/drawingml/2006/main">
               <a:ext uri="{FF2B5EF4-FFF2-40B4-BE49-F238E27FC236}">
-                <a16:creationId xmlns:a16="http://schemas.microsoft.com/office/drawing/2014/main" id="{A8B64772-6727-48F1-B3B6-CCB4EDD5E5DD}"/>
+                <a16:creationId xmlns:a16="http://schemas.microsoft.com/office/drawing/2014/main" id="{0726C77D-36BC-4908-8B2D-B5DAE3EFB3E8}"/>
               </a:ext>
             </a:extLst>
           </p:cNvPr>
@@ -2284,7 +4032,18 @@
           <a:bodyPr xmlns:a="http://schemas.openxmlformats.org/drawingml/2006/main">
             <a:noAutofit/>
           </a:bodyPr>
-          <a:lstStyle xmlns:a="http://schemas.openxmlformats.org/drawingml/2006/main"/>
+          <a:lstStyle xmlns:a="http://schemas.openxmlformats.org/drawingml/2006/main">
+            <a:defPPr>
+              <a:defRPr sz="2175" b="0">
+                <a:solidFill>
+                  <a:srgbClr val="161616"/>
+                </a:solidFill>
+                <a:latin typeface="Arial"/>
+                <a:ea typeface="Arial"/>
+                <a:cs typeface="Arial"/>
+              </a:defRPr>
+            </a:defPPr>
+          </a:lstStyle>
           <a:p xmlns:a="http://schemas.openxmlformats.org/drawingml/2006/main">
             <a:pPr>
               <a:defRPr sz="2175" b="0">
@@ -2315,7 +4074,7 @@
           <p:cNvPr id="6" name="">
             <a:extLst xmlns:a="http://schemas.openxmlformats.org/drawingml/2006/main">
               <a:ext uri="{FF2B5EF4-FFF2-40B4-BE49-F238E27FC236}">
-                <a16:creationId xmlns:a16="http://schemas.microsoft.com/office/drawing/2014/main" id="{C5BE58CE-0DDE-4C44-9AFC-3598A253897D}"/>
+                <a16:creationId xmlns:a16="http://schemas.microsoft.com/office/drawing/2014/main" id="{6308A342-D31F-4C7B-917B-E53BFC69B81F}"/>
               </a:ext>
             </a:extLst>
           </p:cNvPr>
@@ -2341,7 +4100,18 @@
           <a:bodyPr xmlns:a="http://schemas.openxmlformats.org/drawingml/2006/main">
             <a:noAutofit/>
           </a:bodyPr>
-          <a:lstStyle xmlns:a="http://schemas.openxmlformats.org/drawingml/2006/main"/>
+          <a:lstStyle xmlns:a="http://schemas.openxmlformats.org/drawingml/2006/main">
+            <a:defPPr>
+              <a:defRPr sz="2175" b="0">
+                <a:solidFill>
+                  <a:srgbClr val="161616"/>
+                </a:solidFill>
+                <a:latin typeface="Arial"/>
+                <a:ea typeface="Arial"/>
+                <a:cs typeface="Arial"/>
+              </a:defRPr>
+            </a:defPPr>
+          </a:lstStyle>
           <a:p xmlns:a="http://schemas.openxmlformats.org/drawingml/2006/main">
             <a:pPr>
               <a:defRPr sz="2175" b="0">
@@ -2370,7 +4140,7 @@
     </p:spTree>
     <p:extLst>
       <p:ext uri="{BB962C8B-B14F-4D97-AF65-F5344CB8AC3E}">
-        <p14:creationId xmlns:p14="http://schemas.microsoft.com/office/powerpoint/2010/main" val="2038280515"/>
+        <p14:creationId xmlns:p14="http://schemas.microsoft.com/office/powerpoint/2010/main" val="1713897783"/>
       </p:ext>
     </p:extLst>
   </p:cSld>
@@ -2401,7 +4171,7 @@
           <p:cNvPr id="3" name="">
             <a:extLst xmlns:a="http://schemas.openxmlformats.org/drawingml/2006/main">
               <a:ext uri="{FF2B5EF4-FFF2-40B4-BE49-F238E27FC236}">
-                <a16:creationId xmlns:a16="http://schemas.microsoft.com/office/drawing/2014/main" id="{983D7EE6-972D-4AC6-B079-5067135AD2E2}"/>
+                <a16:creationId xmlns:a16="http://schemas.microsoft.com/office/drawing/2014/main" id="{3B209719-1DD4-450F-9D43-A694E87DFFEF}"/>
               </a:ext>
             </a:extLst>
           </p:cNvPr>
@@ -2427,7 +4197,18 @@
           <a:bodyPr xmlns:a="http://schemas.openxmlformats.org/drawingml/2006/main" anchor="ctr">
             <a:noAutofit/>
           </a:bodyPr>
-          <a:lstStyle xmlns:a="http://schemas.openxmlformats.org/drawingml/2006/main"/>
+          <a:lstStyle xmlns:a="http://schemas.openxmlformats.org/drawingml/2006/main">
+            <a:defPPr algn="l">
+              <a:defRPr sz="2700" b="1">
+                <a:solidFill>
+                  <a:srgbClr val="161616"/>
+                </a:solidFill>
+                <a:latin typeface="Arial"/>
+                <a:ea typeface="Arial"/>
+                <a:cs typeface="Arial"/>
+              </a:defRPr>
+            </a:defPPr>
+          </a:lstStyle>
           <a:p xmlns:a="http://schemas.openxmlformats.org/drawingml/2006/main">
             <a:pPr algn="l">
               <a:defRPr sz="2700" b="1">
@@ -2455,7 +4236,13 @@
       </p:sp>
       <p:graphicFrame>
         <p:nvGraphicFramePr>
-          <p:cNvPr id="4" name=""/>
+          <p:cNvPr id="2" name="">
+            <a:extLst xmlns:a="http://schemas.openxmlformats.org/drawingml/2006/main">
+              <a:ext uri="{FF2B5EF4-FFF2-40B4-BE49-F238E27FC236}">
+                <a16:creationId xmlns:a16="http://schemas.microsoft.com/office/drawing/2014/main" id="{4B49E808-CDF7-4ACF-B316-8C58659F59FF}"/>
+              </a:ext>
+            </a:extLst>
+          </p:cNvPr>
           <p:cNvGraphicFramePr/>
           <p:nvPr/>
         </p:nvGraphicFramePr>
@@ -2492,6 +4279,30 @@
                     </a:p>
                   </a:txBody>
                   <a:tcPr marL="91440" marR="91440" marT="45720" marB="45720">
+                    <a:lnL w="9525">
+                      <a:solidFill>
+                        <a:srgbClr val="888888"/>
+                      </a:solidFill>
+                      <a:prstDash val="solid"/>
+                    </a:lnL>
+                    <a:lnR w="9525">
+                      <a:solidFill>
+                        <a:srgbClr val="888888"/>
+                      </a:solidFill>
+                      <a:prstDash val="solid"/>
+                    </a:lnR>
+                    <a:lnT w="9525">
+                      <a:solidFill>
+                        <a:srgbClr val="888888"/>
+                      </a:solidFill>
+                      <a:prstDash val="solid"/>
+                    </a:lnT>
+                    <a:lnB w="9525">
+                      <a:solidFill>
+                        <a:srgbClr val="888888"/>
+                      </a:solidFill>
+                      <a:prstDash val="solid"/>
+                    </a:lnB>
                     <a:solidFill>
                       <a:srgbClr val="F1F1F1"/>
                     </a:solidFill>
@@ -2516,6 +4327,24 @@
                     </a:p>
                   </a:txBody>
                   <a:tcPr marL="91440" marR="91440" marT="45720" marB="45720">
+                    <a:lnR w="9525">
+                      <a:solidFill>
+                        <a:srgbClr val="888888"/>
+                      </a:solidFill>
+                      <a:prstDash val="solid"/>
+                    </a:lnR>
+                    <a:lnT w="9525">
+                      <a:solidFill>
+                        <a:srgbClr val="888888"/>
+                      </a:solidFill>
+                      <a:prstDash val="solid"/>
+                    </a:lnT>
+                    <a:lnB w="9525">
+                      <a:solidFill>
+                        <a:srgbClr val="888888"/>
+                      </a:solidFill>
+                      <a:prstDash val="solid"/>
+                    </a:lnB>
                     <a:solidFill>
                       <a:srgbClr val="F1F1F1"/>
                     </a:solidFill>
@@ -2540,6 +4369,24 @@
                     </a:p>
                   </a:txBody>
                   <a:tcPr marL="91440" marR="91440" marT="45720" marB="45720">
+                    <a:lnR w="9525">
+                      <a:solidFill>
+                        <a:srgbClr val="888888"/>
+                      </a:solidFill>
+                      <a:prstDash val="solid"/>
+                    </a:lnR>
+                    <a:lnT w="9525">
+                      <a:solidFill>
+                        <a:srgbClr val="888888"/>
+                      </a:solidFill>
+                      <a:prstDash val="solid"/>
+                    </a:lnT>
+                    <a:lnB w="9525">
+                      <a:solidFill>
+                        <a:srgbClr val="888888"/>
+                      </a:solidFill>
+                      <a:prstDash val="solid"/>
+                    </a:lnB>
                     <a:solidFill>
                       <a:srgbClr val="F1F1F1"/>
                     </a:solidFill>
@@ -2566,6 +4413,24 @@
                     </a:p>
                   </a:txBody>
                   <a:tcPr marL="91440" marR="91440" marT="45720" marB="45720">
+                    <a:lnL w="9525">
+                      <a:solidFill>
+                        <a:srgbClr val="888888"/>
+                      </a:solidFill>
+                      <a:prstDash val="solid"/>
+                    </a:lnL>
+                    <a:lnR w="9525">
+                      <a:solidFill>
+                        <a:srgbClr val="888888"/>
+                      </a:solidFill>
+                      <a:prstDash val="solid"/>
+                    </a:lnR>
+                    <a:lnB w="9525">
+                      <a:solidFill>
+                        <a:srgbClr val="888888"/>
+                      </a:solidFill>
+                      <a:prstDash val="solid"/>
+                    </a:lnB>
                     <a:solidFill>
                       <a:srgbClr val="FFFFFF"/>
                     </a:solidFill>
@@ -2590,6 +4455,18 @@
                     </a:p>
                   </a:txBody>
                   <a:tcPr marL="91440" marR="91440" marT="45720" marB="45720">
+                    <a:lnR w="9525">
+                      <a:solidFill>
+                        <a:srgbClr val="888888"/>
+                      </a:solidFill>
+                      <a:prstDash val="solid"/>
+                    </a:lnR>
+                    <a:lnB w="9525">
+                      <a:solidFill>
+                        <a:srgbClr val="888888"/>
+                      </a:solidFill>
+                      <a:prstDash val="solid"/>
+                    </a:lnB>
                     <a:solidFill>
                       <a:srgbClr val="FFFFFF"/>
                     </a:solidFill>
@@ -2614,6 +4491,18 @@
                     </a:p>
                   </a:txBody>
                   <a:tcPr marL="91440" marR="91440" marT="45720" marB="45720">
+                    <a:lnR w="9525">
+                      <a:solidFill>
+                        <a:srgbClr val="888888"/>
+                      </a:solidFill>
+                      <a:prstDash val="solid"/>
+                    </a:lnR>
+                    <a:lnB w="9525">
+                      <a:solidFill>
+                        <a:srgbClr val="888888"/>
+                      </a:solidFill>
+                      <a:prstDash val="solid"/>
+                    </a:lnB>
                     <a:solidFill>
                       <a:srgbClr val="FFFFFF"/>
                     </a:solidFill>
@@ -2640,6 +4529,24 @@
                     </a:p>
                   </a:txBody>
                   <a:tcPr marL="91440" marR="91440" marT="45720" marB="45720">
+                    <a:lnL w="9525">
+                      <a:solidFill>
+                        <a:srgbClr val="888888"/>
+                      </a:solidFill>
+                      <a:prstDash val="solid"/>
+                    </a:lnL>
+                    <a:lnR w="9525">
+                      <a:solidFill>
+                        <a:srgbClr val="888888"/>
+                      </a:solidFill>
+                      <a:prstDash val="solid"/>
+                    </a:lnR>
+                    <a:lnB w="9525">
+                      <a:solidFill>
+                        <a:srgbClr val="888888"/>
+                      </a:solidFill>
+                      <a:prstDash val="solid"/>
+                    </a:lnB>
                     <a:solidFill>
                       <a:srgbClr val="FFFFFF"/>
                     </a:solidFill>
@@ -2664,6 +4571,18 @@
                     </a:p>
                   </a:txBody>
                   <a:tcPr marL="91440" marR="91440" marT="45720" marB="45720">
+                    <a:lnR w="9525">
+                      <a:solidFill>
+                        <a:srgbClr val="888888"/>
+                      </a:solidFill>
+                      <a:prstDash val="solid"/>
+                    </a:lnR>
+                    <a:lnB w="9525">
+                      <a:solidFill>
+                        <a:srgbClr val="888888"/>
+                      </a:solidFill>
+                      <a:prstDash val="solid"/>
+                    </a:lnB>
                     <a:solidFill>
                       <a:srgbClr val="FFFFFF"/>
                     </a:solidFill>
@@ -2688,6 +4607,18 @@
                     </a:p>
                   </a:txBody>
                   <a:tcPr marL="91440" marR="91440" marT="45720" marB="45720">
+                    <a:lnR w="9525">
+                      <a:solidFill>
+                        <a:srgbClr val="888888"/>
+                      </a:solidFill>
+                      <a:prstDash val="solid"/>
+                    </a:lnR>
+                    <a:lnB w="9525">
+                      <a:solidFill>
+                        <a:srgbClr val="888888"/>
+                      </a:solidFill>
+                      <a:prstDash val="solid"/>
+                    </a:lnB>
                     <a:solidFill>
                       <a:srgbClr val="FFFFFF"/>
                     </a:solidFill>
@@ -2714,6 +4645,24 @@
                     </a:p>
                   </a:txBody>
                   <a:tcPr marL="91440" marR="91440" marT="45720" marB="45720">
+                    <a:lnL w="9525">
+                      <a:solidFill>
+                        <a:srgbClr val="888888"/>
+                      </a:solidFill>
+                      <a:prstDash val="solid"/>
+                    </a:lnL>
+                    <a:lnR w="9525">
+                      <a:solidFill>
+                        <a:srgbClr val="888888"/>
+                      </a:solidFill>
+                      <a:prstDash val="solid"/>
+                    </a:lnR>
+                    <a:lnB w="9525">
+                      <a:solidFill>
+                        <a:srgbClr val="888888"/>
+                      </a:solidFill>
+                      <a:prstDash val="solid"/>
+                    </a:lnB>
                     <a:solidFill>
                       <a:srgbClr val="FFFFFF"/>
                     </a:solidFill>
@@ -2738,6 +4687,18 @@
                     </a:p>
                   </a:txBody>
                   <a:tcPr marL="91440" marR="91440" marT="45720" marB="45720">
+                    <a:lnR w="9525">
+                      <a:solidFill>
+                        <a:srgbClr val="888888"/>
+                      </a:solidFill>
+                      <a:prstDash val="solid"/>
+                    </a:lnR>
+                    <a:lnB w="9525">
+                      <a:solidFill>
+                        <a:srgbClr val="888888"/>
+                      </a:solidFill>
+                      <a:prstDash val="solid"/>
+                    </a:lnB>
                     <a:solidFill>
                       <a:srgbClr val="FFFFFF"/>
                     </a:solidFill>
@@ -2762,6 +4723,18 @@
                     </a:p>
                   </a:txBody>
                   <a:tcPr marL="91440" marR="91440" marT="45720" marB="45720">
+                    <a:lnR w="9525">
+                      <a:solidFill>
+                        <a:srgbClr val="888888"/>
+                      </a:solidFill>
+                      <a:prstDash val="solid"/>
+                    </a:lnR>
+                    <a:lnB w="9525">
+                      <a:solidFill>
+                        <a:srgbClr val="888888"/>
+                      </a:solidFill>
+                      <a:prstDash val="solid"/>
+                    </a:lnB>
                     <a:solidFill>
                       <a:srgbClr val="FFFFFF"/>
                     </a:solidFill>
@@ -2788,6 +4761,24 @@
                     </a:p>
                   </a:txBody>
                   <a:tcPr marL="91440" marR="91440" marT="45720" marB="45720">
+                    <a:lnL w="9525">
+                      <a:solidFill>
+                        <a:srgbClr val="888888"/>
+                      </a:solidFill>
+                      <a:prstDash val="solid"/>
+                    </a:lnL>
+                    <a:lnR w="9525">
+                      <a:solidFill>
+                        <a:srgbClr val="888888"/>
+                      </a:solidFill>
+                      <a:prstDash val="solid"/>
+                    </a:lnR>
+                    <a:lnB w="9525">
+                      <a:solidFill>
+                        <a:srgbClr val="888888"/>
+                      </a:solidFill>
+                      <a:prstDash val="solid"/>
+                    </a:lnB>
                     <a:solidFill>
                       <a:srgbClr val="FFFFFF"/>
                     </a:solidFill>
@@ -2812,6 +4803,18 @@
                     </a:p>
                   </a:txBody>
                   <a:tcPr marL="91440" marR="91440" marT="45720" marB="45720">
+                    <a:lnR w="9525">
+                      <a:solidFill>
+                        <a:srgbClr val="888888"/>
+                      </a:solidFill>
+                      <a:prstDash val="solid"/>
+                    </a:lnR>
+                    <a:lnB w="9525">
+                      <a:solidFill>
+                        <a:srgbClr val="888888"/>
+                      </a:solidFill>
+                      <a:prstDash val="solid"/>
+                    </a:lnB>
                     <a:solidFill>
                       <a:srgbClr val="FFFFFF"/>
                     </a:solidFill>
@@ -2836,6 +4839,18 @@
                     </a:p>
                   </a:txBody>
                   <a:tcPr marL="91440" marR="91440" marT="45720" marB="45720">
+                    <a:lnR w="9525">
+                      <a:solidFill>
+                        <a:srgbClr val="888888"/>
+                      </a:solidFill>
+                      <a:prstDash val="solid"/>
+                    </a:lnR>
+                    <a:lnB w="9525">
+                      <a:solidFill>
+                        <a:srgbClr val="888888"/>
+                      </a:solidFill>
+                      <a:prstDash val="solid"/>
+                    </a:lnB>
                     <a:solidFill>
                       <a:srgbClr val="FFFFFF"/>
                     </a:solidFill>
@@ -2862,6 +4877,24 @@
                     </a:p>
                   </a:txBody>
                   <a:tcPr marL="91440" marR="91440" marT="45720" marB="45720">
+                    <a:lnL w="9525">
+                      <a:solidFill>
+                        <a:srgbClr val="888888"/>
+                      </a:solidFill>
+                      <a:prstDash val="solid"/>
+                    </a:lnL>
+                    <a:lnR w="9525">
+                      <a:solidFill>
+                        <a:srgbClr val="888888"/>
+                      </a:solidFill>
+                      <a:prstDash val="solid"/>
+                    </a:lnR>
+                    <a:lnB w="9525">
+                      <a:solidFill>
+                        <a:srgbClr val="888888"/>
+                      </a:solidFill>
+                      <a:prstDash val="solid"/>
+                    </a:lnB>
                     <a:solidFill>
                       <a:srgbClr val="FFFFFF"/>
                     </a:solidFill>
@@ -2886,6 +4919,18 @@
                     </a:p>
                   </a:txBody>
                   <a:tcPr marL="91440" marR="91440" marT="45720" marB="45720">
+                    <a:lnR w="9525">
+                      <a:solidFill>
+                        <a:srgbClr val="888888"/>
+                      </a:solidFill>
+                      <a:prstDash val="solid"/>
+                    </a:lnR>
+                    <a:lnB w="9525">
+                      <a:solidFill>
+                        <a:srgbClr val="888888"/>
+                      </a:solidFill>
+                      <a:prstDash val="solid"/>
+                    </a:lnB>
                     <a:solidFill>
                       <a:srgbClr val="FFFFFF"/>
                     </a:solidFill>
@@ -2910,6 +4955,18 @@
                     </a:p>
                   </a:txBody>
                   <a:tcPr marL="91440" marR="91440" marT="45720" marB="45720">
+                    <a:lnR w="9525">
+                      <a:solidFill>
+                        <a:srgbClr val="888888"/>
+                      </a:solidFill>
+                      <a:prstDash val="solid"/>
+                    </a:lnR>
+                    <a:lnB w="9525">
+                      <a:solidFill>
+                        <a:srgbClr val="888888"/>
+                      </a:solidFill>
+                      <a:prstDash val="solid"/>
+                    </a:lnB>
                     <a:solidFill>
                       <a:srgbClr val="FFFFFF"/>
                     </a:solidFill>
@@ -2936,6 +4993,24 @@
                     </a:p>
                   </a:txBody>
                   <a:tcPr marL="91440" marR="91440" marT="45720" marB="45720">
+                    <a:lnL w="9525">
+                      <a:solidFill>
+                        <a:srgbClr val="888888"/>
+                      </a:solidFill>
+                      <a:prstDash val="solid"/>
+                    </a:lnL>
+                    <a:lnR w="9525">
+                      <a:solidFill>
+                        <a:srgbClr val="888888"/>
+                      </a:solidFill>
+                      <a:prstDash val="solid"/>
+                    </a:lnR>
+                    <a:lnB w="9525">
+                      <a:solidFill>
+                        <a:srgbClr val="888888"/>
+                      </a:solidFill>
+                      <a:prstDash val="solid"/>
+                    </a:lnB>
                     <a:solidFill>
                       <a:srgbClr val="FFFFFF"/>
                     </a:solidFill>
@@ -2960,6 +5035,18 @@
                     </a:p>
                   </a:txBody>
                   <a:tcPr marL="91440" marR="91440" marT="45720" marB="45720">
+                    <a:lnR w="9525">
+                      <a:solidFill>
+                        <a:srgbClr val="888888"/>
+                      </a:solidFill>
+                      <a:prstDash val="solid"/>
+                    </a:lnR>
+                    <a:lnB w="9525">
+                      <a:solidFill>
+                        <a:srgbClr val="888888"/>
+                      </a:solidFill>
+                      <a:prstDash val="solid"/>
+                    </a:lnB>
                     <a:solidFill>
                       <a:srgbClr val="FFFFFF"/>
                     </a:solidFill>
@@ -2984,6 +5071,18 @@
                     </a:p>
                   </a:txBody>
                   <a:tcPr marL="91440" marR="91440" marT="45720" marB="45720">
+                    <a:lnR w="9525">
+                      <a:solidFill>
+                        <a:srgbClr val="888888"/>
+                      </a:solidFill>
+                      <a:prstDash val="solid"/>
+                    </a:lnR>
+                    <a:lnB w="9525">
+                      <a:solidFill>
+                        <a:srgbClr val="888888"/>
+                      </a:solidFill>
+                      <a:prstDash val="solid"/>
+                    </a:lnB>
                     <a:solidFill>
                       <a:srgbClr val="FFFFFF"/>
                     </a:solidFill>
@@ -3010,6 +5109,24 @@
                     </a:p>
                   </a:txBody>
                   <a:tcPr marL="91440" marR="91440" marT="45720" marB="45720">
+                    <a:lnL w="9525">
+                      <a:solidFill>
+                        <a:srgbClr val="888888"/>
+                      </a:solidFill>
+                      <a:prstDash val="solid"/>
+                    </a:lnL>
+                    <a:lnR w="9525">
+                      <a:solidFill>
+                        <a:srgbClr val="888888"/>
+                      </a:solidFill>
+                      <a:prstDash val="solid"/>
+                    </a:lnR>
+                    <a:lnB w="9525">
+                      <a:solidFill>
+                        <a:srgbClr val="888888"/>
+                      </a:solidFill>
+                      <a:prstDash val="solid"/>
+                    </a:lnB>
                     <a:solidFill>
                       <a:srgbClr val="FFFFFF"/>
                     </a:solidFill>
@@ -3034,6 +5151,18 @@
                     </a:p>
                   </a:txBody>
                   <a:tcPr marL="91440" marR="91440" marT="45720" marB="45720">
+                    <a:lnR w="9525">
+                      <a:solidFill>
+                        <a:srgbClr val="888888"/>
+                      </a:solidFill>
+                      <a:prstDash val="solid"/>
+                    </a:lnR>
+                    <a:lnB w="9525">
+                      <a:solidFill>
+                        <a:srgbClr val="888888"/>
+                      </a:solidFill>
+                      <a:prstDash val="solid"/>
+                    </a:lnB>
                     <a:solidFill>
                       <a:srgbClr val="FFFFFF"/>
                     </a:solidFill>
@@ -3058,6 +5187,18 @@
                     </a:p>
                   </a:txBody>
                   <a:tcPr marL="91440" marR="91440" marT="45720" marB="45720">
+                    <a:lnR w="9525">
+                      <a:solidFill>
+                        <a:srgbClr val="888888"/>
+                      </a:solidFill>
+                      <a:prstDash val="solid"/>
+                    </a:lnR>
+                    <a:lnB w="9525">
+                      <a:solidFill>
+                        <a:srgbClr val="888888"/>
+                      </a:solidFill>
+                      <a:prstDash val="solid"/>
+                    </a:lnB>
                     <a:solidFill>
                       <a:srgbClr val="FFFFFF"/>
                     </a:solidFill>
@@ -3084,6 +5225,24 @@
                     </a:p>
                   </a:txBody>
                   <a:tcPr marL="91440" marR="91440" marT="45720" marB="45720">
+                    <a:lnL w="9525">
+                      <a:solidFill>
+                        <a:srgbClr val="888888"/>
+                      </a:solidFill>
+                      <a:prstDash val="solid"/>
+                    </a:lnL>
+                    <a:lnR w="9525">
+                      <a:solidFill>
+                        <a:srgbClr val="888888"/>
+                      </a:solidFill>
+                      <a:prstDash val="solid"/>
+                    </a:lnR>
+                    <a:lnB w="9525">
+                      <a:solidFill>
+                        <a:srgbClr val="888888"/>
+                      </a:solidFill>
+                      <a:prstDash val="solid"/>
+                    </a:lnB>
                     <a:solidFill>
                       <a:srgbClr val="FFFFFF"/>
                     </a:solidFill>
@@ -3108,6 +5267,18 @@
                     </a:p>
                   </a:txBody>
                   <a:tcPr marL="91440" marR="91440" marT="45720" marB="45720">
+                    <a:lnR w="9525">
+                      <a:solidFill>
+                        <a:srgbClr val="888888"/>
+                      </a:solidFill>
+                      <a:prstDash val="solid"/>
+                    </a:lnR>
+                    <a:lnB w="9525">
+                      <a:solidFill>
+                        <a:srgbClr val="888888"/>
+                      </a:solidFill>
+                      <a:prstDash val="solid"/>
+                    </a:lnB>
                     <a:solidFill>
                       <a:srgbClr val="FFFFFF"/>
                     </a:solidFill>
@@ -3132,6 +5303,18 @@
                     </a:p>
                   </a:txBody>
                   <a:tcPr marL="91440" marR="91440" marT="45720" marB="45720">
+                    <a:lnR w="9525">
+                      <a:solidFill>
+                        <a:srgbClr val="888888"/>
+                      </a:solidFill>
+                      <a:prstDash val="solid"/>
+                    </a:lnR>
+                    <a:lnB w="9525">
+                      <a:solidFill>
+                        <a:srgbClr val="888888"/>
+                      </a:solidFill>
+                      <a:prstDash val="solid"/>
+                    </a:lnB>
                     <a:solidFill>
                       <a:srgbClr val="FFFFFF"/>
                     </a:solidFill>
@@ -3145,7 +5328,7 @@
     </p:spTree>
     <p:extLst>
       <p:ext uri="{BB962C8B-B14F-4D97-AF65-F5344CB8AC3E}">
-        <p14:creationId xmlns:p14="http://schemas.microsoft.com/office/powerpoint/2010/main" val="432924695"/>
+        <p14:creationId xmlns:p14="http://schemas.microsoft.com/office/powerpoint/2010/main" val="28158232"/>
       </p:ext>
     </p:extLst>
   </p:cSld>
@@ -3176,7 +5359,7 @@
           <p:cNvPr id="3" name="">
             <a:extLst xmlns:a="http://schemas.openxmlformats.org/drawingml/2006/main">
               <a:ext uri="{FF2B5EF4-FFF2-40B4-BE49-F238E27FC236}">
-                <a16:creationId xmlns:a16="http://schemas.microsoft.com/office/drawing/2014/main" id="{41F6FCC6-ABF2-4F4D-B703-8FAC07A2D297}"/>
+                <a16:creationId xmlns:a16="http://schemas.microsoft.com/office/drawing/2014/main" id="{4FED8F12-638E-430A-9B82-9DDA0CC31A7F}"/>
               </a:ext>
             </a:extLst>
           </p:cNvPr>
@@ -3202,7 +5385,18 @@
           <a:bodyPr xmlns:a="http://schemas.openxmlformats.org/drawingml/2006/main" anchor="ctr">
             <a:noAutofit/>
           </a:bodyPr>
-          <a:lstStyle xmlns:a="http://schemas.openxmlformats.org/drawingml/2006/main"/>
+          <a:lstStyle xmlns:a="http://schemas.openxmlformats.org/drawingml/2006/main">
+            <a:defPPr algn="l">
+              <a:defRPr sz="2700" b="1">
+                <a:solidFill>
+                  <a:srgbClr val="161616"/>
+                </a:solidFill>
+                <a:latin typeface="Arial"/>
+                <a:ea typeface="Arial"/>
+                <a:cs typeface="Arial"/>
+              </a:defRPr>
+            </a:defPPr>
+          </a:lstStyle>
           <a:p xmlns:a="http://schemas.openxmlformats.org/drawingml/2006/main">
             <a:pPr algn="l">
               <a:defRPr sz="2700" b="1">
@@ -3223,21 +5417,27 @@
                 <a:ea typeface="Arial"/>
                 <a:cs typeface="Arial"/>
               </a:rPr>
-              <a:t>IDEF0 TO BE: контекст управляемого процесса</a:t>
+              <a:t>IDEF0 TO BE: формирование карточек в ИС</a:t>
             </a:r>
           </a:p>
         </p:txBody>
       </p:sp>
       <p:pic>
         <p:nvPicPr>
-          <p:cNvPr id="4" name=""/>
+          <p:cNvPr id="2" name="">
+            <a:extLst xmlns:a="http://schemas.openxmlformats.org/drawingml/2006/main">
+              <a:ext uri="{FF2B5EF4-FFF2-40B4-BE49-F238E27FC236}">
+                <a16:creationId xmlns:a16="http://schemas.microsoft.com/office/drawing/2014/main" id="{ECF36527-0572-40C3-9690-9082EF77D999}"/>
+              </a:ext>
+            </a:extLst>
+          </p:cNvPr>
           <p:cNvPicPr>
             <a:picLocks xmlns:a="http://schemas.openxmlformats.org/drawingml/2006/main" noChangeAspect="1"/>
           </p:cNvPicPr>
           <p:nvPr/>
         </p:nvPicPr>
         <p:blipFill>
-          <a:blip xmlns:r="http://schemas.openxmlformats.org/officeDocument/2006/relationships" xmlns:a="http://schemas.openxmlformats.org/drawingml/2006/main" r:embed="R32741d406475434d"/>
+          <a:blip xmlns:r="http://schemas.openxmlformats.org/officeDocument/2006/relationships" xmlns:a="http://schemas.openxmlformats.org/drawingml/2006/main" r:embed="R935818ea935d40d1"/>
           <a:stretch xmlns:a="http://schemas.openxmlformats.org/drawingml/2006/main"/>
         </p:blipFill>
         <p:spPr>
@@ -3253,7 +5453,7 @@
     </p:spTree>
     <p:extLst>
       <p:ext uri="{BB962C8B-B14F-4D97-AF65-F5344CB8AC3E}">
-        <p14:creationId xmlns:p14="http://schemas.microsoft.com/office/powerpoint/2010/main" val="2023623535"/>
+        <p14:creationId xmlns:p14="http://schemas.microsoft.com/office/powerpoint/2010/main" val="457688255"/>
       </p:ext>
     </p:extLst>
   </p:cSld>
@@ -3284,7 +5484,7 @@
           <p:cNvPr id="3" name="">
             <a:extLst xmlns:a="http://schemas.openxmlformats.org/drawingml/2006/main">
               <a:ext uri="{FF2B5EF4-FFF2-40B4-BE49-F238E27FC236}">
-                <a16:creationId xmlns:a16="http://schemas.microsoft.com/office/drawing/2014/main" id="{5CFBC7C4-6DB7-4DFA-8AAA-1EFB075D4E26}"/>
+                <a16:creationId xmlns:a16="http://schemas.microsoft.com/office/drawing/2014/main" id="{042D313A-BAF7-40D7-BC86-7C737158B966}"/>
               </a:ext>
             </a:extLst>
           </p:cNvPr>
@@ -3310,7 +5510,18 @@
           <a:bodyPr xmlns:a="http://schemas.openxmlformats.org/drawingml/2006/main" anchor="ctr">
             <a:noAutofit/>
           </a:bodyPr>
-          <a:lstStyle xmlns:a="http://schemas.openxmlformats.org/drawingml/2006/main"/>
+          <a:lstStyle xmlns:a="http://schemas.openxmlformats.org/drawingml/2006/main">
+            <a:defPPr algn="l">
+              <a:defRPr sz="2700" b="1">
+                <a:solidFill>
+                  <a:srgbClr val="161616"/>
+                </a:solidFill>
+                <a:latin typeface="Arial"/>
+                <a:ea typeface="Arial"/>
+                <a:cs typeface="Arial"/>
+              </a:defRPr>
+            </a:defPPr>
+          </a:lstStyle>
           <a:p xmlns:a="http://schemas.openxmlformats.org/drawingml/2006/main">
             <a:pPr algn="l">
               <a:defRPr sz="2700" b="1">
@@ -3338,14 +5549,20 @@
       </p:sp>
       <p:pic>
         <p:nvPicPr>
-          <p:cNvPr id="4" name=""/>
+          <p:cNvPr id="2" name="">
+            <a:extLst xmlns:a="http://schemas.openxmlformats.org/drawingml/2006/main">
+              <a:ext uri="{FF2B5EF4-FFF2-40B4-BE49-F238E27FC236}">
+                <a16:creationId xmlns:a16="http://schemas.microsoft.com/office/drawing/2014/main" id="{6525252F-E79D-4214-A24D-A6FD3A5BD660}"/>
+              </a:ext>
+            </a:extLst>
+          </p:cNvPr>
           <p:cNvPicPr>
             <a:picLocks xmlns:a="http://schemas.openxmlformats.org/drawingml/2006/main" noChangeAspect="1"/>
           </p:cNvPicPr>
           <p:nvPr/>
         </p:nvPicPr>
         <p:blipFill>
-          <a:blip xmlns:r="http://schemas.openxmlformats.org/officeDocument/2006/relationships" xmlns:a="http://schemas.openxmlformats.org/drawingml/2006/main" r:embed="R365ea8ea9ae246b3"/>
+          <a:blip xmlns:r="http://schemas.openxmlformats.org/officeDocument/2006/relationships" xmlns:a="http://schemas.openxmlformats.org/drawingml/2006/main" r:embed="R8076fee7699344ea"/>
           <a:stretch xmlns:a="http://schemas.openxmlformats.org/drawingml/2006/main"/>
         </p:blipFill>
         <p:spPr>
@@ -3361,7 +5578,7 @@
     </p:spTree>
     <p:extLst>
       <p:ext uri="{BB962C8B-B14F-4D97-AF65-F5344CB8AC3E}">
-        <p14:creationId xmlns:p14="http://schemas.microsoft.com/office/powerpoint/2010/main" val="1889018658"/>
+        <p14:creationId xmlns:p14="http://schemas.microsoft.com/office/powerpoint/2010/main" val="1975313117"/>
       </p:ext>
     </p:extLst>
   </p:cSld>
@@ -3392,7 +5609,7 @@
           <p:cNvPr id="3" name="">
             <a:extLst xmlns:a="http://schemas.openxmlformats.org/drawingml/2006/main">
               <a:ext uri="{FF2B5EF4-FFF2-40B4-BE49-F238E27FC236}">
-                <a16:creationId xmlns:a16="http://schemas.microsoft.com/office/drawing/2014/main" id="{26F3777F-2EA4-470C-8878-750B749420D2}"/>
+                <a16:creationId xmlns:a16="http://schemas.microsoft.com/office/drawing/2014/main" id="{1DFBDE06-932A-435B-BA58-E329DE1C1B0A}"/>
               </a:ext>
             </a:extLst>
           </p:cNvPr>
@@ -3418,7 +5635,18 @@
           <a:bodyPr xmlns:a="http://schemas.openxmlformats.org/drawingml/2006/main" anchor="ctr">
             <a:noAutofit/>
           </a:bodyPr>
-          <a:lstStyle xmlns:a="http://schemas.openxmlformats.org/drawingml/2006/main"/>
+          <a:lstStyle xmlns:a="http://schemas.openxmlformats.org/drawingml/2006/main">
+            <a:defPPr algn="l">
+              <a:defRPr sz="2700" b="1">
+                <a:solidFill>
+                  <a:srgbClr val="161616"/>
+                </a:solidFill>
+                <a:latin typeface="Arial"/>
+                <a:ea typeface="Arial"/>
+                <a:cs typeface="Arial"/>
+              </a:defRPr>
+            </a:defPPr>
+          </a:lstStyle>
           <a:p xmlns:a="http://schemas.openxmlformats.org/drawingml/2006/main">
             <a:pPr algn="l">
               <a:defRPr sz="2700" b="1">
@@ -3446,20 +5674,26 @@
       </p:sp>
       <p:pic>
         <p:nvPicPr>
-          <p:cNvPr id="4" name=""/>
+          <p:cNvPr id="2" name="">
+            <a:extLst xmlns:a="http://schemas.openxmlformats.org/drawingml/2006/main">
+              <a:ext uri="{FF2B5EF4-FFF2-40B4-BE49-F238E27FC236}">
+                <a16:creationId xmlns:a16="http://schemas.microsoft.com/office/drawing/2014/main" id="{63FE6E9C-2292-4327-AD18-25DB75F86DC3}"/>
+              </a:ext>
+            </a:extLst>
+          </p:cNvPr>
           <p:cNvPicPr>
             <a:picLocks xmlns:a="http://schemas.openxmlformats.org/drawingml/2006/main" noChangeAspect="1"/>
           </p:cNvPicPr>
           <p:nvPr/>
         </p:nvPicPr>
         <p:blipFill>
-          <a:blip xmlns:r="http://schemas.openxmlformats.org/officeDocument/2006/relationships" xmlns:a="http://schemas.openxmlformats.org/drawingml/2006/main" r:embed="R86c8104ba3bb491c"/>
+          <a:blip xmlns:r="http://schemas.openxmlformats.org/officeDocument/2006/relationships" xmlns:a="http://schemas.openxmlformats.org/drawingml/2006/main" r:embed="R412b1d808da54c3c"/>
           <a:stretch xmlns:a="http://schemas.openxmlformats.org/drawingml/2006/main"/>
         </p:blipFill>
         <p:spPr>
           <a:xfrm xmlns:a="http://schemas.openxmlformats.org/drawingml/2006/main">
-            <a:off x="1453510" y="1285875"/>
-            <a:ext cx="9284980" cy="5000625"/>
+            <a:off x="571500" y="1961787"/>
+            <a:ext cx="11049000" cy="3648801"/>
           </a:xfrm>
           <a:prstGeom xmlns:a="http://schemas.openxmlformats.org/drawingml/2006/main" prst="rect">
             <a:avLst/>
@@ -3469,7 +5703,7 @@
     </p:spTree>
     <p:extLst>
       <p:ext uri="{BB962C8B-B14F-4D97-AF65-F5344CB8AC3E}">
-        <p14:creationId xmlns:p14="http://schemas.microsoft.com/office/powerpoint/2010/main" val="343065144"/>
+        <p14:creationId xmlns:p14="http://schemas.microsoft.com/office/powerpoint/2010/main" val="555816863"/>
       </p:ext>
     </p:extLst>
   </p:cSld>
@@ -3500,7 +5734,7 @@
           <p:cNvPr id="3" name="">
             <a:extLst xmlns:a="http://schemas.openxmlformats.org/drawingml/2006/main">
               <a:ext uri="{FF2B5EF4-FFF2-40B4-BE49-F238E27FC236}">
-                <a16:creationId xmlns:a16="http://schemas.microsoft.com/office/drawing/2014/main" id="{A08D5BE2-71F6-466D-8581-2D13858FC146}"/>
+                <a16:creationId xmlns:a16="http://schemas.microsoft.com/office/drawing/2014/main" id="{FBD6A069-9337-47EC-8718-90E0C4FD971F}"/>
               </a:ext>
             </a:extLst>
           </p:cNvPr>
@@ -3526,7 +5760,18 @@
           <a:bodyPr xmlns:a="http://schemas.openxmlformats.org/drawingml/2006/main" anchor="ctr">
             <a:noAutofit/>
           </a:bodyPr>
-          <a:lstStyle xmlns:a="http://schemas.openxmlformats.org/drawingml/2006/main"/>
+          <a:lstStyle xmlns:a="http://schemas.openxmlformats.org/drawingml/2006/main">
+            <a:defPPr algn="l">
+              <a:defRPr sz="2700" b="1">
+                <a:solidFill>
+                  <a:srgbClr val="161616"/>
+                </a:solidFill>
+                <a:latin typeface="Arial"/>
+                <a:ea typeface="Arial"/>
+                <a:cs typeface="Arial"/>
+              </a:defRPr>
+            </a:defPPr>
+          </a:lstStyle>
           <a:p xmlns:a="http://schemas.openxmlformats.org/drawingml/2006/main">
             <a:pPr algn="l">
               <a:defRPr sz="2700" b="1">
@@ -3554,20 +5799,26 @@
       </p:sp>
       <p:pic>
         <p:nvPicPr>
-          <p:cNvPr id="4" name=""/>
+          <p:cNvPr id="2" name="">
+            <a:extLst xmlns:a="http://schemas.openxmlformats.org/drawingml/2006/main">
+              <a:ext uri="{FF2B5EF4-FFF2-40B4-BE49-F238E27FC236}">
+                <a16:creationId xmlns:a16="http://schemas.microsoft.com/office/drawing/2014/main" id="{AE51BFF0-B633-4CB5-99F8-BFF33376C1FB}"/>
+              </a:ext>
+            </a:extLst>
+          </p:cNvPr>
           <p:cNvPicPr>
             <a:picLocks xmlns:a="http://schemas.openxmlformats.org/drawingml/2006/main" noChangeAspect="1"/>
           </p:cNvPicPr>
           <p:nvPr/>
         </p:nvPicPr>
         <p:blipFill>
-          <a:blip xmlns:r="http://schemas.openxmlformats.org/officeDocument/2006/relationships" xmlns:a="http://schemas.openxmlformats.org/drawingml/2006/main" r:embed="R539ec704c04d4123"/>
+          <a:blip xmlns:r="http://schemas.openxmlformats.org/officeDocument/2006/relationships" xmlns:a="http://schemas.openxmlformats.org/drawingml/2006/main" r:embed="R8613cc85ad084d51"/>
           <a:stretch xmlns:a="http://schemas.openxmlformats.org/drawingml/2006/main"/>
         </p:blipFill>
         <p:spPr>
           <a:xfrm xmlns:a="http://schemas.openxmlformats.org/drawingml/2006/main">
-            <a:off x="1606341" y="1285875"/>
-            <a:ext cx="8979318" cy="5000625"/>
+            <a:off x="571500" y="1946003"/>
+            <a:ext cx="11049000" cy="3680369"/>
           </a:xfrm>
           <a:prstGeom xmlns:a="http://schemas.openxmlformats.org/drawingml/2006/main" prst="rect">
             <a:avLst/>
@@ -3577,7 +5828,7 @@
     </p:spTree>
     <p:extLst>
       <p:ext uri="{BB962C8B-B14F-4D97-AF65-F5344CB8AC3E}">
-        <p14:creationId xmlns:p14="http://schemas.microsoft.com/office/powerpoint/2010/main" val="1469722470"/>
+        <p14:creationId xmlns:p14="http://schemas.microsoft.com/office/powerpoint/2010/main" val="323197071"/>
       </p:ext>
     </p:extLst>
   </p:cSld>
@@ -3608,7 +5859,7 @@
           <p:cNvPr id="3" name="">
             <a:extLst xmlns:a="http://schemas.openxmlformats.org/drawingml/2006/main">
               <a:ext uri="{FF2B5EF4-FFF2-40B4-BE49-F238E27FC236}">
-                <a16:creationId xmlns:a16="http://schemas.microsoft.com/office/drawing/2014/main" id="{39289CA5-D1E9-4D01-AA2D-26FFB369FB2D}"/>
+                <a16:creationId xmlns:a16="http://schemas.microsoft.com/office/drawing/2014/main" id="{4FB54FBC-47E0-415F-A8DA-6E3F61D2AA1F}"/>
               </a:ext>
             </a:extLst>
           </p:cNvPr>
@@ -3634,7 +5885,18 @@
           <a:bodyPr xmlns:a="http://schemas.openxmlformats.org/drawingml/2006/main" anchor="ctr">
             <a:noAutofit/>
           </a:bodyPr>
-          <a:lstStyle xmlns:a="http://schemas.openxmlformats.org/drawingml/2006/main"/>
+          <a:lstStyle xmlns:a="http://schemas.openxmlformats.org/drawingml/2006/main">
+            <a:defPPr algn="l">
+              <a:defRPr sz="2700" b="1">
+                <a:solidFill>
+                  <a:srgbClr val="161616"/>
+                </a:solidFill>
+                <a:latin typeface="Arial"/>
+                <a:ea typeface="Arial"/>
+                <a:cs typeface="Arial"/>
+              </a:defRPr>
+            </a:defPPr>
+          </a:lstStyle>
           <a:p xmlns:a="http://schemas.openxmlformats.org/drawingml/2006/main">
             <a:pPr algn="l">
               <a:defRPr sz="2700" b="1">
@@ -3662,20 +5924,26 @@
       </p:sp>
       <p:pic>
         <p:nvPicPr>
-          <p:cNvPr id="4" name=""/>
+          <p:cNvPr id="2" name="">
+            <a:extLst xmlns:a="http://schemas.openxmlformats.org/drawingml/2006/main">
+              <a:ext uri="{FF2B5EF4-FFF2-40B4-BE49-F238E27FC236}">
+                <a16:creationId xmlns:a16="http://schemas.microsoft.com/office/drawing/2014/main" id="{9A231744-3001-4599-B06E-5254789DE166}"/>
+              </a:ext>
+            </a:extLst>
+          </p:cNvPr>
           <p:cNvPicPr>
             <a:picLocks xmlns:a="http://schemas.openxmlformats.org/drawingml/2006/main" noChangeAspect="1"/>
           </p:cNvPicPr>
           <p:nvPr/>
         </p:nvPicPr>
         <p:blipFill>
-          <a:blip xmlns:r="http://schemas.openxmlformats.org/officeDocument/2006/relationships" xmlns:a="http://schemas.openxmlformats.org/drawingml/2006/main" r:embed="R34f670d516374e9b"/>
+          <a:blip xmlns:r="http://schemas.openxmlformats.org/officeDocument/2006/relationships" xmlns:a="http://schemas.openxmlformats.org/drawingml/2006/main" r:embed="Re5175685c09f4382"/>
           <a:stretch xmlns:a="http://schemas.openxmlformats.org/drawingml/2006/main"/>
         </p:blipFill>
         <p:spPr>
           <a:xfrm xmlns:a="http://schemas.openxmlformats.org/drawingml/2006/main">
-            <a:off x="571500" y="1534296"/>
-            <a:ext cx="11049000" cy="4503783"/>
+            <a:off x="571500" y="2144622"/>
+            <a:ext cx="11049000" cy="3283131"/>
           </a:xfrm>
           <a:prstGeom xmlns:a="http://schemas.openxmlformats.org/drawingml/2006/main" prst="rect">
             <a:avLst/>
@@ -3685,7 +5953,7 @@
     </p:spTree>
     <p:extLst>
       <p:ext uri="{BB962C8B-B14F-4D97-AF65-F5344CB8AC3E}">
-        <p14:creationId xmlns:p14="http://schemas.microsoft.com/office/powerpoint/2010/main" val="670667975"/>
+        <p14:creationId xmlns:p14="http://schemas.microsoft.com/office/powerpoint/2010/main" val="289041734"/>
       </p:ext>
     </p:extLst>
   </p:cSld>
@@ -3716,7 +5984,7 @@
           <p:cNvPr id="3" name="">
             <a:extLst xmlns:a="http://schemas.openxmlformats.org/drawingml/2006/main">
               <a:ext uri="{FF2B5EF4-FFF2-40B4-BE49-F238E27FC236}">
-                <a16:creationId xmlns:a16="http://schemas.microsoft.com/office/drawing/2014/main" id="{8B1ED0BF-6EFD-424F-87EE-FC048374B8C9}"/>
+                <a16:creationId xmlns:a16="http://schemas.microsoft.com/office/drawing/2014/main" id="{697BDB78-3E24-4A88-8F75-51E5A1F1E2E5}"/>
               </a:ext>
             </a:extLst>
           </p:cNvPr>
@@ -3742,7 +6010,18 @@
           <a:bodyPr xmlns:a="http://schemas.openxmlformats.org/drawingml/2006/main" anchor="ctr">
             <a:noAutofit/>
           </a:bodyPr>
-          <a:lstStyle xmlns:a="http://schemas.openxmlformats.org/drawingml/2006/main"/>
+          <a:lstStyle xmlns:a="http://schemas.openxmlformats.org/drawingml/2006/main">
+            <a:defPPr algn="l">
+              <a:defRPr sz="2700" b="1">
+                <a:solidFill>
+                  <a:srgbClr val="161616"/>
+                </a:solidFill>
+                <a:latin typeface="Arial"/>
+                <a:ea typeface="Arial"/>
+                <a:cs typeface="Arial"/>
+              </a:defRPr>
+            </a:defPPr>
+          </a:lstStyle>
           <a:p xmlns:a="http://schemas.openxmlformats.org/drawingml/2006/main">
             <a:pPr algn="l">
               <a:defRPr sz="2700" b="1">
@@ -3770,14 +6049,20 @@
       </p:sp>
       <p:pic>
         <p:nvPicPr>
-          <p:cNvPr id="4" name=""/>
+          <p:cNvPr id="2" name="">
+            <a:extLst xmlns:a="http://schemas.openxmlformats.org/drawingml/2006/main">
+              <a:ext uri="{FF2B5EF4-FFF2-40B4-BE49-F238E27FC236}">
+                <a16:creationId xmlns:a16="http://schemas.microsoft.com/office/drawing/2014/main" id="{D702327E-8159-4BDE-B735-7E0B1712542E}"/>
+              </a:ext>
+            </a:extLst>
+          </p:cNvPr>
           <p:cNvPicPr>
             <a:picLocks xmlns:a="http://schemas.openxmlformats.org/drawingml/2006/main" noChangeAspect="1"/>
           </p:cNvPicPr>
           <p:nvPr/>
         </p:nvPicPr>
         <p:blipFill>
-          <a:blip xmlns:r="http://schemas.openxmlformats.org/officeDocument/2006/relationships" xmlns:a="http://schemas.openxmlformats.org/drawingml/2006/main" r:embed="R0a8be8497578412c"/>
+          <a:blip xmlns:r="http://schemas.openxmlformats.org/officeDocument/2006/relationships" xmlns:a="http://schemas.openxmlformats.org/drawingml/2006/main" r:embed="Rc18ef497a3ea42ff"/>
           <a:stretch xmlns:a="http://schemas.openxmlformats.org/drawingml/2006/main"/>
         </p:blipFill>
         <p:spPr>
@@ -3793,7 +6078,7 @@
     </p:spTree>
     <p:extLst>
       <p:ext uri="{BB962C8B-B14F-4D97-AF65-F5344CB8AC3E}">
-        <p14:creationId xmlns:p14="http://schemas.microsoft.com/office/powerpoint/2010/main" val="354635978"/>
+        <p14:creationId xmlns:p14="http://schemas.microsoft.com/office/powerpoint/2010/main" val="1819089371"/>
       </p:ext>
     </p:extLst>
   </p:cSld>
@@ -3824,7 +6109,7 @@
           <p:cNvPr id="3" name="">
             <a:extLst xmlns:a="http://schemas.openxmlformats.org/drawingml/2006/main">
               <a:ext uri="{FF2B5EF4-FFF2-40B4-BE49-F238E27FC236}">
-                <a16:creationId xmlns:a16="http://schemas.microsoft.com/office/drawing/2014/main" id="{CF51E322-468C-4081-9041-3E59DAB834C1}"/>
+                <a16:creationId xmlns:a16="http://schemas.microsoft.com/office/drawing/2014/main" id="{3E7CDA0E-EAA2-4D59-8B24-7972583BA394}"/>
               </a:ext>
             </a:extLst>
           </p:cNvPr>
@@ -3850,7 +6135,18 @@
           <a:bodyPr xmlns:a="http://schemas.openxmlformats.org/drawingml/2006/main" anchor="ctr">
             <a:noAutofit/>
           </a:bodyPr>
-          <a:lstStyle xmlns:a="http://schemas.openxmlformats.org/drawingml/2006/main"/>
+          <a:lstStyle xmlns:a="http://schemas.openxmlformats.org/drawingml/2006/main">
+            <a:defPPr algn="l">
+              <a:defRPr sz="2700" b="1">
+                <a:solidFill>
+                  <a:srgbClr val="161616"/>
+                </a:solidFill>
+                <a:latin typeface="Arial"/>
+                <a:ea typeface="Arial"/>
+                <a:cs typeface="Arial"/>
+              </a:defRPr>
+            </a:defPPr>
+          </a:lstStyle>
           <a:p xmlns:a="http://schemas.openxmlformats.org/drawingml/2006/main">
             <a:pPr algn="l">
               <a:defRPr sz="2700" b="1">
@@ -3878,20 +6174,26 @@
       </p:sp>
       <p:pic>
         <p:nvPicPr>
-          <p:cNvPr id="4" name=""/>
+          <p:cNvPr id="2" name="">
+            <a:extLst xmlns:a="http://schemas.openxmlformats.org/drawingml/2006/main">
+              <a:ext uri="{FF2B5EF4-FFF2-40B4-BE49-F238E27FC236}">
+                <a16:creationId xmlns:a16="http://schemas.microsoft.com/office/drawing/2014/main" id="{2299995E-5922-4FD7-8CBD-9E84CCD46397}"/>
+              </a:ext>
+            </a:extLst>
+          </p:cNvPr>
           <p:cNvPicPr>
             <a:picLocks xmlns:a="http://schemas.openxmlformats.org/drawingml/2006/main" noChangeAspect="1"/>
           </p:cNvPicPr>
           <p:nvPr/>
         </p:nvPicPr>
         <p:blipFill>
-          <a:blip xmlns:r="http://schemas.openxmlformats.org/officeDocument/2006/relationships" xmlns:a="http://schemas.openxmlformats.org/drawingml/2006/main" r:embed="R6bae3c4c86b84282"/>
+          <a:blip xmlns:r="http://schemas.openxmlformats.org/officeDocument/2006/relationships" xmlns:a="http://schemas.openxmlformats.org/drawingml/2006/main" r:embed="R8e2fe2c01158486b"/>
           <a:stretch xmlns:a="http://schemas.openxmlformats.org/drawingml/2006/main"/>
         </p:blipFill>
         <p:spPr>
           <a:xfrm xmlns:a="http://schemas.openxmlformats.org/drawingml/2006/main">
-            <a:off x="2319908" y="1285875"/>
-            <a:ext cx="7552184" cy="5000625"/>
+            <a:off x="3214981" y="1285875"/>
+            <a:ext cx="5762037" cy="5000625"/>
           </a:xfrm>
           <a:prstGeom xmlns:a="http://schemas.openxmlformats.org/drawingml/2006/main" prst="rect">
             <a:avLst/>
@@ -3901,7 +6203,7 @@
     </p:spTree>
     <p:extLst>
       <p:ext uri="{BB962C8B-B14F-4D97-AF65-F5344CB8AC3E}">
-        <p14:creationId xmlns:p14="http://schemas.microsoft.com/office/powerpoint/2010/main" val="1316292344"/>
+        <p14:creationId xmlns:p14="http://schemas.microsoft.com/office/powerpoint/2010/main" val="370177494"/>
       </p:ext>
     </p:extLst>
   </p:cSld>
@@ -3949,16 +6251,16 @@
         <a:srgbClr val="96607D"/>
       </a:folHlink>
     </a:clrScheme>
-    <a:fontScheme name="Office">
+    <a:fontScheme name="">
       <a:majorFont>
-        <a:latin typeface="Calibri Light"/>
-        <a:ea typeface="Calibri Light"/>
-        <a:cs typeface="Calibri Light"/>
+        <a:latin typeface="Aptos"/>
+        <a:ea typeface=""/>
+        <a:cs typeface=""/>
       </a:majorFont>
       <a:minorFont>
-        <a:latin typeface="Calibri"/>
-        <a:ea typeface="Calibri"/>
-        <a:cs typeface="Calibri"/>
+        <a:latin typeface="Aptos"/>
+        <a:ea typeface=""/>
+        <a:cs typeface=""/>
       </a:minorFont>
     </a:fontScheme>
     <a:fmtScheme name="ChatGPT">
